--- a/走近英国.pptx
+++ b/走近英国.pptx
@@ -3130,14 +3130,14 @@
         </p:nvSpPr>
         <p:spPr>
           <a:xfrm>
-            <a:off x="0" y="0"/>
-            <a:ext cx="12191695" cy="6858000"/>
+            <a:off x="0" y="4572000"/>
+            <a:ext cx="12191695" cy="2286000"/>
           </a:xfrm>
           <a:prstGeom prst="rect">
             <a:avLst/>
           </a:prstGeom>
           <a:solidFill>
-            <a:srgbClr val="122037">
+            <a:srgbClr val="1A1C20">
               <a:alpha val="70000"/>
             </a:srgbClr>
           </a:solidFill>
@@ -3169,14 +3169,104 @@
       </p:sp>
       <p:sp>
         <p:nvSpPr>
-          <p:cNvPr id="4" name="TextBox 3"/>
+          <p:cNvPr id="4" name="Rectangle 3"/>
+          <p:cNvSpPr/>
+          <p:nvPr/>
+        </p:nvSpPr>
+        <p:spPr>
+          <a:xfrm>
+            <a:off x="0" y="3657600"/>
+            <a:ext cx="12191695" cy="914400"/>
+          </a:xfrm>
+          <a:prstGeom prst="rect">
+            <a:avLst/>
+          </a:prstGeom>
+          <a:solidFill>
+            <a:srgbClr val="1A1C20">
+              <a:alpha val="40000"/>
+            </a:srgbClr>
+          </a:solidFill>
+          <a:ln>
+            <a:noFill/>
+          </a:ln>
+        </p:spPr>
+        <p:style>
+          <a:lnRef idx="1">
+            <a:schemeClr val="accent1"/>
+          </a:lnRef>
+          <a:fillRef idx="3">
+            <a:schemeClr val="accent1"/>
+          </a:fillRef>
+          <a:effectRef idx="2">
+            <a:schemeClr val="accent1"/>
+          </a:effectRef>
+          <a:fontRef idx="minor">
+            <a:schemeClr val="lt1"/>
+          </a:fontRef>
+        </p:style>
+        <p:txBody>
+          <a:bodyPr rtlCol="0" anchor="ctr"/>
+          <a:lstStyle/>
+          <a:p>
+            <a:pPr algn="ctr"/>
+          </a:p>
+        </p:txBody>
+      </p:sp>
+      <p:sp>
+        <p:nvSpPr>
+          <p:cNvPr id="5" name="Rectangle 4"/>
+          <p:cNvSpPr/>
+          <p:nvPr/>
+        </p:nvSpPr>
+        <p:spPr>
+          <a:xfrm>
+            <a:off x="0" y="3200400"/>
+            <a:ext cx="12191695" cy="457200"/>
+          </a:xfrm>
+          <a:prstGeom prst="rect">
+            <a:avLst/>
+          </a:prstGeom>
+          <a:solidFill>
+            <a:srgbClr val="1A1C20">
+              <a:alpha val="20000"/>
+            </a:srgbClr>
+          </a:solidFill>
+          <a:ln>
+            <a:noFill/>
+          </a:ln>
+        </p:spPr>
+        <p:style>
+          <a:lnRef idx="1">
+            <a:schemeClr val="accent1"/>
+          </a:lnRef>
+          <a:fillRef idx="3">
+            <a:schemeClr val="accent1"/>
+          </a:fillRef>
+          <a:effectRef idx="2">
+            <a:schemeClr val="accent1"/>
+          </a:effectRef>
+          <a:fontRef idx="minor">
+            <a:schemeClr val="lt1"/>
+          </a:fontRef>
+        </p:style>
+        <p:txBody>
+          <a:bodyPr rtlCol="0" anchor="ctr"/>
+          <a:lstStyle/>
+          <a:p>
+            <a:pPr algn="ctr"/>
+          </a:p>
+        </p:txBody>
+      </p:sp>
+      <p:sp>
+        <p:nvSpPr>
+          <p:cNvPr id="6" name="TextBox 5"/>
           <p:cNvSpPr txBox="1"/>
           <p:nvPr/>
         </p:nvSpPr>
         <p:spPr>
           <a:xfrm>
-            <a:off x="1371600" y="1600200"/>
-            <a:ext cx="9448495" cy="640080"/>
+            <a:off x="1371600" y="2857500"/>
+            <a:ext cx="9448495" cy="563880"/>
           </a:xfrm>
           <a:prstGeom prst="rect">
             <a:avLst/>
@@ -3190,11 +3280,14 @@
           <a:lstStyle/>
           <a:p>
             <a:pPr algn="ctr">
-              <a:defRPr sz="3600" b="0">
+              <a:lnSpc>
+                <a:spcPct val="120000"/>
+              </a:lnSpc>
+              <a:defRPr sz="2800" b="0">
                 <a:solidFill>
                   <a:srgbClr val="F0EDE8"/>
                 </a:solidFill>
-                <a:latin typeface="Outfit"/>
+                <a:latin typeface="Arial"/>
               </a:defRPr>
             </a:pPr>
             <a:r>
@@ -3205,14 +3298,14 @@
       </p:sp>
       <p:sp>
         <p:nvSpPr>
-          <p:cNvPr id="5" name="TextBox 4"/>
+          <p:cNvPr id="7" name="TextBox 6"/>
           <p:cNvSpPr txBox="1"/>
           <p:nvPr/>
         </p:nvSpPr>
         <p:spPr>
           <a:xfrm>
-            <a:off x="1371600" y="1943100"/>
-            <a:ext cx="9448495" cy="944880"/>
+            <a:off x="1371600" y="3467100"/>
+            <a:ext cx="9448495" cy="960120"/>
           </a:xfrm>
           <a:prstGeom prst="rect">
             <a:avLst/>
@@ -3226,11 +3319,14 @@
           <a:lstStyle/>
           <a:p>
             <a:pPr algn="ctr">
-              <a:defRPr sz="6000" b="1">
+              <a:lnSpc>
+                <a:spcPct val="120000"/>
+              </a:lnSpc>
+              <a:defRPr sz="5400" b="1">
                 <a:solidFill>
                   <a:srgbClr val="F0EDE8"/>
                 </a:solidFill>
-                <a:latin typeface="Outfit"/>
+                <a:latin typeface="Arial"/>
               </a:defRPr>
             </a:pPr>
             <a:r>
@@ -3241,14 +3337,14 @@
       </p:sp>
       <p:sp>
         <p:nvSpPr>
-          <p:cNvPr id="6" name="TextBox 5"/>
+          <p:cNvPr id="8" name="TextBox 7"/>
           <p:cNvSpPr txBox="1"/>
           <p:nvPr/>
         </p:nvSpPr>
         <p:spPr>
           <a:xfrm>
-            <a:off x="1371600" y="2727960"/>
-            <a:ext cx="9448495" cy="487680"/>
+            <a:off x="1371600" y="4610100"/>
+            <a:ext cx="9448495" cy="441959"/>
           </a:xfrm>
           <a:prstGeom prst="rect">
             <a:avLst/>
@@ -3262,11 +3358,14 @@
           <a:lstStyle/>
           <a:p>
             <a:pPr algn="ctr">
-              <a:defRPr sz="2400" b="0">
-                <a:solidFill>
-                  <a:srgbClr val="F0EDE8"/>
-                </a:solidFill>
-                <a:latin typeface="Outfit"/>
+              <a:lnSpc>
+                <a:spcPct val="120000"/>
+              </a:lnSpc>
+              <a:defRPr sz="2000" b="0">
+                <a:solidFill>
+                  <a:srgbClr val="C0CCD8"/>
+                </a:solidFill>
+                <a:latin typeface="Arial"/>
               </a:defRPr>
             </a:pPr>
             <a:r>
@@ -3277,14 +3376,14 @@
       </p:sp>
       <p:sp>
         <p:nvSpPr>
-          <p:cNvPr id="7" name="TextBox 6"/>
+          <p:cNvPr id="9" name="TextBox 8"/>
           <p:cNvSpPr txBox="1"/>
           <p:nvPr/>
         </p:nvSpPr>
         <p:spPr>
           <a:xfrm>
-            <a:off x="1371600" y="2987040"/>
-            <a:ext cx="9448495" cy="436880"/>
+            <a:off x="1371600" y="5097780"/>
+            <a:ext cx="9448495" cy="411479"/>
           </a:xfrm>
           <a:prstGeom prst="rect">
             <a:avLst/>
@@ -3298,11 +3397,14 @@
           <a:lstStyle/>
           <a:p>
             <a:pPr algn="ctr">
-              <a:defRPr sz="2000" b="0">
-                <a:solidFill>
-                  <a:srgbClr val="F0EDE8"/>
-                </a:solidFill>
-                <a:latin typeface="Outfit"/>
+              <a:lnSpc>
+                <a:spcPct val="120000"/>
+              </a:lnSpc>
+              <a:defRPr sz="1800" b="0">
+                <a:solidFill>
+                  <a:srgbClr val="A0AEBE"/>
+                </a:solidFill>
+                <a:latin typeface="Arial"/>
               </a:defRPr>
             </a:pPr>
             <a:r>
@@ -3361,15 +3463,15 @@
         </p:nvSpPr>
         <p:spPr>
           <a:xfrm>
-            <a:off x="0" y="0"/>
-            <a:ext cx="12191695" cy="6858000"/>
+            <a:off x="0" y="4572000"/>
+            <a:ext cx="12191695" cy="2286000"/>
           </a:xfrm>
           <a:prstGeom prst="rect">
             <a:avLst/>
           </a:prstGeom>
           <a:solidFill>
-            <a:srgbClr val="122037">
-              <a:alpha val="65000"/>
+            <a:srgbClr val="1A1C20">
+              <a:alpha val="70000"/>
             </a:srgbClr>
           </a:solidFill>
           <a:ln>
@@ -3400,93 +3502,21 @@
       </p:sp>
       <p:sp>
         <p:nvSpPr>
-          <p:cNvPr id="4" name="TextBox 3"/>
-          <p:cNvSpPr txBox="1"/>
-          <p:nvPr/>
-        </p:nvSpPr>
-        <p:spPr>
-          <a:xfrm>
-            <a:off x="1371600" y="548640"/>
-            <a:ext cx="9448495" cy="822960"/>
-          </a:xfrm>
-          <a:prstGeom prst="rect">
-            <a:avLst/>
-          </a:prstGeom>
-          <a:noFill/>
-        </p:spPr>
-        <p:txBody>
-          <a:bodyPr wrap="square">
-            <a:spAutoFit/>
-          </a:bodyPr>
-          <a:lstStyle/>
-          <a:p>
-            <a:pPr algn="ctr">
-              <a:defRPr sz="3600" b="1">
-                <a:solidFill>
-                  <a:srgbClr val="F0EDE8"/>
-                </a:solidFill>
-                <a:latin typeface="Outfit"/>
-              </a:defRPr>
-            </a:pPr>
-            <a:r>
-              <a:t>🇬🇧 英国在世界中的地位</a:t>
-            </a:r>
-          </a:p>
-        </p:txBody>
-      </p:sp>
-      <p:sp>
-        <p:nvSpPr>
-          <p:cNvPr id="5" name="TextBox 4"/>
-          <p:cNvSpPr txBox="1"/>
-          <p:nvPr/>
-        </p:nvSpPr>
-        <p:spPr>
-          <a:xfrm>
-            <a:off x="1371600" y="1234440"/>
-            <a:ext cx="9448495" cy="457200"/>
-          </a:xfrm>
-          <a:prstGeom prst="rect">
-            <a:avLst/>
-          </a:prstGeom>
-          <a:noFill/>
-        </p:spPr>
-        <p:txBody>
-          <a:bodyPr wrap="square">
-            <a:spAutoFit/>
-          </a:bodyPr>
-          <a:lstStyle/>
-          <a:p>
-            <a:pPr algn="ctr">
-              <a:defRPr sz="1600" b="0">
-                <a:solidFill>
-                  <a:srgbClr val="F0EDE8"/>
-                </a:solidFill>
-                <a:latin typeface="Outfit"/>
-              </a:defRPr>
-            </a:pPr>
-            <a:r>
-              <a:t>联合国安理会五常 · 北约 · G7 · G20 · 英联邦</a:t>
-            </a:r>
-          </a:p>
-        </p:txBody>
-      </p:sp>
-      <p:sp>
-        <p:nvSpPr>
-          <p:cNvPr id="6" name="Rectangle 5"/>
+          <p:cNvPr id="4" name="Rectangle 3"/>
           <p:cNvSpPr/>
           <p:nvPr/>
         </p:nvSpPr>
         <p:spPr>
           <a:xfrm>
-            <a:off x="1371600" y="2468880"/>
-            <a:ext cx="4587087" cy="3200400"/>
+            <a:off x="0" y="3657600"/>
+            <a:ext cx="12191695" cy="914400"/>
           </a:xfrm>
           <a:prstGeom prst="rect">
             <a:avLst/>
           </a:prstGeom>
           <a:solidFill>
-            <a:srgbClr val="283241">
-              <a:alpha val="65000"/>
+            <a:srgbClr val="1A1C20">
+              <a:alpha val="40000"/>
             </a:srgbClr>
           </a:solidFill>
           <a:ln>
@@ -3517,14 +3547,59 @@
       </p:sp>
       <p:sp>
         <p:nvSpPr>
-          <p:cNvPr id="7" name="TextBox 6"/>
+          <p:cNvPr id="5" name="Rectangle 4"/>
+          <p:cNvSpPr/>
+          <p:nvPr/>
+        </p:nvSpPr>
+        <p:spPr>
+          <a:xfrm>
+            <a:off x="0" y="3200400"/>
+            <a:ext cx="12191695" cy="457200"/>
+          </a:xfrm>
+          <a:prstGeom prst="rect">
+            <a:avLst/>
+          </a:prstGeom>
+          <a:solidFill>
+            <a:srgbClr val="1A1C20">
+              <a:alpha val="20000"/>
+            </a:srgbClr>
+          </a:solidFill>
+          <a:ln>
+            <a:noFill/>
+          </a:ln>
+        </p:spPr>
+        <p:style>
+          <a:lnRef idx="1">
+            <a:schemeClr val="accent1"/>
+          </a:lnRef>
+          <a:fillRef idx="3">
+            <a:schemeClr val="accent1"/>
+          </a:fillRef>
+          <a:effectRef idx="2">
+            <a:schemeClr val="accent1"/>
+          </a:effectRef>
+          <a:fontRef idx="minor">
+            <a:schemeClr val="lt1"/>
+          </a:fontRef>
+        </p:style>
+        <p:txBody>
+          <a:bodyPr rtlCol="0" anchor="ctr"/>
+          <a:lstStyle/>
+          <a:p>
+            <a:pPr algn="ctr"/>
+          </a:p>
+        </p:txBody>
+      </p:sp>
+      <p:sp>
+        <p:nvSpPr>
+          <p:cNvPr id="6" name="TextBox 5"/>
           <p:cNvSpPr txBox="1"/>
           <p:nvPr/>
         </p:nvSpPr>
         <p:spPr>
           <a:xfrm>
-            <a:off x="1508760" y="2560320"/>
-            <a:ext cx="4312767" cy="365760"/>
+            <a:off x="1097280" y="457200"/>
+            <a:ext cx="9601200" cy="640080"/>
           </a:xfrm>
           <a:prstGeom prst="rect">
             <a:avLst/>
@@ -3538,14 +3613,140 @@
           <a:lstStyle/>
           <a:p>
             <a:pPr algn="l">
-              <a:defRPr sz="1600" b="1">
-                <a:solidFill>
-                  <a:srgbClr val="B8D8EE"/>
-                </a:solidFill>
-                <a:latin typeface="Outfit"/>
+              <a:lnSpc>
+                <a:spcPct val="120000"/>
+              </a:lnSpc>
+              <a:defRPr sz="3600" b="1">
+                <a:solidFill>
+                  <a:srgbClr val="F0EDE8"/>
+                </a:solidFill>
+                <a:latin typeface="Arial"/>
               </a:defRPr>
             </a:pPr>
             <a:r>
+              <a:t>🇬🇧 英国的世界地位</a:t>
+            </a:r>
+          </a:p>
+        </p:txBody>
+      </p:sp>
+      <p:sp>
+        <p:nvSpPr>
+          <p:cNvPr id="7" name="TextBox 6"/>
+          <p:cNvSpPr txBox="1"/>
+          <p:nvPr/>
+        </p:nvSpPr>
+        <p:spPr>
+          <a:xfrm>
+            <a:off x="1097280" y="1005840"/>
+            <a:ext cx="9601200" cy="365760"/>
+          </a:xfrm>
+          <a:prstGeom prst="rect">
+            <a:avLst/>
+          </a:prstGeom>
+          <a:noFill/>
+        </p:spPr>
+        <p:txBody>
+          <a:bodyPr wrap="square">
+            <a:spAutoFit/>
+          </a:bodyPr>
+          <a:lstStyle/>
+          <a:p>
+            <a:pPr algn="l">
+              <a:lnSpc>
+                <a:spcPct val="120000"/>
+              </a:lnSpc>
+              <a:defRPr sz="1400" b="0">
+                <a:solidFill>
+                  <a:srgbClr val="A0AEBE"/>
+                </a:solidFill>
+                <a:latin typeface="Arial"/>
+              </a:defRPr>
+            </a:pPr>
+            <a:r>
+              <a:t>联合国安理会五常 · 北约 · G7 · G20 · 英联邦</a:t>
+            </a:r>
+          </a:p>
+        </p:txBody>
+      </p:sp>
+      <p:sp>
+        <p:nvSpPr>
+          <p:cNvPr id="8" name="Rectangle 7"/>
+          <p:cNvSpPr/>
+          <p:nvPr/>
+        </p:nvSpPr>
+        <p:spPr>
+          <a:xfrm>
+            <a:off x="1097280" y="4114800"/>
+            <a:ext cx="4572000" cy="1828800"/>
+          </a:xfrm>
+          <a:prstGeom prst="rect">
+            <a:avLst/>
+          </a:prstGeom>
+          <a:solidFill>
+            <a:srgbClr val="282D3A">
+              <a:alpha val="55000"/>
+            </a:srgbClr>
+          </a:solidFill>
+          <a:ln>
+            <a:noFill/>
+          </a:ln>
+        </p:spPr>
+        <p:style>
+          <a:lnRef idx="1">
+            <a:schemeClr val="accent1"/>
+          </a:lnRef>
+          <a:fillRef idx="3">
+            <a:schemeClr val="accent1"/>
+          </a:fillRef>
+          <a:effectRef idx="2">
+            <a:schemeClr val="accent1"/>
+          </a:effectRef>
+          <a:fontRef idx="minor">
+            <a:schemeClr val="lt1"/>
+          </a:fontRef>
+        </p:style>
+        <p:txBody>
+          <a:bodyPr rtlCol="0" anchor="ctr"/>
+          <a:lstStyle/>
+          <a:p>
+            <a:pPr algn="ctr"/>
+          </a:p>
+        </p:txBody>
+      </p:sp>
+      <p:sp>
+        <p:nvSpPr>
+          <p:cNvPr id="9" name="TextBox 8"/>
+          <p:cNvSpPr txBox="1"/>
+          <p:nvPr/>
+        </p:nvSpPr>
+        <p:spPr>
+          <a:xfrm>
+            <a:off x="1325880" y="4251960"/>
+            <a:ext cx="4114800" cy="320040"/>
+          </a:xfrm>
+          <a:prstGeom prst="rect">
+            <a:avLst/>
+          </a:prstGeom>
+          <a:noFill/>
+        </p:spPr>
+        <p:txBody>
+          <a:bodyPr wrap="square">
+            <a:spAutoFit/>
+          </a:bodyPr>
+          <a:lstStyle/>
+          <a:p>
+            <a:pPr algn="l">
+              <a:lnSpc>
+                <a:spcPct val="120000"/>
+              </a:lnSpc>
+              <a:defRPr sz="1400" b="1">
+                <a:solidFill>
+                  <a:srgbClr val="F0EDE8"/>
+                </a:solidFill>
+                <a:latin typeface="Arial"/>
+              </a:defRPr>
+            </a:pPr>
+            <a:r>
               <a:t>🌍 全球影响</a:t>
             </a:r>
           </a:p>
@@ -3553,14 +3754,14 @@
       </p:sp>
       <p:sp>
         <p:nvSpPr>
-          <p:cNvPr id="8" name="TextBox 7"/>
+          <p:cNvPr id="10" name="TextBox 9"/>
           <p:cNvSpPr txBox="1"/>
           <p:nvPr/>
         </p:nvSpPr>
         <p:spPr>
           <a:xfrm>
-            <a:off x="1508760" y="2880360"/>
-            <a:ext cx="4312767" cy="2697480"/>
+            <a:off x="1325880" y="4617720"/>
+            <a:ext cx="4114800" cy="1188720"/>
           </a:xfrm>
           <a:prstGeom prst="rect">
             <a:avLst/>
@@ -3577,23 +3778,138 @@
               <a:lnSpc>
                 <a:spcPct val="140000"/>
               </a:lnSpc>
-              <a:defRPr sz="1300">
+              <a:defRPr sz="1200" b="0">
                 <a:solidFill>
                   <a:srgbClr val="F0EDE8"/>
                 </a:solidFill>
-                <a:latin typeface="Outfit"/>
+                <a:latin typeface="Arial"/>
               </a:defRPr>
             </a:pPr>
             <a:r>
-              <a:t>BBC覆盖3.5亿用户</a:t>
-            </a:r>
-            <a:br/>
-            <a:r>
-              <a:t>英语为最广泛第二语言</a:t>
-            </a:r>
-            <a:br/>
-            <a:r>
-              <a:t>英联邦56国26亿人口</a:t>
+              <a:t>BBC覆盖3.5亿用户 · 英语是世界上最广泛学习的第二语言</a:t>
+            </a:r>
+          </a:p>
+        </p:txBody>
+      </p:sp>
+      <p:sp>
+        <p:nvSpPr>
+          <p:cNvPr id="11" name="Rectangle 10"/>
+          <p:cNvSpPr/>
+          <p:nvPr/>
+        </p:nvSpPr>
+        <p:spPr>
+          <a:xfrm>
+            <a:off x="6035040" y="4114800"/>
+            <a:ext cx="4572000" cy="1828800"/>
+          </a:xfrm>
+          <a:prstGeom prst="rect">
+            <a:avLst/>
+          </a:prstGeom>
+          <a:solidFill>
+            <a:srgbClr val="282D3A">
+              <a:alpha val="55000"/>
+            </a:srgbClr>
+          </a:solidFill>
+          <a:ln>
+            <a:noFill/>
+          </a:ln>
+        </p:spPr>
+        <p:style>
+          <a:lnRef idx="1">
+            <a:schemeClr val="accent1"/>
+          </a:lnRef>
+          <a:fillRef idx="3">
+            <a:schemeClr val="accent1"/>
+          </a:fillRef>
+          <a:effectRef idx="2">
+            <a:schemeClr val="accent1"/>
+          </a:effectRef>
+          <a:fontRef idx="minor">
+            <a:schemeClr val="lt1"/>
+          </a:fontRef>
+        </p:style>
+        <p:txBody>
+          <a:bodyPr rtlCol="0" anchor="ctr"/>
+          <a:lstStyle/>
+          <a:p>
+            <a:pPr algn="ctr"/>
+          </a:p>
+        </p:txBody>
+      </p:sp>
+      <p:sp>
+        <p:nvSpPr>
+          <p:cNvPr id="12" name="TextBox 11"/>
+          <p:cNvSpPr txBox="1"/>
+          <p:nvPr/>
+        </p:nvSpPr>
+        <p:spPr>
+          <a:xfrm>
+            <a:off x="6263640" y="4251960"/>
+            <a:ext cx="4114800" cy="320040"/>
+          </a:xfrm>
+          <a:prstGeom prst="rect">
+            <a:avLst/>
+          </a:prstGeom>
+          <a:noFill/>
+        </p:spPr>
+        <p:txBody>
+          <a:bodyPr wrap="square">
+            <a:spAutoFit/>
+          </a:bodyPr>
+          <a:lstStyle/>
+          <a:p>
+            <a:pPr algn="l">
+              <a:lnSpc>
+                <a:spcPct val="120000"/>
+              </a:lnSpc>
+              <a:defRPr sz="1400" b="1">
+                <a:solidFill>
+                  <a:srgbClr val="F0EDE8"/>
+                </a:solidFill>
+                <a:latin typeface="Arial"/>
+              </a:defRPr>
+            </a:pPr>
+            <a:r>
+              <a:t>🤝 英联邦</a:t>
+            </a:r>
+          </a:p>
+        </p:txBody>
+      </p:sp>
+      <p:sp>
+        <p:nvSpPr>
+          <p:cNvPr id="13" name="TextBox 12"/>
+          <p:cNvSpPr txBox="1"/>
+          <p:nvPr/>
+        </p:nvSpPr>
+        <p:spPr>
+          <a:xfrm>
+            <a:off x="6263640" y="4617720"/>
+            <a:ext cx="4114800" cy="1188720"/>
+          </a:xfrm>
+          <a:prstGeom prst="rect">
+            <a:avLst/>
+          </a:prstGeom>
+          <a:noFill/>
+        </p:spPr>
+        <p:txBody>
+          <a:bodyPr wrap="square">
+            <a:spAutoFit/>
+          </a:bodyPr>
+          <a:lstStyle/>
+          <a:p>
+            <a:pPr algn="l">
+              <a:lnSpc>
+                <a:spcPct val="140000"/>
+              </a:lnSpc>
+              <a:defRPr sz="1200" b="0">
+                <a:solidFill>
+                  <a:srgbClr val="F0EDE8"/>
+                </a:solidFill>
+                <a:latin typeface="Arial"/>
+              </a:defRPr>
+            </a:pPr>
+            <a:r>
+              <a:t>56个成员国 · 26亿人口 · 横跨六大洲</a:t>
             </a:r>
           </a:p>
         </p:txBody>
@@ -3648,14 +3964,14 @@
         </p:nvSpPr>
         <p:spPr>
           <a:xfrm>
-            <a:off x="0" y="0"/>
-            <a:ext cx="12191695" cy="6858000"/>
+            <a:off x="0" y="4572000"/>
+            <a:ext cx="12191695" cy="2286000"/>
           </a:xfrm>
           <a:prstGeom prst="rect">
             <a:avLst/>
           </a:prstGeom>
           <a:solidFill>
-            <a:srgbClr val="122037">
+            <a:srgbClr val="1A1C20">
               <a:alpha val="70000"/>
             </a:srgbClr>
           </a:solidFill>
@@ -3687,14 +4003,104 @@
       </p:sp>
       <p:sp>
         <p:nvSpPr>
-          <p:cNvPr id="4" name="TextBox 3"/>
+          <p:cNvPr id="4" name="Rectangle 3"/>
+          <p:cNvSpPr/>
+          <p:nvPr/>
+        </p:nvSpPr>
+        <p:spPr>
+          <a:xfrm>
+            <a:off x="0" y="3657600"/>
+            <a:ext cx="12191695" cy="914400"/>
+          </a:xfrm>
+          <a:prstGeom prst="rect">
+            <a:avLst/>
+          </a:prstGeom>
+          <a:solidFill>
+            <a:srgbClr val="1A1C20">
+              <a:alpha val="40000"/>
+            </a:srgbClr>
+          </a:solidFill>
+          <a:ln>
+            <a:noFill/>
+          </a:ln>
+        </p:spPr>
+        <p:style>
+          <a:lnRef idx="1">
+            <a:schemeClr val="accent1"/>
+          </a:lnRef>
+          <a:fillRef idx="3">
+            <a:schemeClr val="accent1"/>
+          </a:fillRef>
+          <a:effectRef idx="2">
+            <a:schemeClr val="accent1"/>
+          </a:effectRef>
+          <a:fontRef idx="minor">
+            <a:schemeClr val="lt1"/>
+          </a:fontRef>
+        </p:style>
+        <p:txBody>
+          <a:bodyPr rtlCol="0" anchor="ctr"/>
+          <a:lstStyle/>
+          <a:p>
+            <a:pPr algn="ctr"/>
+          </a:p>
+        </p:txBody>
+      </p:sp>
+      <p:sp>
+        <p:nvSpPr>
+          <p:cNvPr id="5" name="Rectangle 4"/>
+          <p:cNvSpPr/>
+          <p:nvPr/>
+        </p:nvSpPr>
+        <p:spPr>
+          <a:xfrm>
+            <a:off x="0" y="3200400"/>
+            <a:ext cx="12191695" cy="457200"/>
+          </a:xfrm>
+          <a:prstGeom prst="rect">
+            <a:avLst/>
+          </a:prstGeom>
+          <a:solidFill>
+            <a:srgbClr val="1A1C20">
+              <a:alpha val="20000"/>
+            </a:srgbClr>
+          </a:solidFill>
+          <a:ln>
+            <a:noFill/>
+          </a:ln>
+        </p:spPr>
+        <p:style>
+          <a:lnRef idx="1">
+            <a:schemeClr val="accent1"/>
+          </a:lnRef>
+          <a:fillRef idx="3">
+            <a:schemeClr val="accent1"/>
+          </a:fillRef>
+          <a:effectRef idx="2">
+            <a:schemeClr val="accent1"/>
+          </a:effectRef>
+          <a:fontRef idx="minor">
+            <a:schemeClr val="lt1"/>
+          </a:fontRef>
+        </p:style>
+        <p:txBody>
+          <a:bodyPr rtlCol="0" anchor="ctr"/>
+          <a:lstStyle/>
+          <a:p>
+            <a:pPr algn="ctr"/>
+          </a:p>
+        </p:txBody>
+      </p:sp>
+      <p:sp>
+        <p:nvSpPr>
+          <p:cNvPr id="6" name="TextBox 5"/>
           <p:cNvSpPr txBox="1"/>
           <p:nvPr/>
         </p:nvSpPr>
         <p:spPr>
           <a:xfrm>
-            <a:off x="1371600" y="1051560"/>
-            <a:ext cx="9448495" cy="640080"/>
+            <a:off x="1371600" y="2446020"/>
+            <a:ext cx="9448495" cy="563880"/>
           </a:xfrm>
           <a:prstGeom prst="rect">
             <a:avLst/>
@@ -3708,11 +4114,14 @@
           <a:lstStyle/>
           <a:p>
             <a:pPr algn="ctr">
-              <a:defRPr sz="3600" b="0">
+              <a:lnSpc>
+                <a:spcPct val="120000"/>
+              </a:lnSpc>
+              <a:defRPr sz="2800" b="0">
                 <a:solidFill>
                   <a:srgbClr val="F0EDE8"/>
                 </a:solidFill>
-                <a:latin typeface="Outfit"/>
+                <a:latin typeface="Arial"/>
               </a:defRPr>
             </a:pPr>
             <a:r>
@@ -3723,14 +4132,14 @@
       </p:sp>
       <p:sp>
         <p:nvSpPr>
-          <p:cNvPr id="5" name="TextBox 4"/>
+          <p:cNvPr id="7" name="TextBox 6"/>
           <p:cNvSpPr txBox="1"/>
           <p:nvPr/>
         </p:nvSpPr>
         <p:spPr>
           <a:xfrm>
-            <a:off x="1371600" y="1394460"/>
-            <a:ext cx="9448495" cy="944880"/>
+            <a:off x="1371600" y="3055620"/>
+            <a:ext cx="9448495" cy="960120"/>
           </a:xfrm>
           <a:prstGeom prst="rect">
             <a:avLst/>
@@ -3744,11 +4153,14 @@
           <a:lstStyle/>
           <a:p>
             <a:pPr algn="ctr">
-              <a:defRPr sz="6000" b="1">
+              <a:lnSpc>
+                <a:spcPct val="120000"/>
+              </a:lnSpc>
+              <a:defRPr sz="5400" b="1">
                 <a:solidFill>
                   <a:srgbClr val="F0EDE8"/>
                 </a:solidFill>
-                <a:latin typeface="Outfit"/>
+                <a:latin typeface="Arial"/>
               </a:defRPr>
             </a:pPr>
             <a:r>
@@ -3759,14 +4171,14 @@
       </p:sp>
       <p:sp>
         <p:nvSpPr>
-          <p:cNvPr id="6" name="TextBox 5"/>
+          <p:cNvPr id="8" name="TextBox 7"/>
           <p:cNvSpPr txBox="1"/>
           <p:nvPr/>
         </p:nvSpPr>
         <p:spPr>
           <a:xfrm>
-            <a:off x="1371600" y="2179319"/>
-            <a:ext cx="9448495" cy="411480"/>
+            <a:off x="1371600" y="4198620"/>
+            <a:ext cx="9448495" cy="396240"/>
           </a:xfrm>
           <a:prstGeom prst="rect">
             <a:avLst/>
@@ -3780,11 +4192,14 @@
           <a:lstStyle/>
           <a:p>
             <a:pPr algn="ctr">
-              <a:defRPr sz="1800" b="0">
-                <a:solidFill>
-                  <a:srgbClr val="F0EDE8"/>
-                </a:solidFill>
-                <a:latin typeface="Outfit"/>
+              <a:lnSpc>
+                <a:spcPct val="120000"/>
+              </a:lnSpc>
+              <a:defRPr sz="1700" b="0">
+                <a:solidFill>
+                  <a:srgbClr val="C0CCD8"/>
+                </a:solidFill>
+                <a:latin typeface="Arial"/>
               </a:defRPr>
             </a:pPr>
             <a:r>
@@ -3795,14 +4210,14 @@
       </p:sp>
       <p:sp>
         <p:nvSpPr>
-          <p:cNvPr id="7" name="TextBox 6"/>
+          <p:cNvPr id="9" name="TextBox 8"/>
           <p:cNvSpPr txBox="1"/>
           <p:nvPr/>
         </p:nvSpPr>
         <p:spPr>
           <a:xfrm>
-            <a:off x="1371600" y="2396489"/>
-            <a:ext cx="9448495" cy="411480"/>
+            <a:off x="1371600" y="4640580"/>
+            <a:ext cx="9448495" cy="396240"/>
           </a:xfrm>
           <a:prstGeom prst="rect">
             <a:avLst/>
@@ -3816,29 +4231,32 @@
           <a:lstStyle/>
           <a:p>
             <a:pPr algn="ctr">
-              <a:defRPr sz="1800" b="0">
-                <a:solidFill>
-                  <a:srgbClr val="F0EDE8"/>
-                </a:solidFill>
-                <a:latin typeface="Outfit"/>
+              <a:lnSpc>
+                <a:spcPct val="120000"/>
+              </a:lnSpc>
+              <a:defRPr sz="1700" b="0">
+                <a:solidFill>
+                  <a:srgbClr val="C0CCD8"/>
+                </a:solidFill>
+                <a:latin typeface="Arial"/>
               </a:defRPr>
             </a:pPr>
             <a:r>
-              <a:t>英国，一个将古老与现代完美融合的国家。</a:t>
-            </a:r>
-          </a:p>
-        </p:txBody>
-      </p:sp>
-      <p:sp>
-        <p:nvSpPr>
-          <p:cNvPr id="8" name="TextBox 7"/>
+              <a:t>古老传统与现代创新，完美融合。</a:t>
+            </a:r>
+          </a:p>
+        </p:txBody>
+      </p:sp>
+      <p:sp>
+        <p:nvSpPr>
+          <p:cNvPr id="10" name="TextBox 9"/>
           <p:cNvSpPr txBox="1"/>
           <p:nvPr/>
         </p:nvSpPr>
         <p:spPr>
           <a:xfrm>
-            <a:off x="1371600" y="2887979"/>
-            <a:ext cx="9448495" cy="487680"/>
+            <a:off x="1371600" y="5219700"/>
+            <a:ext cx="9448495" cy="472439"/>
           </a:xfrm>
           <a:prstGeom prst="rect">
             <a:avLst/>
@@ -3852,15 +4270,18 @@
           <a:lstStyle/>
           <a:p>
             <a:pPr algn="ctr">
-              <a:defRPr sz="2400" b="1">
+              <a:lnSpc>
+                <a:spcPct val="120000"/>
+              </a:lnSpc>
+              <a:defRPr sz="2200" b="1">
                 <a:solidFill>
                   <a:srgbClr val="F0EDE8"/>
                 </a:solidFill>
-                <a:latin typeface="Outfit"/>
+                <a:latin typeface="Arial"/>
               </a:defRPr>
             </a:pPr>
             <a:r>
-              <a:t>四国一体，一个王国，无限可能。</a:t>
+              <a:t>四国一体 · 一个王国 · 无限可能</a:t>
             </a:r>
           </a:p>
         </p:txBody>
@@ -3899,7 +4320,7 @@
         <p:spPr>
           <a:xfrm>
             <a:off x="0" y="0"/>
-            <a:ext cx="12191695" cy="6858000"/>
+            <a:ext cx="7132320" cy="6858000"/>
           </a:xfrm>
           <a:prstGeom prst="rect">
             <a:avLst/>
@@ -3915,15 +4336,15 @@
         </p:nvSpPr>
         <p:spPr>
           <a:xfrm>
-            <a:off x="0" y="0"/>
-            <a:ext cx="12191695" cy="6858000"/>
+            <a:off x="7315200" y="0"/>
+            <a:ext cx="4876495" cy="6858000"/>
           </a:xfrm>
           <a:prstGeom prst="rect">
             <a:avLst/>
           </a:prstGeom>
           <a:solidFill>
-            <a:srgbClr val="122037">
-              <a:alpha val="65000"/>
+            <a:srgbClr val="1D3557">
+              <a:alpha val="100000"/>
             </a:srgbClr>
           </a:solidFill>
           <a:ln>
@@ -3960,8 +4381,8 @@
         </p:nvSpPr>
         <p:spPr>
           <a:xfrm>
-            <a:off x="1371600" y="548640"/>
-            <a:ext cx="9448495" cy="822960"/>
+            <a:off x="7680960" y="548640"/>
+            <a:ext cx="4144975" cy="548640"/>
           </a:xfrm>
           <a:prstGeom prst="rect">
             <a:avLst/>
@@ -3974,12 +4395,15 @@
           </a:bodyPr>
           <a:lstStyle/>
           <a:p>
-            <a:pPr algn="ctr">
-              <a:defRPr sz="3600" b="1">
+            <a:pPr algn="l">
+              <a:lnSpc>
+                <a:spcPct val="120000"/>
+              </a:lnSpc>
+              <a:defRPr sz="2800" b="1">
                 <a:solidFill>
                   <a:srgbClr val="F0EDE8"/>
                 </a:solidFill>
-                <a:latin typeface="Outfit"/>
+                <a:latin typeface="Arial"/>
               </a:defRPr>
             </a:pPr>
             <a:r>
@@ -3996,8 +4420,8 @@
         </p:nvSpPr>
         <p:spPr>
           <a:xfrm>
-            <a:off x="1371600" y="1234440"/>
-            <a:ext cx="9448495" cy="457200"/>
+            <a:off x="7680960" y="1051560"/>
+            <a:ext cx="4144975" cy="411480"/>
           </a:xfrm>
           <a:prstGeom prst="rect">
             <a:avLst/>
@@ -4010,30 +4434,78 @@
           </a:bodyPr>
           <a:lstStyle/>
           <a:p>
-            <a:pPr algn="ctr">
-              <a:defRPr sz="1600" b="0">
-                <a:solidFill>
-                  <a:srgbClr val="F0EDE8"/>
-                </a:solidFill>
-                <a:latin typeface="Outfit"/>
+            <a:pPr algn="l">
+              <a:lnSpc>
+                <a:spcPct val="120000"/>
+              </a:lnSpc>
+              <a:defRPr sz="1200" b="0">
+                <a:solidFill>
+                  <a:srgbClr val="A0AEBE"/>
+                </a:solidFill>
+                <a:latin typeface="Arial"/>
               </a:defRPr>
             </a:pPr>
             <a:r>
-              <a:t>英国位于欧洲西北部，由大不列颠岛及周边岛屿组成</a:t>
-            </a:r>
-          </a:p>
-        </p:txBody>
-      </p:sp>
-      <p:sp>
-        <p:nvSpPr>
-          <p:cNvPr id="6" name="TextBox 5"/>
+              <a:t>英国由大不列颠岛及周边岛屿组成，位于欧洲西北部</a:t>
+            </a:r>
+          </a:p>
+        </p:txBody>
+      </p:sp>
+      <p:sp>
+        <p:nvSpPr>
+          <p:cNvPr id="6" name="Rectangle 5"/>
+          <p:cNvSpPr/>
+          <p:nvPr/>
+        </p:nvSpPr>
+        <p:spPr>
+          <a:xfrm>
+            <a:off x="7680960" y="1783080"/>
+            <a:ext cx="73152" cy="548640"/>
+          </a:xfrm>
+          <a:prstGeom prst="rect">
+            <a:avLst/>
+          </a:prstGeom>
+          <a:solidFill>
+            <a:srgbClr val="E63946">
+              <a:alpha val="100000"/>
+            </a:srgbClr>
+          </a:solidFill>
+          <a:ln>
+            <a:noFill/>
+          </a:ln>
+        </p:spPr>
+        <p:style>
+          <a:lnRef idx="1">
+            <a:schemeClr val="accent1"/>
+          </a:lnRef>
+          <a:fillRef idx="3">
+            <a:schemeClr val="accent1"/>
+          </a:fillRef>
+          <a:effectRef idx="2">
+            <a:schemeClr val="accent1"/>
+          </a:effectRef>
+          <a:fontRef idx="minor">
+            <a:schemeClr val="lt1"/>
+          </a:fontRef>
+        </p:style>
+        <p:txBody>
+          <a:bodyPr rtlCol="0" anchor="ctr"/>
+          <a:lstStyle/>
+          <a:p>
+            <a:pPr algn="ctr"/>
+          </a:p>
+        </p:txBody>
+      </p:sp>
+      <p:sp>
+        <p:nvSpPr>
+          <p:cNvPr id="7" name="TextBox 6"/>
           <p:cNvSpPr txBox="1"/>
           <p:nvPr/>
         </p:nvSpPr>
         <p:spPr>
           <a:xfrm>
-            <a:off x="1828800" y="2468880"/>
-            <a:ext cx="2743200" cy="274320"/>
+            <a:off x="7955279" y="1783080"/>
+            <a:ext cx="3779215" cy="274320"/>
           </a:xfrm>
           <a:prstGeom prst="rect">
             <a:avLst/>
@@ -4047,11 +4519,14 @@
           <a:lstStyle/>
           <a:p>
             <a:pPr algn="l">
-              <a:defRPr sz="1400" b="1">
-                <a:solidFill>
-                  <a:srgbClr val="B8D8EE"/>
-                </a:solidFill>
-                <a:latin typeface="Outfit"/>
+              <a:lnSpc>
+                <a:spcPct val="120000"/>
+              </a:lnSpc>
+              <a:defRPr sz="1300" b="1">
+                <a:solidFill>
+                  <a:srgbClr val="F0EDE8"/>
+                </a:solidFill>
+                <a:latin typeface="Arial"/>
               </a:defRPr>
             </a:pPr>
             <a:r>
@@ -4062,14 +4537,14 @@
       </p:sp>
       <p:sp>
         <p:nvSpPr>
-          <p:cNvPr id="7" name="TextBox 6"/>
+          <p:cNvPr id="8" name="TextBox 7"/>
           <p:cNvSpPr txBox="1"/>
           <p:nvPr/>
         </p:nvSpPr>
         <p:spPr>
           <a:xfrm>
-            <a:off x="4114800" y="2468880"/>
-            <a:ext cx="6400800" cy="274320"/>
+            <a:off x="7955279" y="2084832"/>
+            <a:ext cx="3779215" cy="502920"/>
           </a:xfrm>
           <a:prstGeom prst="rect">
             <a:avLst/>
@@ -4083,29 +4558,81 @@
           <a:lstStyle/>
           <a:p>
             <a:pPr algn="l">
-              <a:defRPr sz="1300" b="0">
-                <a:solidFill>
-                  <a:srgbClr val="F0EDE8"/>
-                </a:solidFill>
-                <a:latin typeface="Outfit"/>
+              <a:lnSpc>
+                <a:spcPct val="135000"/>
+              </a:lnSpc>
+              <a:defRPr sz="1100" b="0">
+                <a:solidFill>
+                  <a:srgbClr val="C0CCD8"/>
+                </a:solidFill>
+                <a:latin typeface="Arial"/>
               </a:defRPr>
             </a:pPr>
             <a:r>
-              <a:t>面积最大、人口最多。南部平原+北部奔宁山脉。</a:t>
-            </a:r>
-          </a:p>
-        </p:txBody>
-      </p:sp>
-      <p:sp>
-        <p:nvSpPr>
-          <p:cNvPr id="8" name="TextBox 7"/>
+              <a:t>南部平原 · 北部奔宁山脉</a:t>
+            </a:r>
+            <a:br/>
+            <a:r>
+              <a:t>人口最多 · 首都伦敦位于泰晤士河畔</a:t>
+            </a:r>
+          </a:p>
+        </p:txBody>
+      </p:sp>
+      <p:sp>
+        <p:nvSpPr>
+          <p:cNvPr id="9" name="Rectangle 8"/>
+          <p:cNvSpPr/>
+          <p:nvPr/>
+        </p:nvSpPr>
+        <p:spPr>
+          <a:xfrm>
+            <a:off x="7680960" y="2834640"/>
+            <a:ext cx="73152" cy="548640"/>
+          </a:xfrm>
+          <a:prstGeom prst="rect">
+            <a:avLst/>
+          </a:prstGeom>
+          <a:solidFill>
+            <a:srgbClr val="E63946">
+              <a:alpha val="100000"/>
+            </a:srgbClr>
+          </a:solidFill>
+          <a:ln>
+            <a:noFill/>
+          </a:ln>
+        </p:spPr>
+        <p:style>
+          <a:lnRef idx="1">
+            <a:schemeClr val="accent1"/>
+          </a:lnRef>
+          <a:fillRef idx="3">
+            <a:schemeClr val="accent1"/>
+          </a:fillRef>
+          <a:effectRef idx="2">
+            <a:schemeClr val="accent1"/>
+          </a:effectRef>
+          <a:fontRef idx="minor">
+            <a:schemeClr val="lt1"/>
+          </a:fontRef>
+        </p:style>
+        <p:txBody>
+          <a:bodyPr rtlCol="0" anchor="ctr"/>
+          <a:lstStyle/>
+          <a:p>
+            <a:pPr algn="ctr"/>
+          </a:p>
+        </p:txBody>
+      </p:sp>
+      <p:sp>
+        <p:nvSpPr>
+          <p:cNvPr id="10" name="TextBox 9"/>
           <p:cNvSpPr txBox="1"/>
           <p:nvPr/>
         </p:nvSpPr>
         <p:spPr>
           <a:xfrm>
-            <a:off x="1828800" y="2971800"/>
-            <a:ext cx="2743200" cy="274320"/>
+            <a:off x="7955279" y="2834640"/>
+            <a:ext cx="3779215" cy="274320"/>
           </a:xfrm>
           <a:prstGeom prst="rect">
             <a:avLst/>
@@ -4119,11 +4646,14 @@
           <a:lstStyle/>
           <a:p>
             <a:pPr algn="l">
-              <a:defRPr sz="1400" b="1">
-                <a:solidFill>
-                  <a:srgbClr val="B8D8EE"/>
-                </a:solidFill>
-                <a:latin typeface="Outfit"/>
+              <a:lnSpc>
+                <a:spcPct val="120000"/>
+              </a:lnSpc>
+              <a:defRPr sz="1300" b="1">
+                <a:solidFill>
+                  <a:srgbClr val="F0EDE8"/>
+                </a:solidFill>
+                <a:latin typeface="Arial"/>
               </a:defRPr>
             </a:pPr>
             <a:r>
@@ -4134,14 +4664,14 @@
       </p:sp>
       <p:sp>
         <p:nvSpPr>
-          <p:cNvPr id="9" name="TextBox 8"/>
+          <p:cNvPr id="11" name="TextBox 10"/>
           <p:cNvSpPr txBox="1"/>
           <p:nvPr/>
         </p:nvSpPr>
         <p:spPr>
           <a:xfrm>
-            <a:off x="4114800" y="2971800"/>
-            <a:ext cx="6400800" cy="274320"/>
+            <a:off x="7955279" y="3136391"/>
+            <a:ext cx="3779215" cy="502920"/>
           </a:xfrm>
           <a:prstGeom prst="rect">
             <a:avLst/>
@@ -4155,29 +4685,81 @@
           <a:lstStyle/>
           <a:p>
             <a:pPr algn="l">
-              <a:defRPr sz="1300" b="0">
-                <a:solidFill>
-                  <a:srgbClr val="F0EDE8"/>
-                </a:solidFill>
-                <a:latin typeface="Outfit"/>
+              <a:lnSpc>
+                <a:spcPct val="135000"/>
+              </a:lnSpc>
+              <a:defRPr sz="1100" b="0">
+                <a:solidFill>
+                  <a:srgbClr val="C0CCD8"/>
+                </a:solidFill>
+                <a:latin typeface="Arial"/>
               </a:defRPr>
             </a:pPr>
             <a:r>
-              <a:t>高地山地为主。本尼维斯山(1345m)最高。780+岛屿。</a:t>
-            </a:r>
-          </a:p>
-        </p:txBody>
-      </p:sp>
-      <p:sp>
-        <p:nvSpPr>
-          <p:cNvPr id="10" name="TextBox 9"/>
+              <a:t>高地山地 · 本尼维斯山(1345m)</a:t>
+            </a:r>
+            <a:br/>
+            <a:r>
+              <a:t>780+ 岛屿 · 首府爱丁堡</a:t>
+            </a:r>
+          </a:p>
+        </p:txBody>
+      </p:sp>
+      <p:sp>
+        <p:nvSpPr>
+          <p:cNvPr id="12" name="Rectangle 11"/>
+          <p:cNvSpPr/>
+          <p:nvPr/>
+        </p:nvSpPr>
+        <p:spPr>
+          <a:xfrm>
+            <a:off x="7680960" y="3886200"/>
+            <a:ext cx="73152" cy="548640"/>
+          </a:xfrm>
+          <a:prstGeom prst="rect">
+            <a:avLst/>
+          </a:prstGeom>
+          <a:solidFill>
+            <a:srgbClr val="E63946">
+              <a:alpha val="100000"/>
+            </a:srgbClr>
+          </a:solidFill>
+          <a:ln>
+            <a:noFill/>
+          </a:ln>
+        </p:spPr>
+        <p:style>
+          <a:lnRef idx="1">
+            <a:schemeClr val="accent1"/>
+          </a:lnRef>
+          <a:fillRef idx="3">
+            <a:schemeClr val="accent1"/>
+          </a:fillRef>
+          <a:effectRef idx="2">
+            <a:schemeClr val="accent1"/>
+          </a:effectRef>
+          <a:fontRef idx="minor">
+            <a:schemeClr val="lt1"/>
+          </a:fontRef>
+        </p:style>
+        <p:txBody>
+          <a:bodyPr rtlCol="0" anchor="ctr"/>
+          <a:lstStyle/>
+          <a:p>
+            <a:pPr algn="ctr"/>
+          </a:p>
+        </p:txBody>
+      </p:sp>
+      <p:sp>
+        <p:nvSpPr>
+          <p:cNvPr id="13" name="TextBox 12"/>
           <p:cNvSpPr txBox="1"/>
           <p:nvPr/>
         </p:nvSpPr>
         <p:spPr>
           <a:xfrm>
-            <a:off x="1828800" y="3474720"/>
-            <a:ext cx="2743200" cy="274320"/>
+            <a:off x="7955279" y="3886200"/>
+            <a:ext cx="3779215" cy="274320"/>
           </a:xfrm>
           <a:prstGeom prst="rect">
             <a:avLst/>
@@ -4191,11 +4773,14 @@
           <a:lstStyle/>
           <a:p>
             <a:pPr algn="l">
-              <a:defRPr sz="1400" b="1">
-                <a:solidFill>
-                  <a:srgbClr val="B8D8EE"/>
-                </a:solidFill>
-                <a:latin typeface="Outfit"/>
+              <a:lnSpc>
+                <a:spcPct val="120000"/>
+              </a:lnSpc>
+              <a:defRPr sz="1300" b="1">
+                <a:solidFill>
+                  <a:srgbClr val="F0EDE8"/>
+                </a:solidFill>
+                <a:latin typeface="Arial"/>
               </a:defRPr>
             </a:pPr>
             <a:r>
@@ -4206,14 +4791,14 @@
       </p:sp>
       <p:sp>
         <p:nvSpPr>
-          <p:cNvPr id="11" name="TextBox 10"/>
+          <p:cNvPr id="14" name="TextBox 13"/>
           <p:cNvSpPr txBox="1"/>
           <p:nvPr/>
         </p:nvSpPr>
         <p:spPr>
           <a:xfrm>
-            <a:off x="4114800" y="3474720"/>
-            <a:ext cx="6400800" cy="274320"/>
+            <a:off x="7955279" y="4187952"/>
+            <a:ext cx="3779215" cy="502920"/>
           </a:xfrm>
           <a:prstGeom prst="rect">
             <a:avLst/>
@@ -4227,29 +4812,81 @@
           <a:lstStyle/>
           <a:p>
             <a:pPr algn="l">
-              <a:defRPr sz="1300" b="0">
-                <a:solidFill>
-                  <a:srgbClr val="F0EDE8"/>
-                </a:solidFill>
-                <a:latin typeface="Outfit"/>
+              <a:lnSpc>
+                <a:spcPct val="135000"/>
+              </a:lnSpc>
+              <a:defRPr sz="1100" b="0">
+                <a:solidFill>
+                  <a:srgbClr val="C0CCD8"/>
+                </a:solidFill>
+                <a:latin typeface="Arial"/>
               </a:defRPr>
             </a:pPr>
             <a:r>
-              <a:t>多山地丘陵。斯诺登山(1085m)。海岸线+城堡遗迹。</a:t>
-            </a:r>
-          </a:p>
-        </p:txBody>
-      </p:sp>
-      <p:sp>
-        <p:nvSpPr>
-          <p:cNvPr id="12" name="TextBox 11"/>
+              <a:t>斯诺登山(1085m) · 城堡遗迹</a:t>
+            </a:r>
+            <a:br/>
+            <a:r>
+              <a:t>海岸线闻名 · 首府卡迪夫</a:t>
+            </a:r>
+          </a:p>
+        </p:txBody>
+      </p:sp>
+      <p:sp>
+        <p:nvSpPr>
+          <p:cNvPr id="15" name="Rectangle 14"/>
+          <p:cNvSpPr/>
+          <p:nvPr/>
+        </p:nvSpPr>
+        <p:spPr>
+          <a:xfrm>
+            <a:off x="7680960" y="4937759"/>
+            <a:ext cx="73152" cy="548640"/>
+          </a:xfrm>
+          <a:prstGeom prst="rect">
+            <a:avLst/>
+          </a:prstGeom>
+          <a:solidFill>
+            <a:srgbClr val="E63946">
+              <a:alpha val="100000"/>
+            </a:srgbClr>
+          </a:solidFill>
+          <a:ln>
+            <a:noFill/>
+          </a:ln>
+        </p:spPr>
+        <p:style>
+          <a:lnRef idx="1">
+            <a:schemeClr val="accent1"/>
+          </a:lnRef>
+          <a:fillRef idx="3">
+            <a:schemeClr val="accent1"/>
+          </a:fillRef>
+          <a:effectRef idx="2">
+            <a:schemeClr val="accent1"/>
+          </a:effectRef>
+          <a:fontRef idx="minor">
+            <a:schemeClr val="lt1"/>
+          </a:fontRef>
+        </p:style>
+        <p:txBody>
+          <a:bodyPr rtlCol="0" anchor="ctr"/>
+          <a:lstStyle/>
+          <a:p>
+            <a:pPr algn="ctr"/>
+          </a:p>
+        </p:txBody>
+      </p:sp>
+      <p:sp>
+        <p:nvSpPr>
+          <p:cNvPr id="16" name="TextBox 15"/>
           <p:cNvSpPr txBox="1"/>
           <p:nvPr/>
         </p:nvSpPr>
         <p:spPr>
           <a:xfrm>
-            <a:off x="1828800" y="3977639"/>
-            <a:ext cx="2743200" cy="274320"/>
+            <a:off x="7955279" y="4937759"/>
+            <a:ext cx="3779215" cy="274320"/>
           </a:xfrm>
           <a:prstGeom prst="rect">
             <a:avLst/>
@@ -4263,11 +4900,14 @@
           <a:lstStyle/>
           <a:p>
             <a:pPr algn="l">
-              <a:defRPr sz="1400" b="1">
-                <a:solidFill>
-                  <a:srgbClr val="B8D8EE"/>
-                </a:solidFill>
-                <a:latin typeface="Outfit"/>
+              <a:lnSpc>
+                <a:spcPct val="120000"/>
+              </a:lnSpc>
+              <a:defRPr sz="1300" b="1">
+                <a:solidFill>
+                  <a:srgbClr val="F0EDE8"/>
+                </a:solidFill>
+                <a:latin typeface="Arial"/>
               </a:defRPr>
             </a:pPr>
             <a:r>
@@ -4278,14 +4918,14 @@
       </p:sp>
       <p:sp>
         <p:nvSpPr>
-          <p:cNvPr id="13" name="TextBox 12"/>
+          <p:cNvPr id="17" name="TextBox 16"/>
           <p:cNvSpPr txBox="1"/>
           <p:nvPr/>
         </p:nvSpPr>
         <p:spPr>
           <a:xfrm>
-            <a:off x="4114800" y="3977639"/>
-            <a:ext cx="6400800" cy="274320"/>
+            <a:off x="7955279" y="5239512"/>
+            <a:ext cx="3779215" cy="502920"/>
           </a:xfrm>
           <a:prstGeom prst="rect">
             <a:avLst/>
@@ -4299,15 +4939,61 @@
           <a:lstStyle/>
           <a:p>
             <a:pPr algn="l">
-              <a:defRPr sz="1300" b="0">
-                <a:solidFill>
-                  <a:srgbClr val="F0EDE8"/>
-                </a:solidFill>
-                <a:latin typeface="Outfit"/>
+              <a:lnSpc>
+                <a:spcPct val="135000"/>
+              </a:lnSpc>
+              <a:defRPr sz="1100" b="0">
+                <a:solidFill>
+                  <a:srgbClr val="C0CCD8"/>
+                </a:solidFill>
+                <a:latin typeface="Arial"/>
               </a:defRPr>
             </a:pPr>
             <a:r>
-              <a:t>平原低丘陵。内伊湖为全英最大湖。巨人堤道。</a:t>
+              <a:t>内伊湖(全英最大湖)</a:t>
+            </a:r>
+            <a:br/>
+            <a:r>
+              <a:t>巨人堤道 · 首府贝尔法斯特</a:t>
+            </a:r>
+          </a:p>
+        </p:txBody>
+      </p:sp>
+      <p:sp>
+        <p:nvSpPr>
+          <p:cNvPr id="18" name="TextBox 17"/>
+          <p:cNvSpPr txBox="1"/>
+          <p:nvPr/>
+        </p:nvSpPr>
+        <p:spPr>
+          <a:xfrm>
+            <a:off x="7680960" y="6217920"/>
+            <a:ext cx="4144975" cy="274320"/>
+          </a:xfrm>
+          <a:prstGeom prst="rect">
+            <a:avLst/>
+          </a:prstGeom>
+          <a:noFill/>
+        </p:spPr>
+        <p:txBody>
+          <a:bodyPr wrap="square">
+            <a:spAutoFit/>
+          </a:bodyPr>
+          <a:lstStyle/>
+          <a:p>
+            <a:pPr algn="l">
+              <a:lnSpc>
+                <a:spcPct val="120000"/>
+              </a:lnSpc>
+              <a:defRPr sz="1000" b="0">
+                <a:solidFill>
+                  <a:srgbClr val="8090A0"/>
+                </a:solidFill>
+                <a:latin typeface="Arial"/>
+              </a:defRPr>
+            </a:pPr>
+            <a:r>
+              <a:t>总面积 ≈ 24.4 万 km²</a:t>
             </a:r>
           </a:p>
         </p:txBody>
@@ -4362,15 +5048,15 @@
         </p:nvSpPr>
         <p:spPr>
           <a:xfrm>
-            <a:off x="0" y="0"/>
-            <a:ext cx="12191695" cy="6858000"/>
+            <a:off x="0" y="4572000"/>
+            <a:ext cx="12191695" cy="2286000"/>
           </a:xfrm>
           <a:prstGeom prst="rect">
             <a:avLst/>
           </a:prstGeom>
           <a:solidFill>
-            <a:srgbClr val="EBE6DC">
-              <a:alpha val="75000"/>
+            <a:srgbClr val="F0EDE8">
+              <a:alpha val="80000"/>
             </a:srgbClr>
           </a:solidFill>
           <a:ln>
@@ -4401,93 +5087,21 @@
       </p:sp>
       <p:sp>
         <p:nvSpPr>
-          <p:cNvPr id="4" name="TextBox 3"/>
-          <p:cNvSpPr txBox="1"/>
-          <p:nvPr/>
-        </p:nvSpPr>
-        <p:spPr>
-          <a:xfrm>
-            <a:off x="1371600" y="548640"/>
-            <a:ext cx="9448495" cy="822960"/>
-          </a:xfrm>
-          <a:prstGeom prst="rect">
-            <a:avLst/>
-          </a:prstGeom>
-          <a:noFill/>
-        </p:spPr>
-        <p:txBody>
-          <a:bodyPr wrap="square">
-            <a:spAutoFit/>
-          </a:bodyPr>
-          <a:lstStyle/>
-          <a:p>
-            <a:pPr algn="ctr">
-              <a:defRPr sz="3600" b="1">
-                <a:solidFill>
-                  <a:srgbClr val="2A3A4A"/>
-                </a:solidFill>
-                <a:latin typeface="Outfit"/>
-              </a:defRPr>
-            </a:pPr>
-            <a:r>
-              <a:t>主要河流 &amp; 首都</a:t>
-            </a:r>
-          </a:p>
-        </p:txBody>
-      </p:sp>
-      <p:sp>
-        <p:nvSpPr>
-          <p:cNvPr id="5" name="TextBox 4"/>
-          <p:cNvSpPr txBox="1"/>
-          <p:nvPr/>
-        </p:nvSpPr>
-        <p:spPr>
-          <a:xfrm>
-            <a:off x="1371600" y="1234440"/>
-            <a:ext cx="9448495" cy="457200"/>
-          </a:xfrm>
-          <a:prstGeom prst="rect">
-            <a:avLst/>
-          </a:prstGeom>
-          <a:noFill/>
-        </p:spPr>
-        <p:txBody>
-          <a:bodyPr wrap="square">
-            <a:spAutoFit/>
-          </a:bodyPr>
-          <a:lstStyle/>
-          <a:p>
-            <a:pPr algn="ctr">
-              <a:defRPr sz="1600" b="0">
-                <a:solidFill>
-                  <a:srgbClr val="2A3A4A"/>
-                </a:solidFill>
-                <a:latin typeface="Outfit"/>
-              </a:defRPr>
-            </a:pPr>
-            <a:r>
-              <a:t>英国的河流虽不漫长，却在工业革命中扮演了关键角色</a:t>
-            </a:r>
-          </a:p>
-        </p:txBody>
-      </p:sp>
-      <p:sp>
-        <p:nvSpPr>
-          <p:cNvPr id="6" name="Rectangle 5"/>
+          <p:cNvPr id="4" name="Rectangle 3"/>
           <p:cNvSpPr/>
           <p:nvPr/>
         </p:nvSpPr>
         <p:spPr>
           <a:xfrm>
-            <a:off x="1371600" y="2468880"/>
-            <a:ext cx="4587087" cy="3200400"/>
+            <a:off x="0" y="3657600"/>
+            <a:ext cx="12191695" cy="914400"/>
           </a:xfrm>
           <a:prstGeom prst="rect">
             <a:avLst/>
           </a:prstGeom>
           <a:solidFill>
-            <a:srgbClr val="EBE8E1">
-              <a:alpha val="65000"/>
+            <a:srgbClr val="F0EDE8">
+              <a:alpha val="50000"/>
             </a:srgbClr>
           </a:solidFill>
           <a:ln>
@@ -4518,14 +5132,14 @@
       </p:sp>
       <p:sp>
         <p:nvSpPr>
-          <p:cNvPr id="7" name="TextBox 6"/>
+          <p:cNvPr id="5" name="TextBox 4"/>
           <p:cNvSpPr txBox="1"/>
           <p:nvPr/>
         </p:nvSpPr>
         <p:spPr>
           <a:xfrm>
-            <a:off x="1508760" y="2560320"/>
-            <a:ext cx="4312767" cy="365760"/>
+            <a:off x="1097280" y="457200"/>
+            <a:ext cx="9601200" cy="640080"/>
           </a:xfrm>
           <a:prstGeom prst="rect">
             <a:avLst/>
@@ -4539,29 +5153,32 @@
           <a:lstStyle/>
           <a:p>
             <a:pPr algn="l">
-              <a:defRPr sz="1600" b="1">
+              <a:lnSpc>
+                <a:spcPct val="120000"/>
+              </a:lnSpc>
+              <a:defRPr sz="3600" b="1">
                 <a:solidFill>
                   <a:srgbClr val="1A2A3A"/>
                 </a:solidFill>
-                <a:latin typeface="Outfit"/>
+                <a:latin typeface="Arial"/>
               </a:defRPr>
             </a:pPr>
             <a:r>
-              <a:t>🌊 主要河流</a:t>
-            </a:r>
-          </a:p>
-        </p:txBody>
-      </p:sp>
-      <p:sp>
-        <p:nvSpPr>
-          <p:cNvPr id="8" name="TextBox 7"/>
+              <a:t>主要河流 &amp; 首都</a:t>
+            </a:r>
+          </a:p>
+        </p:txBody>
+      </p:sp>
+      <p:sp>
+        <p:nvSpPr>
+          <p:cNvPr id="6" name="TextBox 5"/>
           <p:cNvSpPr txBox="1"/>
           <p:nvPr/>
         </p:nvSpPr>
         <p:spPr>
           <a:xfrm>
-            <a:off x="1508760" y="2880360"/>
-            <a:ext cx="4312767" cy="2697480"/>
+            <a:off x="1097280" y="1005840"/>
+            <a:ext cx="9601200" cy="365760"/>
           </a:xfrm>
           <a:prstGeom prst="rect">
             <a:avLst/>
@@ -4576,42 +5193,38 @@
           <a:p>
             <a:pPr algn="l">
               <a:lnSpc>
-                <a:spcPct val="140000"/>
+                <a:spcPct val="120000"/>
               </a:lnSpc>
-              <a:defRPr sz="1300">
+              <a:defRPr sz="1400" b="0">
                 <a:solidFill>
                   <a:srgbClr val="2A3A4A"/>
                 </a:solidFill>
-                <a:latin typeface="Outfit"/>
+                <a:latin typeface="Arial"/>
               </a:defRPr>
             </a:pPr>
             <a:r>
-              <a:t>泰晤士河 346km · 塞文河 354km</a:t>
-            </a:r>
-            <a:br/>
-            <a:r>
-              <a:t>特伦特河 298km · 克莱德河 176km</a:t>
-            </a:r>
-          </a:p>
-        </p:txBody>
-      </p:sp>
-      <p:sp>
-        <p:nvSpPr>
-          <p:cNvPr id="9" name="Rectangle 8"/>
+              <a:t>英国的河流在工业革命与城市发展中扮演了关键角色</a:t>
+            </a:r>
+          </a:p>
+        </p:txBody>
+      </p:sp>
+      <p:sp>
+        <p:nvSpPr>
+          <p:cNvPr id="7" name="Rectangle 6"/>
           <p:cNvSpPr/>
           <p:nvPr/>
         </p:nvSpPr>
         <p:spPr>
           <a:xfrm>
-            <a:off x="6233007" y="2468880"/>
-            <a:ext cx="4587087" cy="3200400"/>
+            <a:off x="1097280" y="4023360"/>
+            <a:ext cx="4572000" cy="1828800"/>
           </a:xfrm>
           <a:prstGeom prst="rect">
             <a:avLst/>
           </a:prstGeom>
           <a:solidFill>
-            <a:srgbClr val="EBE8E1">
-              <a:alpha val="65000"/>
+            <a:srgbClr val="F5F2ED">
+              <a:alpha val="80000"/>
             </a:srgbClr>
           </a:solidFill>
           <a:ln>
@@ -4642,14 +5255,14 @@
       </p:sp>
       <p:sp>
         <p:nvSpPr>
-          <p:cNvPr id="10" name="TextBox 9"/>
+          <p:cNvPr id="8" name="TextBox 7"/>
           <p:cNvSpPr txBox="1"/>
           <p:nvPr/>
         </p:nvSpPr>
         <p:spPr>
           <a:xfrm>
-            <a:off x="6370167" y="2560320"/>
-            <a:ext cx="4312767" cy="365760"/>
+            <a:off x="1325880" y="4160520"/>
+            <a:ext cx="4114800" cy="320040"/>
           </a:xfrm>
           <a:prstGeom prst="rect">
             <a:avLst/>
@@ -4663,29 +5276,32 @@
           <a:lstStyle/>
           <a:p>
             <a:pPr algn="l">
-              <a:defRPr sz="1600" b="1">
+              <a:lnSpc>
+                <a:spcPct val="120000"/>
+              </a:lnSpc>
+              <a:defRPr sz="1400" b="1">
                 <a:solidFill>
                   <a:srgbClr val="1A2A3A"/>
                 </a:solidFill>
-                <a:latin typeface="Outfit"/>
+                <a:latin typeface="Arial"/>
               </a:defRPr>
             </a:pPr>
             <a:r>
-              <a:t>🏙️ 首都：伦敦</a:t>
-            </a:r>
-          </a:p>
-        </p:txBody>
-      </p:sp>
-      <p:sp>
-        <p:nvSpPr>
-          <p:cNvPr id="11" name="TextBox 10"/>
+              <a:t>🌊 主要河流</a:t>
+            </a:r>
+          </a:p>
+        </p:txBody>
+      </p:sp>
+      <p:sp>
+        <p:nvSpPr>
+          <p:cNvPr id="9" name="TextBox 8"/>
           <p:cNvSpPr txBox="1"/>
           <p:nvPr/>
         </p:nvSpPr>
         <p:spPr>
           <a:xfrm>
-            <a:off x="6370167" y="2880360"/>
-            <a:ext cx="4312767" cy="2697480"/>
+            <a:off x="1325880" y="4526280"/>
+            <a:ext cx="4114800" cy="1188720"/>
           </a:xfrm>
           <a:prstGeom prst="rect">
             <a:avLst/>
@@ -4702,19 +5318,150 @@
               <a:lnSpc>
                 <a:spcPct val="140000"/>
               </a:lnSpc>
-              <a:defRPr sz="1300">
+              <a:defRPr sz="1200" b="0">
                 <a:solidFill>
                   <a:srgbClr val="2A3A4A"/>
                 </a:solidFill>
-                <a:latin typeface="Outfit"/>
+                <a:latin typeface="Arial"/>
               </a:defRPr>
             </a:pPr>
             <a:r>
-              <a:t>泰晤士河下游，人口约900万</a:t>
+              <a:t>泰晤士河 346km · 塞文河 354km</a:t>
             </a:r>
             <a:br/>
             <a:r>
-              <a:t>全球顶级金融中心 · 大本钟 · 白金汉宫</a:t>
+              <a:t>特伦特河 298km · 克莱德河 176km</a:t>
+            </a:r>
+          </a:p>
+        </p:txBody>
+      </p:sp>
+      <p:sp>
+        <p:nvSpPr>
+          <p:cNvPr id="10" name="Rectangle 9"/>
+          <p:cNvSpPr/>
+          <p:nvPr/>
+        </p:nvSpPr>
+        <p:spPr>
+          <a:xfrm>
+            <a:off x="6035040" y="4023360"/>
+            <a:ext cx="4572000" cy="1828800"/>
+          </a:xfrm>
+          <a:prstGeom prst="rect">
+            <a:avLst/>
+          </a:prstGeom>
+          <a:solidFill>
+            <a:srgbClr val="F5F2ED">
+              <a:alpha val="80000"/>
+            </a:srgbClr>
+          </a:solidFill>
+          <a:ln>
+            <a:noFill/>
+          </a:ln>
+        </p:spPr>
+        <p:style>
+          <a:lnRef idx="1">
+            <a:schemeClr val="accent1"/>
+          </a:lnRef>
+          <a:fillRef idx="3">
+            <a:schemeClr val="accent1"/>
+          </a:fillRef>
+          <a:effectRef idx="2">
+            <a:schemeClr val="accent1"/>
+          </a:effectRef>
+          <a:fontRef idx="minor">
+            <a:schemeClr val="lt1"/>
+          </a:fontRef>
+        </p:style>
+        <p:txBody>
+          <a:bodyPr rtlCol="0" anchor="ctr"/>
+          <a:lstStyle/>
+          <a:p>
+            <a:pPr algn="ctr"/>
+          </a:p>
+        </p:txBody>
+      </p:sp>
+      <p:sp>
+        <p:nvSpPr>
+          <p:cNvPr id="11" name="TextBox 10"/>
+          <p:cNvSpPr txBox="1"/>
+          <p:nvPr/>
+        </p:nvSpPr>
+        <p:spPr>
+          <a:xfrm>
+            <a:off x="6263640" y="4160520"/>
+            <a:ext cx="4114800" cy="320040"/>
+          </a:xfrm>
+          <a:prstGeom prst="rect">
+            <a:avLst/>
+          </a:prstGeom>
+          <a:noFill/>
+        </p:spPr>
+        <p:txBody>
+          <a:bodyPr wrap="square">
+            <a:spAutoFit/>
+          </a:bodyPr>
+          <a:lstStyle/>
+          <a:p>
+            <a:pPr algn="l">
+              <a:lnSpc>
+                <a:spcPct val="120000"/>
+              </a:lnSpc>
+              <a:defRPr sz="1400" b="1">
+                <a:solidFill>
+                  <a:srgbClr val="1A2A3A"/>
+                </a:solidFill>
+                <a:latin typeface="Arial"/>
+              </a:defRPr>
+            </a:pPr>
+            <a:r>
+              <a:t>🏙️ 首都：伦敦</a:t>
+            </a:r>
+          </a:p>
+        </p:txBody>
+      </p:sp>
+      <p:sp>
+        <p:nvSpPr>
+          <p:cNvPr id="12" name="TextBox 11"/>
+          <p:cNvSpPr txBox="1"/>
+          <p:nvPr/>
+        </p:nvSpPr>
+        <p:spPr>
+          <a:xfrm>
+            <a:off x="6263640" y="4526280"/>
+            <a:ext cx="4114800" cy="1188720"/>
+          </a:xfrm>
+          <a:prstGeom prst="rect">
+            <a:avLst/>
+          </a:prstGeom>
+          <a:noFill/>
+        </p:spPr>
+        <p:txBody>
+          <a:bodyPr wrap="square">
+            <a:spAutoFit/>
+          </a:bodyPr>
+          <a:lstStyle/>
+          <a:p>
+            <a:pPr algn="l">
+              <a:lnSpc>
+                <a:spcPct val="140000"/>
+              </a:lnSpc>
+              <a:defRPr sz="1200" b="0">
+                <a:solidFill>
+                  <a:srgbClr val="2A3A4A"/>
+                </a:solidFill>
+                <a:latin typeface="Arial"/>
+              </a:defRPr>
+            </a:pPr>
+            <a:r>
+              <a:t>人口约 900 万</a:t>
+            </a:r>
+            <a:br/>
+            <a:r>
+              <a:t>全球顶级金融中心 · 希思罗机场</a:t>
+            </a:r>
+            <a:br/>
+            <a:r>
+              <a:t>大本钟 · 伦敦眼 · 白金汉宫</a:t>
             </a:r>
           </a:p>
         </p:txBody>
@@ -4753,7 +5500,7 @@
         <p:spPr>
           <a:xfrm>
             <a:off x="0" y="0"/>
-            <a:ext cx="12191695" cy="6858000"/>
+            <a:ext cx="7132320" cy="6858000"/>
           </a:xfrm>
           <a:prstGeom prst="rect">
             <a:avLst/>
@@ -4769,15 +5516,15 @@
         </p:nvSpPr>
         <p:spPr>
           <a:xfrm>
-            <a:off x="0" y="0"/>
-            <a:ext cx="12191695" cy="6858000"/>
+            <a:off x="7315200" y="0"/>
+            <a:ext cx="4876495" cy="6858000"/>
           </a:xfrm>
           <a:prstGeom prst="rect">
             <a:avLst/>
           </a:prstGeom>
           <a:solidFill>
-            <a:srgbClr val="122037">
-              <a:alpha val="60000"/>
+            <a:srgbClr val="1D3557">
+              <a:alpha val="100000"/>
             </a:srgbClr>
           </a:solidFill>
           <a:ln>
@@ -4814,8 +5561,8 @@
         </p:nvSpPr>
         <p:spPr>
           <a:xfrm>
-            <a:off x="1371600" y="548640"/>
-            <a:ext cx="9448495" cy="822960"/>
+            <a:off x="7680960" y="548640"/>
+            <a:ext cx="4144975" cy="548640"/>
           </a:xfrm>
           <a:prstGeom prst="rect">
             <a:avLst/>
@@ -4828,16 +5575,19 @@
           </a:bodyPr>
           <a:lstStyle/>
           <a:p>
-            <a:pPr algn="ctr">
-              <a:defRPr sz="3600" b="1">
+            <a:pPr algn="l">
+              <a:lnSpc>
+                <a:spcPct val="120000"/>
+              </a:lnSpc>
+              <a:defRPr sz="2800" b="1">
                 <a:solidFill>
                   <a:srgbClr val="F0EDE8"/>
                 </a:solidFill>
-                <a:latin typeface="Outfit"/>
+                <a:latin typeface="Arial"/>
               </a:defRPr>
             </a:pPr>
             <a:r>
-              <a:t>主要城市</a:t>
+              <a:t>🏙️ 主要城市</a:t>
             </a:r>
           </a:p>
         </p:txBody>
@@ -4850,8 +5600,8 @@
         </p:nvSpPr>
         <p:spPr>
           <a:xfrm>
-            <a:off x="1371600" y="1234440"/>
-            <a:ext cx="9448495" cy="457200"/>
+            <a:off x="7680960" y="1051560"/>
+            <a:ext cx="4144975" cy="411480"/>
           </a:xfrm>
           <a:prstGeom prst="rect">
             <a:avLst/>
@@ -4864,30 +5614,78 @@
           </a:bodyPr>
           <a:lstStyle/>
           <a:p>
-            <a:pPr algn="ctr">
-              <a:defRPr sz="1600" b="0">
-                <a:solidFill>
-                  <a:srgbClr val="F0EDE8"/>
-                </a:solidFill>
-                <a:latin typeface="Outfit"/>
+            <a:pPr algn="l">
+              <a:lnSpc>
+                <a:spcPct val="120000"/>
+              </a:lnSpc>
+              <a:defRPr sz="1200" b="0">
+                <a:solidFill>
+                  <a:srgbClr val="A0AEBE"/>
+                </a:solidFill>
+                <a:latin typeface="Arial"/>
               </a:defRPr>
             </a:pPr>
             <a:r>
-              <a:t>英国四大地区的首府 — 各自的故事与气质</a:t>
-            </a:r>
-          </a:p>
-        </p:txBody>
-      </p:sp>
-      <p:sp>
-        <p:nvSpPr>
-          <p:cNvPr id="6" name="TextBox 5"/>
+              <a:t>英国四大地区的首府 — 各自独特的故事与气质</a:t>
+            </a:r>
+          </a:p>
+        </p:txBody>
+      </p:sp>
+      <p:sp>
+        <p:nvSpPr>
+          <p:cNvPr id="6" name="Rectangle 5"/>
+          <p:cNvSpPr/>
+          <p:nvPr/>
+        </p:nvSpPr>
+        <p:spPr>
+          <a:xfrm>
+            <a:off x="7680960" y="1783080"/>
+            <a:ext cx="73152" cy="548640"/>
+          </a:xfrm>
+          <a:prstGeom prst="rect">
+            <a:avLst/>
+          </a:prstGeom>
+          <a:solidFill>
+            <a:srgbClr val="E63946">
+              <a:alpha val="100000"/>
+            </a:srgbClr>
+          </a:solidFill>
+          <a:ln>
+            <a:noFill/>
+          </a:ln>
+        </p:spPr>
+        <p:style>
+          <a:lnRef idx="1">
+            <a:schemeClr val="accent1"/>
+          </a:lnRef>
+          <a:fillRef idx="3">
+            <a:schemeClr val="accent1"/>
+          </a:fillRef>
+          <a:effectRef idx="2">
+            <a:schemeClr val="accent1"/>
+          </a:effectRef>
+          <a:fontRef idx="minor">
+            <a:schemeClr val="lt1"/>
+          </a:fontRef>
+        </p:style>
+        <p:txBody>
+          <a:bodyPr rtlCol="0" anchor="ctr"/>
+          <a:lstStyle/>
+          <a:p>
+            <a:pPr algn="ctr"/>
+          </a:p>
+        </p:txBody>
+      </p:sp>
+      <p:sp>
+        <p:nvSpPr>
+          <p:cNvPr id="7" name="TextBox 6"/>
           <p:cNvSpPr txBox="1"/>
           <p:nvPr/>
         </p:nvSpPr>
         <p:spPr>
           <a:xfrm>
-            <a:off x="1828800" y="2468880"/>
-            <a:ext cx="2743200" cy="274320"/>
+            <a:off x="7955279" y="1783080"/>
+            <a:ext cx="3779215" cy="274320"/>
           </a:xfrm>
           <a:prstGeom prst="rect">
             <a:avLst/>
@@ -4901,29 +5699,32 @@
           <a:lstStyle/>
           <a:p>
             <a:pPr algn="l">
-              <a:defRPr sz="1400" b="1">
-                <a:solidFill>
-                  <a:srgbClr val="B8D8EE"/>
-                </a:solidFill>
-                <a:latin typeface="Outfit"/>
+              <a:lnSpc>
+                <a:spcPct val="120000"/>
+              </a:lnSpc>
+              <a:defRPr sz="1300" b="1">
+                <a:solidFill>
+                  <a:srgbClr val="F0EDE8"/>
+                </a:solidFill>
+                <a:latin typeface="Arial"/>
               </a:defRPr>
             </a:pPr>
             <a:r>
-              <a:t>🏴󠁧󠁢󠁥󠁮󠁧󠁿 伦敦</a:t>
-            </a:r>
-          </a:p>
-        </p:txBody>
-      </p:sp>
-      <p:sp>
-        <p:nvSpPr>
-          <p:cNvPr id="7" name="TextBox 6"/>
+              <a:t>🏴󠁧󠁢󠁥󠁮󠁧󠁿 伦敦 · 900万</a:t>
+            </a:r>
+          </a:p>
+        </p:txBody>
+      </p:sp>
+      <p:sp>
+        <p:nvSpPr>
+          <p:cNvPr id="8" name="TextBox 7"/>
           <p:cNvSpPr txBox="1"/>
           <p:nvPr/>
         </p:nvSpPr>
         <p:spPr>
           <a:xfrm>
-            <a:off x="4114800" y="2468880"/>
-            <a:ext cx="6400800" cy="274320"/>
+            <a:off x="7955279" y="2084832"/>
+            <a:ext cx="3779215" cy="502920"/>
           </a:xfrm>
           <a:prstGeom prst="rect">
             <a:avLst/>
@@ -4937,29 +5738,77 @@
           <a:lstStyle/>
           <a:p>
             <a:pPr algn="l">
-              <a:defRPr sz="1300" b="0">
-                <a:solidFill>
-                  <a:srgbClr val="F0EDE8"/>
-                </a:solidFill>
-                <a:latin typeface="Outfit"/>
+              <a:lnSpc>
+                <a:spcPct val="135000"/>
+              </a:lnSpc>
+              <a:defRPr sz="1100" b="0">
+                <a:solidFill>
+                  <a:srgbClr val="C0CCD8"/>
+                </a:solidFill>
+                <a:latin typeface="Arial"/>
               </a:defRPr>
             </a:pPr>
             <a:r>
-              <a:t>London · 900万 · 全球金融中心</a:t>
-            </a:r>
-          </a:p>
-        </p:txBody>
-      </p:sp>
-      <p:sp>
-        <p:nvSpPr>
-          <p:cNvPr id="8" name="TextBox 7"/>
+              <a:t>全球顶级金融中心</a:t>
+            </a:r>
+          </a:p>
+        </p:txBody>
+      </p:sp>
+      <p:sp>
+        <p:nvSpPr>
+          <p:cNvPr id="9" name="Rectangle 8"/>
+          <p:cNvSpPr/>
+          <p:nvPr/>
+        </p:nvSpPr>
+        <p:spPr>
+          <a:xfrm>
+            <a:off x="7680960" y="2834640"/>
+            <a:ext cx="73152" cy="548640"/>
+          </a:xfrm>
+          <a:prstGeom prst="rect">
+            <a:avLst/>
+          </a:prstGeom>
+          <a:solidFill>
+            <a:srgbClr val="E63946">
+              <a:alpha val="100000"/>
+            </a:srgbClr>
+          </a:solidFill>
+          <a:ln>
+            <a:noFill/>
+          </a:ln>
+        </p:spPr>
+        <p:style>
+          <a:lnRef idx="1">
+            <a:schemeClr val="accent1"/>
+          </a:lnRef>
+          <a:fillRef idx="3">
+            <a:schemeClr val="accent1"/>
+          </a:fillRef>
+          <a:effectRef idx="2">
+            <a:schemeClr val="accent1"/>
+          </a:effectRef>
+          <a:fontRef idx="minor">
+            <a:schemeClr val="lt1"/>
+          </a:fontRef>
+        </p:style>
+        <p:txBody>
+          <a:bodyPr rtlCol="0" anchor="ctr"/>
+          <a:lstStyle/>
+          <a:p>
+            <a:pPr algn="ctr"/>
+          </a:p>
+        </p:txBody>
+      </p:sp>
+      <p:sp>
+        <p:nvSpPr>
+          <p:cNvPr id="10" name="TextBox 9"/>
           <p:cNvSpPr txBox="1"/>
           <p:nvPr/>
         </p:nvSpPr>
         <p:spPr>
           <a:xfrm>
-            <a:off x="1828800" y="2971800"/>
-            <a:ext cx="2743200" cy="274320"/>
+            <a:off x="7955279" y="2834640"/>
+            <a:ext cx="3779215" cy="274320"/>
           </a:xfrm>
           <a:prstGeom prst="rect">
             <a:avLst/>
@@ -4973,29 +5822,32 @@
           <a:lstStyle/>
           <a:p>
             <a:pPr algn="l">
-              <a:defRPr sz="1400" b="1">
-                <a:solidFill>
-                  <a:srgbClr val="B8D8EE"/>
-                </a:solidFill>
-                <a:latin typeface="Outfit"/>
+              <a:lnSpc>
+                <a:spcPct val="120000"/>
+              </a:lnSpc>
+              <a:defRPr sz="1300" b="1">
+                <a:solidFill>
+                  <a:srgbClr val="F0EDE8"/>
+                </a:solidFill>
+                <a:latin typeface="Arial"/>
               </a:defRPr>
             </a:pPr>
             <a:r>
-              <a:t>🏴󠁧󠁢󠁳󠁣󠁴󠁿 爱丁堡</a:t>
-            </a:r>
-          </a:p>
-        </p:txBody>
-      </p:sp>
-      <p:sp>
-        <p:nvSpPr>
-          <p:cNvPr id="9" name="TextBox 8"/>
+              <a:t>🏴󠁧󠁢󠁳󠁣󠁴󠁿 爱丁堡 · 50万</a:t>
+            </a:r>
+          </a:p>
+        </p:txBody>
+      </p:sp>
+      <p:sp>
+        <p:nvSpPr>
+          <p:cNvPr id="11" name="TextBox 10"/>
           <p:cNvSpPr txBox="1"/>
           <p:nvPr/>
         </p:nvSpPr>
         <p:spPr>
           <a:xfrm>
-            <a:off x="4114800" y="2971800"/>
-            <a:ext cx="6400800" cy="274320"/>
+            <a:off x="7955279" y="3136391"/>
+            <a:ext cx="3779215" cy="502920"/>
           </a:xfrm>
           <a:prstGeom prst="rect">
             <a:avLst/>
@@ -5009,29 +5861,77 @@
           <a:lstStyle/>
           <a:p>
             <a:pPr algn="l">
-              <a:defRPr sz="1300" b="0">
-                <a:solidFill>
-                  <a:srgbClr val="F0EDE8"/>
-                </a:solidFill>
-                <a:latin typeface="Outfit"/>
+              <a:lnSpc>
+                <a:spcPct val="135000"/>
+              </a:lnSpc>
+              <a:defRPr sz="1100" b="0">
+                <a:solidFill>
+                  <a:srgbClr val="C0CCD8"/>
+                </a:solidFill>
+                <a:latin typeface="Arial"/>
               </a:defRPr>
             </a:pPr>
             <a:r>
-              <a:t>Edinburgh · 50万 · 艺术节之都</a:t>
-            </a:r>
-          </a:p>
-        </p:txBody>
-      </p:sp>
-      <p:sp>
-        <p:nvSpPr>
-          <p:cNvPr id="10" name="TextBox 9"/>
+              <a:t>世界艺术节之都</a:t>
+            </a:r>
+          </a:p>
+        </p:txBody>
+      </p:sp>
+      <p:sp>
+        <p:nvSpPr>
+          <p:cNvPr id="12" name="Rectangle 11"/>
+          <p:cNvSpPr/>
+          <p:nvPr/>
+        </p:nvSpPr>
+        <p:spPr>
+          <a:xfrm>
+            <a:off x="7680960" y="3886200"/>
+            <a:ext cx="73152" cy="548640"/>
+          </a:xfrm>
+          <a:prstGeom prst="rect">
+            <a:avLst/>
+          </a:prstGeom>
+          <a:solidFill>
+            <a:srgbClr val="E63946">
+              <a:alpha val="100000"/>
+            </a:srgbClr>
+          </a:solidFill>
+          <a:ln>
+            <a:noFill/>
+          </a:ln>
+        </p:spPr>
+        <p:style>
+          <a:lnRef idx="1">
+            <a:schemeClr val="accent1"/>
+          </a:lnRef>
+          <a:fillRef idx="3">
+            <a:schemeClr val="accent1"/>
+          </a:fillRef>
+          <a:effectRef idx="2">
+            <a:schemeClr val="accent1"/>
+          </a:effectRef>
+          <a:fontRef idx="minor">
+            <a:schemeClr val="lt1"/>
+          </a:fontRef>
+        </p:style>
+        <p:txBody>
+          <a:bodyPr rtlCol="0" anchor="ctr"/>
+          <a:lstStyle/>
+          <a:p>
+            <a:pPr algn="ctr"/>
+          </a:p>
+        </p:txBody>
+      </p:sp>
+      <p:sp>
+        <p:nvSpPr>
+          <p:cNvPr id="13" name="TextBox 12"/>
           <p:cNvSpPr txBox="1"/>
           <p:nvPr/>
         </p:nvSpPr>
         <p:spPr>
           <a:xfrm>
-            <a:off x="1828800" y="3474720"/>
-            <a:ext cx="2743200" cy="274320"/>
+            <a:off x="7955279" y="3886200"/>
+            <a:ext cx="3779215" cy="274320"/>
           </a:xfrm>
           <a:prstGeom prst="rect">
             <a:avLst/>
@@ -5045,29 +5945,32 @@
           <a:lstStyle/>
           <a:p>
             <a:pPr algn="l">
-              <a:defRPr sz="1400" b="1">
-                <a:solidFill>
-                  <a:srgbClr val="B8D8EE"/>
-                </a:solidFill>
-                <a:latin typeface="Outfit"/>
+              <a:lnSpc>
+                <a:spcPct val="120000"/>
+              </a:lnSpc>
+              <a:defRPr sz="1300" b="1">
+                <a:solidFill>
+                  <a:srgbClr val="F0EDE8"/>
+                </a:solidFill>
+                <a:latin typeface="Arial"/>
               </a:defRPr>
             </a:pPr>
             <a:r>
-              <a:t>🏴󠁧󠁢󠁷󠁬󠁳󠁿 卡迪夫</a:t>
-            </a:r>
-          </a:p>
-        </p:txBody>
-      </p:sp>
-      <p:sp>
-        <p:nvSpPr>
-          <p:cNvPr id="11" name="TextBox 10"/>
+              <a:t>🏴󠁧󠁢󠁷󠁬󠁳󠁿 卡迪夫 · 36万</a:t>
+            </a:r>
+          </a:p>
+        </p:txBody>
+      </p:sp>
+      <p:sp>
+        <p:nvSpPr>
+          <p:cNvPr id="14" name="TextBox 13"/>
           <p:cNvSpPr txBox="1"/>
           <p:nvPr/>
         </p:nvSpPr>
         <p:spPr>
           <a:xfrm>
-            <a:off x="4114800" y="3474720"/>
-            <a:ext cx="6400800" cy="274320"/>
+            <a:off x="7955279" y="4187952"/>
+            <a:ext cx="3779215" cy="502920"/>
           </a:xfrm>
           <a:prstGeom prst="rect">
             <a:avLst/>
@@ -5081,29 +5984,77 @@
           <a:lstStyle/>
           <a:p>
             <a:pPr algn="l">
-              <a:defRPr sz="1300" b="0">
-                <a:solidFill>
-                  <a:srgbClr val="F0EDE8"/>
-                </a:solidFill>
-                <a:latin typeface="Outfit"/>
+              <a:lnSpc>
+                <a:spcPct val="135000"/>
+              </a:lnSpc>
+              <a:defRPr sz="1100" b="0">
+                <a:solidFill>
+                  <a:srgbClr val="C0CCD8"/>
+                </a:solidFill>
+                <a:latin typeface="Arial"/>
               </a:defRPr>
             </a:pPr>
             <a:r>
-              <a:t>Cardiff · 36万 · 千年古堡之城</a:t>
-            </a:r>
-          </a:p>
-        </p:txBody>
-      </p:sp>
-      <p:sp>
-        <p:nvSpPr>
-          <p:cNvPr id="12" name="TextBox 11"/>
+              <a:t>千年城堡之城</a:t>
+            </a:r>
+          </a:p>
+        </p:txBody>
+      </p:sp>
+      <p:sp>
+        <p:nvSpPr>
+          <p:cNvPr id="15" name="Rectangle 14"/>
+          <p:cNvSpPr/>
+          <p:nvPr/>
+        </p:nvSpPr>
+        <p:spPr>
+          <a:xfrm>
+            <a:off x="7680960" y="4937759"/>
+            <a:ext cx="73152" cy="548640"/>
+          </a:xfrm>
+          <a:prstGeom prst="rect">
+            <a:avLst/>
+          </a:prstGeom>
+          <a:solidFill>
+            <a:srgbClr val="E63946">
+              <a:alpha val="100000"/>
+            </a:srgbClr>
+          </a:solidFill>
+          <a:ln>
+            <a:noFill/>
+          </a:ln>
+        </p:spPr>
+        <p:style>
+          <a:lnRef idx="1">
+            <a:schemeClr val="accent1"/>
+          </a:lnRef>
+          <a:fillRef idx="3">
+            <a:schemeClr val="accent1"/>
+          </a:fillRef>
+          <a:effectRef idx="2">
+            <a:schemeClr val="accent1"/>
+          </a:effectRef>
+          <a:fontRef idx="minor">
+            <a:schemeClr val="lt1"/>
+          </a:fontRef>
+        </p:style>
+        <p:txBody>
+          <a:bodyPr rtlCol="0" anchor="ctr"/>
+          <a:lstStyle/>
+          <a:p>
+            <a:pPr algn="ctr"/>
+          </a:p>
+        </p:txBody>
+      </p:sp>
+      <p:sp>
+        <p:nvSpPr>
+          <p:cNvPr id="16" name="TextBox 15"/>
           <p:cNvSpPr txBox="1"/>
           <p:nvPr/>
         </p:nvSpPr>
         <p:spPr>
           <a:xfrm>
-            <a:off x="1828800" y="3977639"/>
-            <a:ext cx="2743200" cy="274320"/>
+            <a:off x="7955279" y="4937759"/>
+            <a:ext cx="3779215" cy="274320"/>
           </a:xfrm>
           <a:prstGeom prst="rect">
             <a:avLst/>
@@ -5117,29 +6068,32 @@
           <a:lstStyle/>
           <a:p>
             <a:pPr algn="l">
-              <a:defRPr sz="1400" b="1">
-                <a:solidFill>
-                  <a:srgbClr val="B8D8EE"/>
-                </a:solidFill>
-                <a:latin typeface="Outfit"/>
+              <a:lnSpc>
+                <a:spcPct val="120000"/>
+              </a:lnSpc>
+              <a:defRPr sz="1300" b="1">
+                <a:solidFill>
+                  <a:srgbClr val="F0EDE8"/>
+                </a:solidFill>
+                <a:latin typeface="Arial"/>
               </a:defRPr>
             </a:pPr>
             <a:r>
-              <a:t>🇮🇪 贝尔法斯特</a:t>
-            </a:r>
-          </a:p>
-        </p:txBody>
-      </p:sp>
-      <p:sp>
-        <p:nvSpPr>
-          <p:cNvPr id="13" name="TextBox 12"/>
+              <a:t>🇮🇪 贝尔法斯特 · 34万</a:t>
+            </a:r>
+          </a:p>
+        </p:txBody>
+      </p:sp>
+      <p:sp>
+        <p:nvSpPr>
+          <p:cNvPr id="17" name="TextBox 16"/>
           <p:cNvSpPr txBox="1"/>
           <p:nvPr/>
         </p:nvSpPr>
         <p:spPr>
           <a:xfrm>
-            <a:off x="4114800" y="3977639"/>
-            <a:ext cx="6400800" cy="274320"/>
+            <a:off x="7955279" y="5239512"/>
+            <a:ext cx="3779215" cy="502920"/>
           </a:xfrm>
           <a:prstGeom prst="rect">
             <a:avLst/>
@@ -5153,15 +6107,18 @@
           <a:lstStyle/>
           <a:p>
             <a:pPr algn="l">
-              <a:defRPr sz="1300" b="0">
-                <a:solidFill>
-                  <a:srgbClr val="F0EDE8"/>
-                </a:solidFill>
-                <a:latin typeface="Outfit"/>
+              <a:lnSpc>
+                <a:spcPct val="135000"/>
+              </a:lnSpc>
+              <a:defRPr sz="1100" b="0">
+                <a:solidFill>
+                  <a:srgbClr val="C0CCD8"/>
+                </a:solidFill>
+                <a:latin typeface="Arial"/>
               </a:defRPr>
             </a:pPr>
             <a:r>
-              <a:t>Belfast · 34万 · 泰坦尼克号诞生地</a:t>
+              <a:t>泰坦尼克号诞生地</a:t>
             </a:r>
           </a:p>
         </p:txBody>
@@ -5216,15 +6173,15 @@
         </p:nvSpPr>
         <p:spPr>
           <a:xfrm>
-            <a:off x="0" y="0"/>
-            <a:ext cx="12191695" cy="6858000"/>
+            <a:off x="0" y="4572000"/>
+            <a:ext cx="12191695" cy="2286000"/>
           </a:xfrm>
           <a:prstGeom prst="rect">
             <a:avLst/>
           </a:prstGeom>
           <a:solidFill>
-            <a:srgbClr val="EBE6DC">
-              <a:alpha val="75000"/>
+            <a:srgbClr val="F0EDE8">
+              <a:alpha val="80000"/>
             </a:srgbClr>
           </a:solidFill>
           <a:ln>
@@ -5255,93 +6212,21 @@
       </p:sp>
       <p:sp>
         <p:nvSpPr>
-          <p:cNvPr id="4" name="TextBox 3"/>
-          <p:cNvSpPr txBox="1"/>
-          <p:nvPr/>
-        </p:nvSpPr>
-        <p:spPr>
-          <a:xfrm>
-            <a:off x="1371600" y="548640"/>
-            <a:ext cx="9448495" cy="822960"/>
-          </a:xfrm>
-          <a:prstGeom prst="rect">
-            <a:avLst/>
-          </a:prstGeom>
-          <a:noFill/>
-        </p:spPr>
-        <p:txBody>
-          <a:bodyPr wrap="square">
-            <a:spAutoFit/>
-          </a:bodyPr>
-          <a:lstStyle/>
-          <a:p>
-            <a:pPr algn="ctr">
-              <a:defRPr sz="3600" b="1">
-                <a:solidFill>
-                  <a:srgbClr val="2A3A4A"/>
-                </a:solidFill>
-                <a:latin typeface="Outfit"/>
-              </a:defRPr>
-            </a:pPr>
-            <a:r>
-              <a:t>🌾 农业与种植</a:t>
-            </a:r>
-          </a:p>
-        </p:txBody>
-      </p:sp>
-      <p:sp>
-        <p:nvSpPr>
-          <p:cNvPr id="5" name="TextBox 4"/>
-          <p:cNvSpPr txBox="1"/>
-          <p:nvPr/>
-        </p:nvSpPr>
-        <p:spPr>
-          <a:xfrm>
-            <a:off x="1371600" y="1234440"/>
-            <a:ext cx="9448495" cy="457200"/>
-          </a:xfrm>
-          <a:prstGeom prst="rect">
-            <a:avLst/>
-          </a:prstGeom>
-          <a:noFill/>
-        </p:spPr>
-        <p:txBody>
-          <a:bodyPr wrap="square">
-            <a:spAutoFit/>
-          </a:bodyPr>
-          <a:lstStyle/>
-          <a:p>
-            <a:pPr algn="ctr">
-              <a:defRPr sz="1600" b="0">
-                <a:solidFill>
-                  <a:srgbClr val="2A3A4A"/>
-                </a:solidFill>
-                <a:latin typeface="Outfit"/>
-              </a:defRPr>
-            </a:pPr>
-            <a:r>
-              <a:t>英国农业以畜牧业为主体，受温带海洋性气候深刻影响</a:t>
-            </a:r>
-          </a:p>
-        </p:txBody>
-      </p:sp>
-      <p:sp>
-        <p:nvSpPr>
-          <p:cNvPr id="6" name="Rectangle 5"/>
+          <p:cNvPr id="4" name="Rectangle 3"/>
           <p:cNvSpPr/>
           <p:nvPr/>
         </p:nvSpPr>
         <p:spPr>
           <a:xfrm>
-            <a:off x="1371600" y="2468880"/>
-            <a:ext cx="4587087" cy="3200400"/>
+            <a:off x="0" y="3657600"/>
+            <a:ext cx="12191695" cy="914400"/>
           </a:xfrm>
           <a:prstGeom prst="rect">
             <a:avLst/>
           </a:prstGeom>
           <a:solidFill>
-            <a:srgbClr val="EBE8E1">
-              <a:alpha val="65000"/>
+            <a:srgbClr val="F0EDE8">
+              <a:alpha val="50000"/>
             </a:srgbClr>
           </a:solidFill>
           <a:ln>
@@ -5372,14 +6257,14 @@
       </p:sp>
       <p:sp>
         <p:nvSpPr>
-          <p:cNvPr id="7" name="TextBox 6"/>
+          <p:cNvPr id="5" name="TextBox 4"/>
           <p:cNvSpPr txBox="1"/>
           <p:nvPr/>
         </p:nvSpPr>
         <p:spPr>
           <a:xfrm>
-            <a:off x="1508760" y="2560320"/>
-            <a:ext cx="4312767" cy="365760"/>
+            <a:off x="1097280" y="457200"/>
+            <a:ext cx="9601200" cy="640080"/>
           </a:xfrm>
           <a:prstGeom prst="rect">
             <a:avLst/>
@@ -5393,29 +6278,32 @@
           <a:lstStyle/>
           <a:p>
             <a:pPr algn="l">
-              <a:defRPr sz="1600" b="1">
+              <a:lnSpc>
+                <a:spcPct val="120000"/>
+              </a:lnSpc>
+              <a:defRPr sz="3600" b="1">
                 <a:solidFill>
                   <a:srgbClr val="1A2A3A"/>
                 </a:solidFill>
-                <a:latin typeface="Outfit"/>
+                <a:latin typeface="Arial"/>
               </a:defRPr>
             </a:pPr>
             <a:r>
-              <a:t>✅ 优势</a:t>
-            </a:r>
-          </a:p>
-        </p:txBody>
-      </p:sp>
-      <p:sp>
-        <p:nvSpPr>
-          <p:cNvPr id="8" name="TextBox 7"/>
+              <a:t>🌾 农业与种植</a:t>
+            </a:r>
+          </a:p>
+        </p:txBody>
+      </p:sp>
+      <p:sp>
+        <p:nvSpPr>
+          <p:cNvPr id="6" name="TextBox 5"/>
           <p:cNvSpPr txBox="1"/>
           <p:nvPr/>
         </p:nvSpPr>
         <p:spPr>
           <a:xfrm>
-            <a:off x="1508760" y="2880360"/>
-            <a:ext cx="4312767" cy="2697480"/>
+            <a:off x="1097280" y="1005840"/>
+            <a:ext cx="9601200" cy="365760"/>
           </a:xfrm>
           <a:prstGeom prst="rect">
             <a:avLst/>
@@ -5430,46 +6318,38 @@
           <a:p>
             <a:pPr algn="l">
               <a:lnSpc>
-                <a:spcPct val="140000"/>
+                <a:spcPct val="120000"/>
               </a:lnSpc>
-              <a:defRPr sz="1300">
+              <a:defRPr sz="1400" b="0">
                 <a:solidFill>
                   <a:srgbClr val="2A3A4A"/>
                 </a:solidFill>
-                <a:latin typeface="Outfit"/>
+                <a:latin typeface="Arial"/>
               </a:defRPr>
             </a:pPr>
             <a:r>
-              <a:t>温和湿润，牧草全年生长</a:t>
-            </a:r>
-            <a:br/>
-            <a:r>
-              <a:t>南部平原土壤肥沃</a:t>
-            </a:r>
-            <a:br/>
-            <a:r>
-              <a:t>轮作 + 现代农业技术</a:t>
-            </a:r>
-          </a:p>
-        </p:txBody>
-      </p:sp>
-      <p:sp>
-        <p:nvSpPr>
-          <p:cNvPr id="9" name="Rectangle 8"/>
+              <a:t>英国农业以畜牧业为主体，受温带海洋性气候影响</a:t>
+            </a:r>
+          </a:p>
+        </p:txBody>
+      </p:sp>
+      <p:sp>
+        <p:nvSpPr>
+          <p:cNvPr id="7" name="Rectangle 6"/>
           <p:cNvSpPr/>
           <p:nvPr/>
         </p:nvSpPr>
         <p:spPr>
           <a:xfrm>
-            <a:off x="6233007" y="2468880"/>
-            <a:ext cx="4587087" cy="3200400"/>
+            <a:off x="1097280" y="4023360"/>
+            <a:ext cx="4572000" cy="1828800"/>
           </a:xfrm>
           <a:prstGeom prst="rect">
             <a:avLst/>
           </a:prstGeom>
           <a:solidFill>
-            <a:srgbClr val="EBE8E1">
-              <a:alpha val="65000"/>
+            <a:srgbClr val="F5F2ED">
+              <a:alpha val="80000"/>
             </a:srgbClr>
           </a:solidFill>
           <a:ln>
@@ -5500,14 +6380,14 @@
       </p:sp>
       <p:sp>
         <p:nvSpPr>
-          <p:cNvPr id="10" name="TextBox 9"/>
+          <p:cNvPr id="8" name="TextBox 7"/>
           <p:cNvSpPr txBox="1"/>
           <p:nvPr/>
         </p:nvSpPr>
         <p:spPr>
           <a:xfrm>
-            <a:off x="6370167" y="2560320"/>
-            <a:ext cx="4312767" cy="365760"/>
+            <a:off x="1325880" y="4160520"/>
+            <a:ext cx="4114800" cy="320040"/>
           </a:xfrm>
           <a:prstGeom prst="rect">
             <a:avLst/>
@@ -5521,29 +6401,32 @@
           <a:lstStyle/>
           <a:p>
             <a:pPr algn="l">
-              <a:defRPr sz="1600" b="1">
+              <a:lnSpc>
+                <a:spcPct val="120000"/>
+              </a:lnSpc>
+              <a:defRPr sz="1400" b="1">
                 <a:solidFill>
                   <a:srgbClr val="1A2A3A"/>
                 </a:solidFill>
-                <a:latin typeface="Outfit"/>
+                <a:latin typeface="Arial"/>
               </a:defRPr>
             </a:pPr>
             <a:r>
-              <a:t>⚠️ 挑战</a:t>
-            </a:r>
-          </a:p>
-        </p:txBody>
-      </p:sp>
-      <p:sp>
-        <p:nvSpPr>
-          <p:cNvPr id="11" name="TextBox 10"/>
+              <a:t>✅ 优势</a:t>
+            </a:r>
+          </a:p>
+        </p:txBody>
+      </p:sp>
+      <p:sp>
+        <p:nvSpPr>
+          <p:cNvPr id="9" name="TextBox 8"/>
           <p:cNvSpPr txBox="1"/>
           <p:nvPr/>
         </p:nvSpPr>
         <p:spPr>
           <a:xfrm>
-            <a:off x="6370167" y="2880360"/>
-            <a:ext cx="4312767" cy="2697480"/>
+            <a:off x="1325880" y="4526280"/>
+            <a:ext cx="4114800" cy="1188720"/>
           </a:xfrm>
           <a:prstGeom prst="rect">
             <a:avLst/>
@@ -5560,37 +6443,78 @@
               <a:lnSpc>
                 <a:spcPct val="140000"/>
               </a:lnSpc>
-              <a:defRPr sz="1300">
+              <a:defRPr sz="1200" b="0">
                 <a:solidFill>
                   <a:srgbClr val="2A3A4A"/>
                 </a:solidFill>
-                <a:latin typeface="Outfit"/>
+                <a:latin typeface="Arial"/>
               </a:defRPr>
             </a:pPr>
             <a:r>
-              <a:t>高纬度日照不足</a:t>
+              <a:t>温和湿润 · 南部平原土壤肥沃</a:t>
             </a:r>
             <a:br/>
             <a:r>
-              <a:t>降雨频繁导致涝渍</a:t>
-            </a:r>
-            <a:br/>
-            <a:r>
-              <a:t>劳动成本高，进口依赖大</a:t>
-            </a:r>
-          </a:p>
-        </p:txBody>
-      </p:sp>
-      <p:sp>
-        <p:nvSpPr>
-          <p:cNvPr id="12" name="TextBox 11"/>
+              <a:t>轮作 + 现代农业技术</a:t>
+            </a:r>
+          </a:p>
+        </p:txBody>
+      </p:sp>
+      <p:sp>
+        <p:nvSpPr>
+          <p:cNvPr id="10" name="Rectangle 9"/>
+          <p:cNvSpPr/>
+          <p:nvPr/>
+        </p:nvSpPr>
+        <p:spPr>
+          <a:xfrm>
+            <a:off x="6035040" y="4023360"/>
+            <a:ext cx="4572000" cy="1828800"/>
+          </a:xfrm>
+          <a:prstGeom prst="rect">
+            <a:avLst/>
+          </a:prstGeom>
+          <a:solidFill>
+            <a:srgbClr val="F5F2ED">
+              <a:alpha val="80000"/>
+            </a:srgbClr>
+          </a:solidFill>
+          <a:ln>
+            <a:noFill/>
+          </a:ln>
+        </p:spPr>
+        <p:style>
+          <a:lnRef idx="1">
+            <a:schemeClr val="accent1"/>
+          </a:lnRef>
+          <a:fillRef idx="3">
+            <a:schemeClr val="accent1"/>
+          </a:fillRef>
+          <a:effectRef idx="2">
+            <a:schemeClr val="accent1"/>
+          </a:effectRef>
+          <a:fontRef idx="minor">
+            <a:schemeClr val="lt1"/>
+          </a:fontRef>
+        </p:style>
+        <p:txBody>
+          <a:bodyPr rtlCol="0" anchor="ctr"/>
+          <a:lstStyle/>
+          <a:p>
+            <a:pPr algn="ctr"/>
+          </a:p>
+        </p:txBody>
+      </p:sp>
+      <p:sp>
+        <p:nvSpPr>
+          <p:cNvPr id="11" name="TextBox 10"/>
           <p:cNvSpPr txBox="1"/>
           <p:nvPr/>
         </p:nvSpPr>
         <p:spPr>
           <a:xfrm>
-            <a:off x="1371600" y="5669280"/>
-            <a:ext cx="9448495" cy="457200"/>
+            <a:off x="6263640" y="4160520"/>
+            <a:ext cx="4114800" cy="320040"/>
           </a:xfrm>
           <a:prstGeom prst="rect">
             <a:avLst/>
@@ -5603,16 +6527,101 @@
           </a:bodyPr>
           <a:lstStyle/>
           <a:p>
-            <a:pPr algn="ctr">
-              <a:defRPr sz="1300" b="0">
+            <a:pPr algn="l">
+              <a:lnSpc>
+                <a:spcPct val="120000"/>
+              </a:lnSpc>
+              <a:defRPr sz="1400" b="1">
+                <a:solidFill>
+                  <a:srgbClr val="1A2A3A"/>
+                </a:solidFill>
+                <a:latin typeface="Arial"/>
+              </a:defRPr>
+            </a:pPr>
+            <a:r>
+              <a:t>⚠️ 挑战</a:t>
+            </a:r>
+          </a:p>
+        </p:txBody>
+      </p:sp>
+      <p:sp>
+        <p:nvSpPr>
+          <p:cNvPr id="12" name="TextBox 11"/>
+          <p:cNvSpPr txBox="1"/>
+          <p:nvPr/>
+        </p:nvSpPr>
+        <p:spPr>
+          <a:xfrm>
+            <a:off x="6263640" y="4526280"/>
+            <a:ext cx="4114800" cy="1188720"/>
+          </a:xfrm>
+          <a:prstGeom prst="rect">
+            <a:avLst/>
+          </a:prstGeom>
+          <a:noFill/>
+        </p:spPr>
+        <p:txBody>
+          <a:bodyPr wrap="square">
+            <a:spAutoFit/>
+          </a:bodyPr>
+          <a:lstStyle/>
+          <a:p>
+            <a:pPr algn="l">
+              <a:lnSpc>
+                <a:spcPct val="140000"/>
+              </a:lnSpc>
+              <a:defRPr sz="1200" b="0">
                 <a:solidFill>
                   <a:srgbClr val="2A3A4A"/>
                 </a:solidFill>
-                <a:latin typeface="Outfit"/>
+                <a:latin typeface="Arial"/>
               </a:defRPr>
             </a:pPr>
             <a:r>
-              <a:t>🌾 主要作物：大麦、小麦、油菜籽 · 🐑 畜牧业占比 &gt;60%</a:t>
+              <a:t>高纬度日照不足</a:t>
+            </a:r>
+            <a:br/>
+            <a:r>
+              <a:t>降雨频繁 · 劳动成本高</a:t>
+            </a:r>
+          </a:p>
+        </p:txBody>
+      </p:sp>
+      <p:sp>
+        <p:nvSpPr>
+          <p:cNvPr id="13" name="TextBox 12"/>
+          <p:cNvSpPr txBox="1"/>
+          <p:nvPr/>
+        </p:nvSpPr>
+        <p:spPr>
+          <a:xfrm>
+            <a:off x="1097280" y="5852160"/>
+            <a:ext cx="9601200" cy="365760"/>
+          </a:xfrm>
+          <a:prstGeom prst="rect">
+            <a:avLst/>
+          </a:prstGeom>
+          <a:noFill/>
+        </p:spPr>
+        <p:txBody>
+          <a:bodyPr wrap="square">
+            <a:spAutoFit/>
+          </a:bodyPr>
+          <a:lstStyle/>
+          <a:p>
+            <a:pPr algn="l">
+              <a:lnSpc>
+                <a:spcPct val="120000"/>
+              </a:lnSpc>
+              <a:defRPr sz="1200" b="0">
+                <a:solidFill>
+                  <a:srgbClr val="2A3A4A"/>
+                </a:solidFill>
+                <a:latin typeface="Arial"/>
+              </a:defRPr>
+            </a:pPr>
+            <a:r>
+              <a:t>🌾 大麦 · 小麦 · 油菜籽  |  🐑 畜牧业占比 &gt;60%  |  Cotswolds 农牧典范</a:t>
             </a:r>
           </a:p>
         </p:txBody>
@@ -5667,15 +6676,15 @@
         </p:nvSpPr>
         <p:spPr>
           <a:xfrm>
-            <a:off x="0" y="0"/>
-            <a:ext cx="12191695" cy="6858000"/>
+            <a:off x="0" y="4572000"/>
+            <a:ext cx="12191695" cy="2286000"/>
           </a:xfrm>
           <a:prstGeom prst="rect">
             <a:avLst/>
           </a:prstGeom>
           <a:solidFill>
-            <a:srgbClr val="122037">
-              <a:alpha val="65000"/>
+            <a:srgbClr val="1A1C20">
+              <a:alpha val="70000"/>
             </a:srgbClr>
           </a:solidFill>
           <a:ln>
@@ -5706,93 +6715,21 @@
       </p:sp>
       <p:sp>
         <p:nvSpPr>
-          <p:cNvPr id="4" name="TextBox 3"/>
-          <p:cNvSpPr txBox="1"/>
-          <p:nvPr/>
-        </p:nvSpPr>
-        <p:spPr>
-          <a:xfrm>
-            <a:off x="1371600" y="548640"/>
-            <a:ext cx="9448495" cy="822960"/>
-          </a:xfrm>
-          <a:prstGeom prst="rect">
-            <a:avLst/>
-          </a:prstGeom>
-          <a:noFill/>
-        </p:spPr>
-        <p:txBody>
-          <a:bodyPr wrap="square">
-            <a:spAutoFit/>
-          </a:bodyPr>
-          <a:lstStyle/>
-          <a:p>
-            <a:pPr algn="ctr">
-              <a:defRPr sz="3600" b="1">
-                <a:solidFill>
-                  <a:srgbClr val="F0EDE8"/>
-                </a:solidFill>
-                <a:latin typeface="Outfit"/>
-              </a:defRPr>
-            </a:pPr>
-            <a:r>
-              <a:t>⚙️ 工业革命</a:t>
-            </a:r>
-          </a:p>
-        </p:txBody>
-      </p:sp>
-      <p:sp>
-        <p:nvSpPr>
-          <p:cNvPr id="5" name="TextBox 4"/>
-          <p:cNvSpPr txBox="1"/>
-          <p:nvPr/>
-        </p:nvSpPr>
-        <p:spPr>
-          <a:xfrm>
-            <a:off x="1371600" y="1234440"/>
-            <a:ext cx="9448495" cy="457200"/>
-          </a:xfrm>
-          <a:prstGeom prst="rect">
-            <a:avLst/>
-          </a:prstGeom>
-          <a:noFill/>
-        </p:spPr>
-        <p:txBody>
-          <a:bodyPr wrap="square">
-            <a:spAutoFit/>
-          </a:bodyPr>
-          <a:lstStyle/>
-          <a:p>
-            <a:pPr algn="ctr">
-              <a:defRPr sz="1600" b="0">
-                <a:solidFill>
-                  <a:srgbClr val="F0EDE8"/>
-                </a:solidFill>
-                <a:latin typeface="Outfit"/>
-              </a:defRPr>
-            </a:pPr>
-            <a:r>
-              <a:t>英国是工业革命的发源地 · 约1760–1840 · 从手工到机器的飞跃</a:t>
-            </a:r>
-          </a:p>
-        </p:txBody>
-      </p:sp>
-      <p:sp>
-        <p:nvSpPr>
-          <p:cNvPr id="6" name="Rectangle 5"/>
+          <p:cNvPr id="4" name="Rectangle 3"/>
           <p:cNvSpPr/>
           <p:nvPr/>
         </p:nvSpPr>
         <p:spPr>
           <a:xfrm>
-            <a:off x="1371600" y="2468880"/>
-            <a:ext cx="4587087" cy="3200400"/>
+            <a:off x="0" y="3657600"/>
+            <a:ext cx="12191695" cy="914400"/>
           </a:xfrm>
           <a:prstGeom prst="rect">
             <a:avLst/>
           </a:prstGeom>
           <a:solidFill>
-            <a:srgbClr val="283241">
-              <a:alpha val="65000"/>
+            <a:srgbClr val="1A1C20">
+              <a:alpha val="40000"/>
             </a:srgbClr>
           </a:solidFill>
           <a:ln>
@@ -5823,104 +6760,21 @@
       </p:sp>
       <p:sp>
         <p:nvSpPr>
-          <p:cNvPr id="7" name="TextBox 6"/>
-          <p:cNvSpPr txBox="1"/>
-          <p:nvPr/>
-        </p:nvSpPr>
-        <p:spPr>
-          <a:xfrm>
-            <a:off x="1508760" y="2560320"/>
-            <a:ext cx="4312767" cy="365760"/>
-          </a:xfrm>
-          <a:prstGeom prst="rect">
-            <a:avLst/>
-          </a:prstGeom>
-          <a:noFill/>
-        </p:spPr>
-        <p:txBody>
-          <a:bodyPr wrap="square">
-            <a:spAutoFit/>
-          </a:bodyPr>
-          <a:lstStyle/>
-          <a:p>
-            <a:pPr algn="l">
-              <a:defRPr sz="1600" b="1">
-                <a:solidFill>
-                  <a:srgbClr val="B8D8EE"/>
-                </a:solidFill>
-                <a:latin typeface="Outfit"/>
-              </a:defRPr>
-            </a:pPr>
-            <a:r>
-              <a:t>📜 核心变革</a:t>
-            </a:r>
-          </a:p>
-        </p:txBody>
-      </p:sp>
-      <p:sp>
-        <p:nvSpPr>
-          <p:cNvPr id="8" name="TextBox 7"/>
-          <p:cNvSpPr txBox="1"/>
-          <p:nvPr/>
-        </p:nvSpPr>
-        <p:spPr>
-          <a:xfrm>
-            <a:off x="1508760" y="2880360"/>
-            <a:ext cx="4312767" cy="2697480"/>
-          </a:xfrm>
-          <a:prstGeom prst="rect">
-            <a:avLst/>
-          </a:prstGeom>
-          <a:noFill/>
-        </p:spPr>
-        <p:txBody>
-          <a:bodyPr wrap="square">
-            <a:spAutoFit/>
-          </a:bodyPr>
-          <a:lstStyle/>
-          <a:p>
-            <a:pPr algn="l">
-              <a:lnSpc>
-                <a:spcPct val="140000"/>
-              </a:lnSpc>
-              <a:defRPr sz="1300">
-                <a:solidFill>
-                  <a:srgbClr val="F0EDE8"/>
-                </a:solidFill>
-                <a:latin typeface="Outfit"/>
-              </a:defRPr>
-            </a:pPr>
-            <a:r>
-              <a:t>蒸汽机改良 → 机器取代手工</a:t>
-            </a:r>
-            <a:br/>
-            <a:r>
-              <a:t>纺织业机械化 → 工厂制度诞生</a:t>
-            </a:r>
-            <a:br/>
-            <a:r>
-              <a:t>英国成为"世界工厂"</a:t>
-            </a:r>
-          </a:p>
-        </p:txBody>
-      </p:sp>
-      <p:sp>
-        <p:nvSpPr>
-          <p:cNvPr id="9" name="Rectangle 8"/>
+          <p:cNvPr id="5" name="Rectangle 4"/>
           <p:cNvSpPr/>
           <p:nvPr/>
         </p:nvSpPr>
         <p:spPr>
           <a:xfrm>
-            <a:off x="6233007" y="2468880"/>
-            <a:ext cx="4587087" cy="3200400"/>
+            <a:off x="0" y="3200400"/>
+            <a:ext cx="12191695" cy="457200"/>
           </a:xfrm>
           <a:prstGeom prst="rect">
             <a:avLst/>
           </a:prstGeom>
           <a:solidFill>
-            <a:srgbClr val="283241">
-              <a:alpha val="65000"/>
+            <a:srgbClr val="1A1C20">
+              <a:alpha val="20000"/>
             </a:srgbClr>
           </a:solidFill>
           <a:ln>
@@ -5951,14 +6805,14 @@
       </p:sp>
       <p:sp>
         <p:nvSpPr>
-          <p:cNvPr id="10" name="TextBox 9"/>
+          <p:cNvPr id="6" name="TextBox 5"/>
           <p:cNvSpPr txBox="1"/>
           <p:nvPr/>
         </p:nvSpPr>
         <p:spPr>
           <a:xfrm>
-            <a:off x="6370167" y="2560320"/>
-            <a:ext cx="4312767" cy="365760"/>
+            <a:off x="1097280" y="457200"/>
+            <a:ext cx="9601200" cy="640080"/>
           </a:xfrm>
           <a:prstGeom prst="rect">
             <a:avLst/>
@@ -5972,29 +6826,155 @@
           <a:lstStyle/>
           <a:p>
             <a:pPr algn="l">
-              <a:defRPr sz="1600" b="1">
-                <a:solidFill>
-                  <a:srgbClr val="B8D8EE"/>
-                </a:solidFill>
-                <a:latin typeface="Outfit"/>
+              <a:lnSpc>
+                <a:spcPct val="120000"/>
+              </a:lnSpc>
+              <a:defRPr sz="3600" b="1">
+                <a:solidFill>
+                  <a:srgbClr val="F0EDE8"/>
+                </a:solidFill>
+                <a:latin typeface="Arial"/>
               </a:defRPr>
             </a:pPr>
             <a:r>
-              <a:t>👤 杰出代表</a:t>
-            </a:r>
-          </a:p>
-        </p:txBody>
-      </p:sp>
-      <p:sp>
-        <p:nvSpPr>
-          <p:cNvPr id="11" name="TextBox 10"/>
+              <a:t>⚙️ 工业革命</a:t>
+            </a:r>
+          </a:p>
+        </p:txBody>
+      </p:sp>
+      <p:sp>
+        <p:nvSpPr>
+          <p:cNvPr id="7" name="TextBox 6"/>
           <p:cNvSpPr txBox="1"/>
           <p:nvPr/>
         </p:nvSpPr>
         <p:spPr>
           <a:xfrm>
-            <a:off x="6370167" y="2880360"/>
-            <a:ext cx="4312767" cy="2697480"/>
+            <a:off x="1097280" y="1005840"/>
+            <a:ext cx="9601200" cy="365760"/>
+          </a:xfrm>
+          <a:prstGeom prst="rect">
+            <a:avLst/>
+          </a:prstGeom>
+          <a:noFill/>
+        </p:spPr>
+        <p:txBody>
+          <a:bodyPr wrap="square">
+            <a:spAutoFit/>
+          </a:bodyPr>
+          <a:lstStyle/>
+          <a:p>
+            <a:pPr algn="l">
+              <a:lnSpc>
+                <a:spcPct val="120000"/>
+              </a:lnSpc>
+              <a:defRPr sz="1400" b="0">
+                <a:solidFill>
+                  <a:srgbClr val="A0AEBE"/>
+                </a:solidFill>
+                <a:latin typeface="Arial"/>
+              </a:defRPr>
+            </a:pPr>
+            <a:r>
+              <a:t>英国是工业革命的发源地 (1760–1840) · 从手工到机器的飞跃</a:t>
+            </a:r>
+          </a:p>
+        </p:txBody>
+      </p:sp>
+      <p:sp>
+        <p:nvSpPr>
+          <p:cNvPr id="8" name="Rectangle 7"/>
+          <p:cNvSpPr/>
+          <p:nvPr/>
+        </p:nvSpPr>
+        <p:spPr>
+          <a:xfrm>
+            <a:off x="1097280" y="4114800"/>
+            <a:ext cx="4572000" cy="1828800"/>
+          </a:xfrm>
+          <a:prstGeom prst="rect">
+            <a:avLst/>
+          </a:prstGeom>
+          <a:solidFill>
+            <a:srgbClr val="282D3A">
+              <a:alpha val="55000"/>
+            </a:srgbClr>
+          </a:solidFill>
+          <a:ln>
+            <a:noFill/>
+          </a:ln>
+        </p:spPr>
+        <p:style>
+          <a:lnRef idx="1">
+            <a:schemeClr val="accent1"/>
+          </a:lnRef>
+          <a:fillRef idx="3">
+            <a:schemeClr val="accent1"/>
+          </a:fillRef>
+          <a:effectRef idx="2">
+            <a:schemeClr val="accent1"/>
+          </a:effectRef>
+          <a:fontRef idx="minor">
+            <a:schemeClr val="lt1"/>
+          </a:fontRef>
+        </p:style>
+        <p:txBody>
+          <a:bodyPr rtlCol="0" anchor="ctr"/>
+          <a:lstStyle/>
+          <a:p>
+            <a:pPr algn="ctr"/>
+          </a:p>
+        </p:txBody>
+      </p:sp>
+      <p:sp>
+        <p:nvSpPr>
+          <p:cNvPr id="9" name="TextBox 8"/>
+          <p:cNvSpPr txBox="1"/>
+          <p:nvPr/>
+        </p:nvSpPr>
+        <p:spPr>
+          <a:xfrm>
+            <a:off x="1325880" y="4251960"/>
+            <a:ext cx="4114800" cy="320040"/>
+          </a:xfrm>
+          <a:prstGeom prst="rect">
+            <a:avLst/>
+          </a:prstGeom>
+          <a:noFill/>
+        </p:spPr>
+        <p:txBody>
+          <a:bodyPr wrap="square">
+            <a:spAutoFit/>
+          </a:bodyPr>
+          <a:lstStyle/>
+          <a:p>
+            <a:pPr algn="l">
+              <a:lnSpc>
+                <a:spcPct val="120000"/>
+              </a:lnSpc>
+              <a:defRPr sz="1400" b="1">
+                <a:solidFill>
+                  <a:srgbClr val="F0EDE8"/>
+                </a:solidFill>
+                <a:latin typeface="Arial"/>
+              </a:defRPr>
+            </a:pPr>
+            <a:r>
+              <a:t>📜 核心变革</a:t>
+            </a:r>
+          </a:p>
+        </p:txBody>
+      </p:sp>
+      <p:sp>
+        <p:nvSpPr>
+          <p:cNvPr id="10" name="TextBox 9"/>
+          <p:cNvSpPr txBox="1"/>
+          <p:nvPr/>
+        </p:nvSpPr>
+        <p:spPr>
+          <a:xfrm>
+            <a:off x="1325880" y="4617720"/>
+            <a:ext cx="4114800" cy="1188720"/>
           </a:xfrm>
           <a:prstGeom prst="rect">
             <a:avLst/>
@@ -6011,19 +6991,146 @@
               <a:lnSpc>
                 <a:spcPct val="140000"/>
               </a:lnSpc>
-              <a:defRPr sz="1300">
+              <a:defRPr sz="1200" b="0">
                 <a:solidFill>
                   <a:srgbClr val="F0EDE8"/>
                 </a:solidFill>
-                <a:latin typeface="Outfit"/>
+                <a:latin typeface="Arial"/>
               </a:defRPr>
             </a:pPr>
             <a:r>
-              <a:t>瓦特 — 改良蒸汽机，工业核心动力</a:t>
+              <a:t>蒸汽机 → 机器手工</a:t>
             </a:r>
             <a:br/>
             <a:r>
-              <a:t>阿克莱特 — 水力纺纱机，现代工厂制度之父</a:t>
+              <a:t>工厂制度诞生 · 英国成为"世界工厂"</a:t>
+            </a:r>
+          </a:p>
+        </p:txBody>
+      </p:sp>
+      <p:sp>
+        <p:nvSpPr>
+          <p:cNvPr id="11" name="Rectangle 10"/>
+          <p:cNvSpPr/>
+          <p:nvPr/>
+        </p:nvSpPr>
+        <p:spPr>
+          <a:xfrm>
+            <a:off x="6035040" y="4114800"/>
+            <a:ext cx="4572000" cy="1828800"/>
+          </a:xfrm>
+          <a:prstGeom prst="rect">
+            <a:avLst/>
+          </a:prstGeom>
+          <a:solidFill>
+            <a:srgbClr val="282D3A">
+              <a:alpha val="55000"/>
+            </a:srgbClr>
+          </a:solidFill>
+          <a:ln>
+            <a:noFill/>
+          </a:ln>
+        </p:spPr>
+        <p:style>
+          <a:lnRef idx="1">
+            <a:schemeClr val="accent1"/>
+          </a:lnRef>
+          <a:fillRef idx="3">
+            <a:schemeClr val="accent1"/>
+          </a:fillRef>
+          <a:effectRef idx="2">
+            <a:schemeClr val="accent1"/>
+          </a:effectRef>
+          <a:fontRef idx="minor">
+            <a:schemeClr val="lt1"/>
+          </a:fontRef>
+        </p:style>
+        <p:txBody>
+          <a:bodyPr rtlCol="0" anchor="ctr"/>
+          <a:lstStyle/>
+          <a:p>
+            <a:pPr algn="ctr"/>
+          </a:p>
+        </p:txBody>
+      </p:sp>
+      <p:sp>
+        <p:nvSpPr>
+          <p:cNvPr id="12" name="TextBox 11"/>
+          <p:cNvSpPr txBox="1"/>
+          <p:nvPr/>
+        </p:nvSpPr>
+        <p:spPr>
+          <a:xfrm>
+            <a:off x="6263640" y="4251960"/>
+            <a:ext cx="4114800" cy="320040"/>
+          </a:xfrm>
+          <a:prstGeom prst="rect">
+            <a:avLst/>
+          </a:prstGeom>
+          <a:noFill/>
+        </p:spPr>
+        <p:txBody>
+          <a:bodyPr wrap="square">
+            <a:spAutoFit/>
+          </a:bodyPr>
+          <a:lstStyle/>
+          <a:p>
+            <a:pPr algn="l">
+              <a:lnSpc>
+                <a:spcPct val="120000"/>
+              </a:lnSpc>
+              <a:defRPr sz="1400" b="1">
+                <a:solidFill>
+                  <a:srgbClr val="F0EDE8"/>
+                </a:solidFill>
+                <a:latin typeface="Arial"/>
+              </a:defRPr>
+            </a:pPr>
+            <a:r>
+              <a:t>👤 杰出代表</a:t>
+            </a:r>
+          </a:p>
+        </p:txBody>
+      </p:sp>
+      <p:sp>
+        <p:nvSpPr>
+          <p:cNvPr id="13" name="TextBox 12"/>
+          <p:cNvSpPr txBox="1"/>
+          <p:nvPr/>
+        </p:nvSpPr>
+        <p:spPr>
+          <a:xfrm>
+            <a:off x="6263640" y="4617720"/>
+            <a:ext cx="4114800" cy="1188720"/>
+          </a:xfrm>
+          <a:prstGeom prst="rect">
+            <a:avLst/>
+          </a:prstGeom>
+          <a:noFill/>
+        </p:spPr>
+        <p:txBody>
+          <a:bodyPr wrap="square">
+            <a:spAutoFit/>
+          </a:bodyPr>
+          <a:lstStyle/>
+          <a:p>
+            <a:pPr algn="l">
+              <a:lnSpc>
+                <a:spcPct val="140000"/>
+              </a:lnSpc>
+              <a:defRPr sz="1200" b="0">
+                <a:solidFill>
+                  <a:srgbClr val="F0EDE8"/>
+                </a:solidFill>
+                <a:latin typeface="Arial"/>
+              </a:defRPr>
+            </a:pPr>
+            <a:r>
+              <a:t>瓦特 → 改良蒸汽机</a:t>
+            </a:r>
+            <a:br/>
+            <a:r>
+              <a:t>阿克莱特 → 现代工厂制度之父</a:t>
             </a:r>
           </a:p>
         </p:txBody>
@@ -6078,15 +7185,15 @@
         </p:nvSpPr>
         <p:spPr>
           <a:xfrm>
-            <a:off x="0" y="0"/>
-            <a:ext cx="12191695" cy="6858000"/>
+            <a:off x="0" y="4572000"/>
+            <a:ext cx="12191695" cy="2286000"/>
           </a:xfrm>
           <a:prstGeom prst="rect">
             <a:avLst/>
           </a:prstGeom>
           <a:solidFill>
-            <a:srgbClr val="EBE6DC">
-              <a:alpha val="75000"/>
+            <a:srgbClr val="F0EDE8">
+              <a:alpha val="80000"/>
             </a:srgbClr>
           </a:solidFill>
           <a:ln>
@@ -6117,14 +7224,59 @@
       </p:sp>
       <p:sp>
         <p:nvSpPr>
-          <p:cNvPr id="4" name="TextBox 3"/>
+          <p:cNvPr id="4" name="Rectangle 3"/>
+          <p:cNvSpPr/>
+          <p:nvPr/>
+        </p:nvSpPr>
+        <p:spPr>
+          <a:xfrm>
+            <a:off x="0" y="3657600"/>
+            <a:ext cx="12191695" cy="914400"/>
+          </a:xfrm>
+          <a:prstGeom prst="rect">
+            <a:avLst/>
+          </a:prstGeom>
+          <a:solidFill>
+            <a:srgbClr val="F0EDE8">
+              <a:alpha val="50000"/>
+            </a:srgbClr>
+          </a:solidFill>
+          <a:ln>
+            <a:noFill/>
+          </a:ln>
+        </p:spPr>
+        <p:style>
+          <a:lnRef idx="1">
+            <a:schemeClr val="accent1"/>
+          </a:lnRef>
+          <a:fillRef idx="3">
+            <a:schemeClr val="accent1"/>
+          </a:fillRef>
+          <a:effectRef idx="2">
+            <a:schemeClr val="accent1"/>
+          </a:effectRef>
+          <a:fontRef idx="minor">
+            <a:schemeClr val="lt1"/>
+          </a:fontRef>
+        </p:style>
+        <p:txBody>
+          <a:bodyPr rtlCol="0" anchor="ctr"/>
+          <a:lstStyle/>
+          <a:p>
+            <a:pPr algn="ctr"/>
+          </a:p>
+        </p:txBody>
+      </p:sp>
+      <p:sp>
+        <p:nvSpPr>
+          <p:cNvPr id="5" name="TextBox 4"/>
           <p:cNvSpPr txBox="1"/>
           <p:nvPr/>
         </p:nvSpPr>
         <p:spPr>
           <a:xfrm>
-            <a:off x="1371600" y="548640"/>
-            <a:ext cx="9448495" cy="822960"/>
+            <a:off x="1097280" y="457200"/>
+            <a:ext cx="9601200" cy="640080"/>
           </a:xfrm>
           <a:prstGeom prst="rect">
             <a:avLst/>
@@ -6137,30 +7289,33 @@
           </a:bodyPr>
           <a:lstStyle/>
           <a:p>
-            <a:pPr algn="ctr">
+            <a:pPr algn="l">
+              <a:lnSpc>
+                <a:spcPct val="120000"/>
+              </a:lnSpc>
               <a:defRPr sz="3600" b="1">
                 <a:solidFill>
-                  <a:srgbClr val="2A3A4A"/>
-                </a:solidFill>
-                <a:latin typeface="Outfit"/>
+                  <a:srgbClr val="1A2A3A"/>
+                </a:solidFill>
+                <a:latin typeface="Arial"/>
               </a:defRPr>
             </a:pPr>
             <a:r>
-              <a:t>发明成就</a:t>
-            </a:r>
-          </a:p>
-        </p:txBody>
-      </p:sp>
-      <p:sp>
-        <p:nvSpPr>
-          <p:cNvPr id="5" name="TextBox 4"/>
+              <a:t>💡 发明成就</a:t>
+            </a:r>
+          </a:p>
+        </p:txBody>
+      </p:sp>
+      <p:sp>
+        <p:nvSpPr>
+          <p:cNvPr id="6" name="TextBox 5"/>
           <p:cNvSpPr txBox="1"/>
           <p:nvPr/>
         </p:nvSpPr>
         <p:spPr>
           <a:xfrm>
-            <a:off x="1371600" y="1234440"/>
-            <a:ext cx="9448495" cy="457200"/>
+            <a:off x="1097280" y="1005840"/>
+            <a:ext cx="9601200" cy="365760"/>
           </a:xfrm>
           <a:prstGeom prst="rect">
             <a:avLst/>
@@ -6173,12 +7328,15 @@
           </a:bodyPr>
           <a:lstStyle/>
           <a:p>
-            <a:pPr algn="ctr">
-              <a:defRPr sz="1600" b="0">
+            <a:pPr algn="l">
+              <a:lnSpc>
+                <a:spcPct val="120000"/>
+              </a:lnSpc>
+              <a:defRPr sz="1400" b="0">
                 <a:solidFill>
                   <a:srgbClr val="2A3A4A"/>
                 </a:solidFill>
-                <a:latin typeface="Outfit"/>
+                <a:latin typeface="Arial"/>
               </a:defRPr>
             </a:pPr>
             <a:r>
@@ -6189,14 +7347,14 @@
       </p:sp>
       <p:sp>
         <p:nvSpPr>
-          <p:cNvPr id="6" name="TextBox 5"/>
+          <p:cNvPr id="7" name="TextBox 6"/>
           <p:cNvSpPr txBox="1"/>
           <p:nvPr/>
         </p:nvSpPr>
         <p:spPr>
           <a:xfrm>
-            <a:off x="1828800" y="2468880"/>
-            <a:ext cx="2743200" cy="274320"/>
+            <a:off x="1828800" y="2011680"/>
+            <a:ext cx="1371600" cy="274320"/>
           </a:xfrm>
           <a:prstGeom prst="rect">
             <a:avLst/>
@@ -6210,11 +7368,14 @@
           <a:lstStyle/>
           <a:p>
             <a:pPr algn="l">
+              <a:lnSpc>
+                <a:spcPct val="120000"/>
+              </a:lnSpc>
               <a:defRPr sz="1400" b="1">
                 <a:solidFill>
-                  <a:srgbClr val="1D3557"/>
-                </a:solidFill>
-                <a:latin typeface="Outfit"/>
+                  <a:srgbClr val="C62828"/>
+                </a:solidFill>
+                <a:latin typeface="Arial"/>
               </a:defRPr>
             </a:pPr>
             <a:r>
@@ -6225,14 +7386,14 @@
       </p:sp>
       <p:sp>
         <p:nvSpPr>
-          <p:cNvPr id="7" name="TextBox 6"/>
+          <p:cNvPr id="8" name="TextBox 7"/>
           <p:cNvSpPr txBox="1"/>
           <p:nvPr/>
         </p:nvSpPr>
         <p:spPr>
           <a:xfrm>
-            <a:off x="4114800" y="2468880"/>
-            <a:ext cx="6400800" cy="274320"/>
+            <a:off x="3291840" y="2011680"/>
+            <a:ext cx="7315200" cy="274320"/>
           </a:xfrm>
           <a:prstGeom prst="rect">
             <a:avLst/>
@@ -6246,29 +7407,32 @@
           <a:lstStyle/>
           <a:p>
             <a:pPr algn="l">
+              <a:lnSpc>
+                <a:spcPct val="120000"/>
+              </a:lnSpc>
               <a:defRPr sz="1300" b="0">
                 <a:solidFill>
                   <a:srgbClr val="2A3A4A"/>
                 </a:solidFill>
-                <a:latin typeface="Outfit"/>
+                <a:latin typeface="Arial"/>
               </a:defRPr>
             </a:pPr>
             <a:r>
-              <a:t>纽科门蒸汽机 — 最早的实用蒸汽机</a:t>
-            </a:r>
-          </a:p>
-        </p:txBody>
-      </p:sp>
-      <p:sp>
-        <p:nvSpPr>
-          <p:cNvPr id="8" name="TextBox 7"/>
+              <a:t>纽科门蒸汽机</a:t>
+            </a:r>
+          </a:p>
+        </p:txBody>
+      </p:sp>
+      <p:sp>
+        <p:nvSpPr>
+          <p:cNvPr id="9" name="TextBox 8"/>
           <p:cNvSpPr txBox="1"/>
           <p:nvPr/>
         </p:nvSpPr>
         <p:spPr>
           <a:xfrm>
-            <a:off x="1828800" y="2971800"/>
-            <a:ext cx="2743200" cy="274320"/>
+            <a:off x="1828800" y="2423160"/>
+            <a:ext cx="1371600" cy="274320"/>
           </a:xfrm>
           <a:prstGeom prst="rect">
             <a:avLst/>
@@ -6282,11 +7446,14 @@
           <a:lstStyle/>
           <a:p>
             <a:pPr algn="l">
+              <a:lnSpc>
+                <a:spcPct val="120000"/>
+              </a:lnSpc>
               <a:defRPr sz="1400" b="1">
                 <a:solidFill>
-                  <a:srgbClr val="1D3557"/>
-                </a:solidFill>
-                <a:latin typeface="Outfit"/>
+                  <a:srgbClr val="C62828"/>
+                </a:solidFill>
+                <a:latin typeface="Arial"/>
               </a:defRPr>
             </a:pPr>
             <a:r>
@@ -6297,14 +7464,14 @@
       </p:sp>
       <p:sp>
         <p:nvSpPr>
-          <p:cNvPr id="9" name="TextBox 8"/>
+          <p:cNvPr id="10" name="TextBox 9"/>
           <p:cNvSpPr txBox="1"/>
           <p:nvPr/>
         </p:nvSpPr>
         <p:spPr>
           <a:xfrm>
-            <a:off x="4114800" y="2971800"/>
-            <a:ext cx="6400800" cy="274320"/>
+            <a:off x="3291840" y="2423160"/>
+            <a:ext cx="7315200" cy="274320"/>
           </a:xfrm>
           <a:prstGeom prst="rect">
             <a:avLst/>
@@ -6318,29 +7485,32 @@
           <a:lstStyle/>
           <a:p>
             <a:pPr algn="l">
+              <a:lnSpc>
+                <a:spcPct val="120000"/>
+              </a:lnSpc>
               <a:defRPr sz="1300" b="0">
                 <a:solidFill>
                   <a:srgbClr val="2A3A4A"/>
                 </a:solidFill>
-                <a:latin typeface="Outfit"/>
+                <a:latin typeface="Arial"/>
               </a:defRPr>
             </a:pPr>
             <a:r>
-              <a:t>珍妮纺纱机 — 纺织业机械化开端</a:t>
-            </a:r>
-          </a:p>
-        </p:txBody>
-      </p:sp>
-      <p:sp>
-        <p:nvSpPr>
-          <p:cNvPr id="10" name="TextBox 9"/>
+              <a:t>珍妮纺纱机</a:t>
+            </a:r>
+          </a:p>
+        </p:txBody>
+      </p:sp>
+      <p:sp>
+        <p:nvSpPr>
+          <p:cNvPr id="11" name="TextBox 10"/>
           <p:cNvSpPr txBox="1"/>
           <p:nvPr/>
         </p:nvSpPr>
         <p:spPr>
           <a:xfrm>
-            <a:off x="1828800" y="3474720"/>
-            <a:ext cx="2743200" cy="274320"/>
+            <a:off x="1828800" y="2834640"/>
+            <a:ext cx="1371600" cy="274320"/>
           </a:xfrm>
           <a:prstGeom prst="rect">
             <a:avLst/>
@@ -6354,11 +7524,14 @@
           <a:lstStyle/>
           <a:p>
             <a:pPr algn="l">
+              <a:lnSpc>
+                <a:spcPct val="120000"/>
+              </a:lnSpc>
               <a:defRPr sz="1400" b="1">
                 <a:solidFill>
-                  <a:srgbClr val="1D3557"/>
-                </a:solidFill>
-                <a:latin typeface="Outfit"/>
+                  <a:srgbClr val="C62828"/>
+                </a:solidFill>
+                <a:latin typeface="Arial"/>
               </a:defRPr>
             </a:pPr>
             <a:r>
@@ -6369,14 +7542,14 @@
       </p:sp>
       <p:sp>
         <p:nvSpPr>
-          <p:cNvPr id="11" name="TextBox 10"/>
+          <p:cNvPr id="12" name="TextBox 11"/>
           <p:cNvSpPr txBox="1"/>
           <p:nvPr/>
         </p:nvSpPr>
         <p:spPr>
           <a:xfrm>
-            <a:off x="4114800" y="3474720"/>
-            <a:ext cx="6400800" cy="274320"/>
+            <a:off x="3291840" y="2834640"/>
+            <a:ext cx="7315200" cy="274320"/>
           </a:xfrm>
           <a:prstGeom prst="rect">
             <a:avLst/>
@@ -6390,29 +7563,32 @@
           <a:lstStyle/>
           <a:p>
             <a:pPr algn="l">
+              <a:lnSpc>
+                <a:spcPct val="120000"/>
+              </a:lnSpc>
               <a:defRPr sz="1300" b="0">
                 <a:solidFill>
                   <a:srgbClr val="2A3A4A"/>
                 </a:solidFill>
-                <a:latin typeface="Outfit"/>
+                <a:latin typeface="Arial"/>
               </a:defRPr>
             </a:pPr>
             <a:r>
-              <a:t>瓦特蒸汽机 — 高效蒸汽动力诞生</a:t>
-            </a:r>
-          </a:p>
-        </p:txBody>
-      </p:sp>
-      <p:sp>
-        <p:nvSpPr>
-          <p:cNvPr id="12" name="TextBox 11"/>
+              <a:t>瓦特蒸汽机</a:t>
+            </a:r>
+          </a:p>
+        </p:txBody>
+      </p:sp>
+      <p:sp>
+        <p:nvSpPr>
+          <p:cNvPr id="13" name="TextBox 12"/>
           <p:cNvSpPr txBox="1"/>
           <p:nvPr/>
         </p:nvSpPr>
         <p:spPr>
           <a:xfrm>
-            <a:off x="1828800" y="3977639"/>
-            <a:ext cx="2743200" cy="274320"/>
+            <a:off x="1828800" y="3246120"/>
+            <a:ext cx="1371600" cy="274320"/>
           </a:xfrm>
           <a:prstGeom prst="rect">
             <a:avLst/>
@@ -6426,11 +7602,14 @@
           <a:lstStyle/>
           <a:p>
             <a:pPr algn="l">
+              <a:lnSpc>
+                <a:spcPct val="120000"/>
+              </a:lnSpc>
               <a:defRPr sz="1400" b="1">
                 <a:solidFill>
-                  <a:srgbClr val="1D3557"/>
-                </a:solidFill>
-                <a:latin typeface="Outfit"/>
+                  <a:srgbClr val="C62828"/>
+                </a:solidFill>
+                <a:latin typeface="Arial"/>
               </a:defRPr>
             </a:pPr>
             <a:r>
@@ -6441,14 +7620,14 @@
       </p:sp>
       <p:sp>
         <p:nvSpPr>
-          <p:cNvPr id="13" name="TextBox 12"/>
+          <p:cNvPr id="14" name="TextBox 13"/>
           <p:cNvSpPr txBox="1"/>
           <p:nvPr/>
         </p:nvSpPr>
         <p:spPr>
           <a:xfrm>
-            <a:off x="4114800" y="3977639"/>
-            <a:ext cx="6400800" cy="274320"/>
+            <a:off x="3291840" y="3246120"/>
+            <a:ext cx="7315200" cy="274320"/>
           </a:xfrm>
           <a:prstGeom prst="rect">
             <a:avLst/>
@@ -6462,29 +7641,32 @@
           <a:lstStyle/>
           <a:p>
             <a:pPr algn="l">
+              <a:lnSpc>
+                <a:spcPct val="120000"/>
+              </a:lnSpc>
               <a:defRPr sz="1300" b="0">
                 <a:solidFill>
                   <a:srgbClr val="2A3A4A"/>
                 </a:solidFill>
-                <a:latin typeface="Outfit"/>
+                <a:latin typeface="Arial"/>
               </a:defRPr>
             </a:pPr>
             <a:r>
-              <a:t>蒸汽机车 — 斯蒂芬森"铁路时代"</a:t>
-            </a:r>
-          </a:p>
-        </p:txBody>
-      </p:sp>
-      <p:sp>
-        <p:nvSpPr>
-          <p:cNvPr id="14" name="TextBox 13"/>
+              <a:t>蒸汽机车 · 斯蒂芬森</a:t>
+            </a:r>
+          </a:p>
+        </p:txBody>
+      </p:sp>
+      <p:sp>
+        <p:nvSpPr>
+          <p:cNvPr id="15" name="TextBox 14"/>
           <p:cNvSpPr txBox="1"/>
           <p:nvPr/>
         </p:nvSpPr>
         <p:spPr>
           <a:xfrm>
-            <a:off x="1828800" y="4480559"/>
-            <a:ext cx="2743200" cy="274320"/>
+            <a:off x="1828800" y="3657600"/>
+            <a:ext cx="1371600" cy="274320"/>
           </a:xfrm>
           <a:prstGeom prst="rect">
             <a:avLst/>
@@ -6498,11 +7680,14 @@
           <a:lstStyle/>
           <a:p>
             <a:pPr algn="l">
+              <a:lnSpc>
+                <a:spcPct val="120000"/>
+              </a:lnSpc>
               <a:defRPr sz="1400" b="1">
                 <a:solidFill>
-                  <a:srgbClr val="1D3557"/>
-                </a:solidFill>
-                <a:latin typeface="Outfit"/>
+                  <a:srgbClr val="C62828"/>
+                </a:solidFill>
+                <a:latin typeface="Arial"/>
               </a:defRPr>
             </a:pPr>
             <a:r>
@@ -6513,14 +7698,14 @@
       </p:sp>
       <p:sp>
         <p:nvSpPr>
-          <p:cNvPr id="15" name="TextBox 14"/>
+          <p:cNvPr id="16" name="TextBox 15"/>
           <p:cNvSpPr txBox="1"/>
           <p:nvPr/>
         </p:nvSpPr>
         <p:spPr>
           <a:xfrm>
-            <a:off x="4114800" y="4480559"/>
-            <a:ext cx="6400800" cy="274320"/>
+            <a:off x="3291840" y="3657600"/>
+            <a:ext cx="7315200" cy="274320"/>
           </a:xfrm>
           <a:prstGeom prst="rect">
             <a:avLst/>
@@ -6534,29 +7719,32 @@
           <a:lstStyle/>
           <a:p>
             <a:pPr algn="l">
+              <a:lnSpc>
+                <a:spcPct val="120000"/>
+              </a:lnSpc>
               <a:defRPr sz="1300" b="0">
                 <a:solidFill>
                   <a:srgbClr val="2A3A4A"/>
                 </a:solidFill>
-                <a:latin typeface="Outfit"/>
+                <a:latin typeface="Arial"/>
               </a:defRPr>
             </a:pPr>
             <a:r>
-              <a:t>电报 — 库克 &amp; 惠斯通</a:t>
-            </a:r>
-          </a:p>
-        </p:txBody>
-      </p:sp>
-      <p:sp>
-        <p:nvSpPr>
-          <p:cNvPr id="16" name="TextBox 15"/>
+              <a:t>电报 · 库克 &amp; 惠斯通</a:t>
+            </a:r>
+          </a:p>
+        </p:txBody>
+      </p:sp>
+      <p:sp>
+        <p:nvSpPr>
+          <p:cNvPr id="17" name="TextBox 16"/>
           <p:cNvSpPr txBox="1"/>
           <p:nvPr/>
         </p:nvSpPr>
         <p:spPr>
           <a:xfrm>
-            <a:off x="1828800" y="4983479"/>
-            <a:ext cx="2743200" cy="274320"/>
+            <a:off x="1828800" y="4069080"/>
+            <a:ext cx="1371600" cy="274320"/>
           </a:xfrm>
           <a:prstGeom prst="rect">
             <a:avLst/>
@@ -6570,11 +7758,14 @@
           <a:lstStyle/>
           <a:p>
             <a:pPr algn="l">
+              <a:lnSpc>
+                <a:spcPct val="120000"/>
+              </a:lnSpc>
               <a:defRPr sz="1400" b="1">
                 <a:solidFill>
-                  <a:srgbClr val="1D3557"/>
-                </a:solidFill>
-                <a:latin typeface="Outfit"/>
+                  <a:srgbClr val="C62828"/>
+                </a:solidFill>
+                <a:latin typeface="Arial"/>
               </a:defRPr>
             </a:pPr>
             <a:r>
@@ -6585,14 +7776,14 @@
       </p:sp>
       <p:sp>
         <p:nvSpPr>
-          <p:cNvPr id="17" name="TextBox 16"/>
+          <p:cNvPr id="18" name="TextBox 17"/>
           <p:cNvSpPr txBox="1"/>
           <p:nvPr/>
         </p:nvSpPr>
         <p:spPr>
           <a:xfrm>
-            <a:off x="4114800" y="4983479"/>
-            <a:ext cx="6400800" cy="274320"/>
+            <a:off x="3291840" y="4069080"/>
+            <a:ext cx="7315200" cy="274320"/>
           </a:xfrm>
           <a:prstGeom prst="rect">
             <a:avLst/>
@@ -6606,15 +7797,18 @@
           <a:lstStyle/>
           <a:p>
             <a:pPr algn="l">
+              <a:lnSpc>
+                <a:spcPct val="120000"/>
+              </a:lnSpc>
               <a:defRPr sz="1300" b="0">
                 <a:solidFill>
                   <a:srgbClr val="2A3A4A"/>
                 </a:solidFill>
-                <a:latin typeface="Outfit"/>
+                <a:latin typeface="Arial"/>
               </a:defRPr>
             </a:pPr>
             <a:r>
-              <a:t>🌐 万维网 — 伯纳斯-李 · 信息时代开启</a:t>
+              <a:t>🌐 万维网 · 伯纳斯-李</a:t>
             </a:r>
           </a:p>
         </p:txBody>
@@ -6653,7 +7847,7 @@
         <p:spPr>
           <a:xfrm>
             <a:off x="0" y="0"/>
-            <a:ext cx="12191695" cy="6858000"/>
+            <a:ext cx="7132320" cy="6858000"/>
           </a:xfrm>
           <a:prstGeom prst="rect">
             <a:avLst/>
@@ -6669,15 +7863,15 @@
         </p:nvSpPr>
         <p:spPr>
           <a:xfrm>
-            <a:off x="0" y="0"/>
-            <a:ext cx="12191695" cy="6858000"/>
+            <a:off x="7315200" y="0"/>
+            <a:ext cx="4876495" cy="6858000"/>
           </a:xfrm>
           <a:prstGeom prst="rect">
             <a:avLst/>
           </a:prstGeom>
           <a:solidFill>
-            <a:srgbClr val="122037">
-              <a:alpha val="65000"/>
+            <a:srgbClr val="1D3557">
+              <a:alpha val="100000"/>
             </a:srgbClr>
           </a:solidFill>
           <a:ln>
@@ -6714,8 +7908,8 @@
         </p:nvSpPr>
         <p:spPr>
           <a:xfrm>
-            <a:off x="1371600" y="548640"/>
-            <a:ext cx="9448495" cy="822960"/>
+            <a:off x="7680960" y="548640"/>
+            <a:ext cx="4144975" cy="548640"/>
           </a:xfrm>
           <a:prstGeom prst="rect">
             <a:avLst/>
@@ -6728,12 +7922,15 @@
           </a:bodyPr>
           <a:lstStyle/>
           <a:p>
-            <a:pPr algn="ctr">
-              <a:defRPr sz="3600" b="1">
+            <a:pPr algn="l">
+              <a:lnSpc>
+                <a:spcPct val="120000"/>
+              </a:lnSpc>
+              <a:defRPr sz="2800" b="1">
                 <a:solidFill>
                   <a:srgbClr val="F0EDE8"/>
                 </a:solidFill>
-                <a:latin typeface="Outfit"/>
+                <a:latin typeface="Arial"/>
               </a:defRPr>
             </a:pPr>
             <a:r>
@@ -6750,8 +7947,8 @@
         </p:nvSpPr>
         <p:spPr>
           <a:xfrm>
-            <a:off x="1371600" y="1234440"/>
-            <a:ext cx="9448495" cy="457200"/>
+            <a:off x="7680960" y="1051560"/>
+            <a:ext cx="4144975" cy="411480"/>
           </a:xfrm>
           <a:prstGeom prst="rect">
             <a:avLst/>
@@ -6764,12 +7961,15 @@
           </a:bodyPr>
           <a:lstStyle/>
           <a:p>
-            <a:pPr algn="ctr">
-              <a:defRPr sz="1600" b="0">
-                <a:solidFill>
-                  <a:srgbClr val="F0EDE8"/>
-                </a:solidFill>
-                <a:latin typeface="Outfit"/>
+            <a:pPr algn="l">
+              <a:lnSpc>
+                <a:spcPct val="120000"/>
+              </a:lnSpc>
+              <a:defRPr sz="1200" b="0">
+                <a:solidFill>
+                  <a:srgbClr val="A0AEBE"/>
+                </a:solidFill>
+                <a:latin typeface="Arial"/>
               </a:defRPr>
             </a:pPr>
             <a:r>
@@ -6786,8 +7986,8 @@
         </p:nvSpPr>
         <p:spPr>
           <a:xfrm>
-            <a:off x="2026767" y="1645920"/>
-            <a:ext cx="1828800" cy="457200"/>
+            <a:off x="7680960" y="1600200"/>
+            <a:ext cx="2011680" cy="320040"/>
           </a:xfrm>
           <a:prstGeom prst="rect">
             <a:avLst/>
@@ -6800,12 +8000,15 @@
           </a:bodyPr>
           <a:lstStyle/>
           <a:p>
-            <a:pPr algn="ctr">
-              <a:defRPr sz="2800" b="1">
+            <a:pPr algn="l">
+              <a:lnSpc>
+                <a:spcPct val="120000"/>
+              </a:lnSpc>
+              <a:defRPr sz="2600" b="1">
                 <a:solidFill>
                   <a:srgbClr val="E63946"/>
                 </a:solidFill>
-                <a:latin typeface="Outfit"/>
+                <a:latin typeface="Arial"/>
               </a:defRPr>
             </a:pPr>
             <a:r>
@@ -6822,8 +8025,8 @@
         </p:nvSpPr>
         <p:spPr>
           <a:xfrm>
-            <a:off x="2026767" y="2057400"/>
-            <a:ext cx="1828800" cy="274320"/>
+            <a:off x="7680960" y="1874519"/>
+            <a:ext cx="2011680" cy="228600"/>
           </a:xfrm>
           <a:prstGeom prst="rect">
             <a:avLst/>
@@ -6836,12 +8039,15 @@
           </a:bodyPr>
           <a:lstStyle/>
           <a:p>
-            <a:pPr algn="ctr">
-              <a:defRPr sz="1100" b="0">
-                <a:solidFill>
-                  <a:srgbClr val="F0EDE8"/>
-                </a:solidFill>
-                <a:latin typeface="Outfit"/>
+            <a:pPr algn="l">
+              <a:lnSpc>
+                <a:spcPct val="120000"/>
+              </a:lnSpc>
+              <a:defRPr sz="1000" b="0">
+                <a:solidFill>
+                  <a:srgbClr val="B0BECC"/>
+                </a:solidFill>
+                <a:latin typeface="Arial"/>
               </a:defRPr>
             </a:pPr>
             <a:r>
@@ -6858,8 +8064,8 @@
         </p:nvSpPr>
         <p:spPr>
           <a:xfrm>
-            <a:off x="4129887" y="1645920"/>
-            <a:ext cx="1828800" cy="457200"/>
+            <a:off x="9875520" y="1600200"/>
+            <a:ext cx="2011680" cy="320040"/>
           </a:xfrm>
           <a:prstGeom prst="rect">
             <a:avLst/>
@@ -6872,12 +8078,15 @@
           </a:bodyPr>
           <a:lstStyle/>
           <a:p>
-            <a:pPr algn="ctr">
-              <a:defRPr sz="2800" b="1">
+            <a:pPr algn="l">
+              <a:lnSpc>
+                <a:spcPct val="120000"/>
+              </a:lnSpc>
+              <a:defRPr sz="2600" b="1">
                 <a:solidFill>
                   <a:srgbClr val="E63946"/>
                 </a:solidFill>
-                <a:latin typeface="Outfit"/>
+                <a:latin typeface="Arial"/>
               </a:defRPr>
             </a:pPr>
             <a:r>
@@ -6894,8 +8103,8 @@
         </p:nvSpPr>
         <p:spPr>
           <a:xfrm>
-            <a:off x="4129887" y="2057400"/>
-            <a:ext cx="1828800" cy="274320"/>
+            <a:off x="9875520" y="1874519"/>
+            <a:ext cx="2011680" cy="228600"/>
           </a:xfrm>
           <a:prstGeom prst="rect">
             <a:avLst/>
@@ -6908,12 +8117,15 @@
           </a:bodyPr>
           <a:lstStyle/>
           <a:p>
-            <a:pPr algn="ctr">
-              <a:defRPr sz="1100" b="0">
-                <a:solidFill>
-                  <a:srgbClr val="F0EDE8"/>
-                </a:solidFill>
-                <a:latin typeface="Outfit"/>
+            <a:pPr algn="l">
+              <a:lnSpc>
+                <a:spcPct val="120000"/>
+              </a:lnSpc>
+              <a:defRPr sz="1000" b="0">
+                <a:solidFill>
+                  <a:srgbClr val="B0BECC"/>
+                </a:solidFill>
+                <a:latin typeface="Arial"/>
               </a:defRPr>
             </a:pPr>
             <a:r>
@@ -6930,8 +8142,8 @@
         </p:nvSpPr>
         <p:spPr>
           <a:xfrm>
-            <a:off x="6233007" y="1645920"/>
-            <a:ext cx="1828800" cy="457200"/>
+            <a:off x="7680960" y="2194560"/>
+            <a:ext cx="2011680" cy="320040"/>
           </a:xfrm>
           <a:prstGeom prst="rect">
             <a:avLst/>
@@ -6944,12 +8156,15 @@
           </a:bodyPr>
           <a:lstStyle/>
           <a:p>
-            <a:pPr algn="ctr">
-              <a:defRPr sz="2800" b="1">
+            <a:pPr algn="l">
+              <a:lnSpc>
+                <a:spcPct val="120000"/>
+              </a:lnSpc>
+              <a:defRPr sz="2600" b="1">
                 <a:solidFill>
                   <a:srgbClr val="E63946"/>
                 </a:solidFill>
-                <a:latin typeface="Outfit"/>
+                <a:latin typeface="Arial"/>
               </a:defRPr>
             </a:pPr>
             <a:r>
@@ -6966,8 +8181,8 @@
         </p:nvSpPr>
         <p:spPr>
           <a:xfrm>
-            <a:off x="6233007" y="2057400"/>
-            <a:ext cx="1828800" cy="274320"/>
+            <a:off x="7680960" y="2468879"/>
+            <a:ext cx="2011680" cy="228600"/>
           </a:xfrm>
           <a:prstGeom prst="rect">
             <a:avLst/>
@@ -6980,12 +8195,15 @@
           </a:bodyPr>
           <a:lstStyle/>
           <a:p>
-            <a:pPr algn="ctr">
-              <a:defRPr sz="1100" b="0">
-                <a:solidFill>
-                  <a:srgbClr val="F0EDE8"/>
-                </a:solidFill>
-                <a:latin typeface="Outfit"/>
+            <a:pPr algn="l">
+              <a:lnSpc>
+                <a:spcPct val="120000"/>
+              </a:lnSpc>
+              <a:defRPr sz="1000" b="0">
+                <a:solidFill>
+                  <a:srgbClr val="B0BECC"/>
+                </a:solidFill>
+                <a:latin typeface="Arial"/>
               </a:defRPr>
             </a:pPr>
             <a:r>
@@ -7002,8 +8220,8 @@
         </p:nvSpPr>
         <p:spPr>
           <a:xfrm>
-            <a:off x="8336127" y="1645920"/>
-            <a:ext cx="1828800" cy="457200"/>
+            <a:off x="9875520" y="2194560"/>
+            <a:ext cx="2011680" cy="320040"/>
           </a:xfrm>
           <a:prstGeom prst="rect">
             <a:avLst/>
@@ -7016,12 +8234,15 @@
           </a:bodyPr>
           <a:lstStyle/>
           <a:p>
-            <a:pPr algn="ctr">
-              <a:defRPr sz="2800" b="1">
+            <a:pPr algn="l">
+              <a:lnSpc>
+                <a:spcPct val="120000"/>
+              </a:lnSpc>
+              <a:defRPr sz="2600" b="1">
                 <a:solidFill>
                   <a:srgbClr val="E63946"/>
                 </a:solidFill>
-                <a:latin typeface="Outfit"/>
+                <a:latin typeface="Arial"/>
               </a:defRPr>
             </a:pPr>
             <a:r>
@@ -7038,8 +8259,8 @@
         </p:nvSpPr>
         <p:spPr>
           <a:xfrm>
-            <a:off x="8336127" y="2057400"/>
-            <a:ext cx="1828800" cy="274320"/>
+            <a:off x="9875520" y="2468879"/>
+            <a:ext cx="2011680" cy="228600"/>
           </a:xfrm>
           <a:prstGeom prst="rect">
             <a:avLst/>
@@ -7052,12 +8273,15 @@
           </a:bodyPr>
           <a:lstStyle/>
           <a:p>
-            <a:pPr algn="ctr">
-              <a:defRPr sz="1100" b="0">
-                <a:solidFill>
-                  <a:srgbClr val="F0EDE8"/>
-                </a:solidFill>
-                <a:latin typeface="Outfit"/>
+            <a:pPr algn="l">
+              <a:lnSpc>
+                <a:spcPct val="120000"/>
+              </a:lnSpc>
+              <a:defRPr sz="1000" b="0">
+                <a:solidFill>
+                  <a:srgbClr val="B0BECC"/>
+                </a:solidFill>
+                <a:latin typeface="Arial"/>
               </a:defRPr>
             </a:pPr>
             <a:r>
@@ -7074,15 +8298,15 @@
         </p:nvSpPr>
         <p:spPr>
           <a:xfrm>
-            <a:off x="1371600" y="2743200"/>
-            <a:ext cx="4587087" cy="3200400"/>
+            <a:off x="7680960" y="2697480"/>
+            <a:ext cx="73152" cy="548640"/>
           </a:xfrm>
           <a:prstGeom prst="rect">
             <a:avLst/>
           </a:prstGeom>
           <a:solidFill>
-            <a:srgbClr val="283241">
-              <a:alpha val="65000"/>
+            <a:srgbClr val="E63946">
+              <a:alpha val="100000"/>
             </a:srgbClr>
           </a:solidFill>
           <a:ln>
@@ -7119,8 +8343,8 @@
         </p:nvSpPr>
         <p:spPr>
           <a:xfrm>
-            <a:off x="1508760" y="2834640"/>
-            <a:ext cx="4312767" cy="365760"/>
+            <a:off x="7955279" y="2697480"/>
+            <a:ext cx="3779215" cy="274320"/>
           </a:xfrm>
           <a:prstGeom prst="rect">
             <a:avLst/>
@@ -7134,11 +8358,14 @@
           <a:lstStyle/>
           <a:p>
             <a:pPr algn="l">
-              <a:defRPr sz="1600" b="1">
-                <a:solidFill>
-                  <a:srgbClr val="B8D8EE"/>
-                </a:solidFill>
-                <a:latin typeface="Outfit"/>
+              <a:lnSpc>
+                <a:spcPct val="120000"/>
+              </a:lnSpc>
+              <a:defRPr sz="1300" b="1">
+                <a:solidFill>
+                  <a:srgbClr val="F0EDE8"/>
+                </a:solidFill>
+                <a:latin typeface="Arial"/>
               </a:defRPr>
             </a:pPr>
             <a:r>
@@ -7155,8 +8382,8 @@
         </p:nvSpPr>
         <p:spPr>
           <a:xfrm>
-            <a:off x="1508760" y="3154680"/>
-            <a:ext cx="4312767" cy="2697480"/>
+            <a:off x="7955279" y="2999232"/>
+            <a:ext cx="3779215" cy="502920"/>
           </a:xfrm>
           <a:prstGeom prst="rect">
             <a:avLst/>
@@ -7171,13 +8398,13 @@
           <a:p>
             <a:pPr algn="l">
               <a:lnSpc>
-                <a:spcPct val="140000"/>
+                <a:spcPct val="135000"/>
               </a:lnSpc>
-              <a:defRPr sz="1300">
-                <a:solidFill>
-                  <a:srgbClr val="F0EDE8"/>
-                </a:solidFill>
-                <a:latin typeface="Outfit"/>
+              <a:defRPr sz="1100" b="0">
+                <a:solidFill>
+                  <a:srgbClr val="C0CCD8"/>
+                </a:solidFill>
+                <a:latin typeface="Arial"/>
               </a:defRPr>
             </a:pPr>
             <a:r>
@@ -7198,15 +8425,15 @@
         </p:nvSpPr>
         <p:spPr>
           <a:xfrm>
-            <a:off x="6233007" y="2743200"/>
-            <a:ext cx="4587087" cy="3200400"/>
+            <a:off x="7680960" y="3749040"/>
+            <a:ext cx="73152" cy="548640"/>
           </a:xfrm>
           <a:prstGeom prst="rect">
             <a:avLst/>
           </a:prstGeom>
           <a:solidFill>
-            <a:srgbClr val="283241">
-              <a:alpha val="65000"/>
+            <a:srgbClr val="E63946">
+              <a:alpha val="100000"/>
             </a:srgbClr>
           </a:solidFill>
           <a:ln>
@@ -7243,8 +8470,8 @@
         </p:nvSpPr>
         <p:spPr>
           <a:xfrm>
-            <a:off x="6370167" y="2834640"/>
-            <a:ext cx="4312767" cy="365760"/>
+            <a:off x="7955279" y="3749040"/>
+            <a:ext cx="3779215" cy="274320"/>
           </a:xfrm>
           <a:prstGeom prst="rect">
             <a:avLst/>
@@ -7258,11 +8485,14 @@
           <a:lstStyle/>
           <a:p>
             <a:pPr algn="l">
-              <a:defRPr sz="1600" b="1">
-                <a:solidFill>
-                  <a:srgbClr val="B8D8EE"/>
-                </a:solidFill>
-                <a:latin typeface="Outfit"/>
+              <a:lnSpc>
+                <a:spcPct val="120000"/>
+              </a:lnSpc>
+              <a:defRPr sz="1300" b="1">
+                <a:solidFill>
+                  <a:srgbClr val="F0EDE8"/>
+                </a:solidFill>
+                <a:latin typeface="Arial"/>
               </a:defRPr>
             </a:pPr>
             <a:r>
@@ -7279,8 +8509,8 @@
         </p:nvSpPr>
         <p:spPr>
           <a:xfrm>
-            <a:off x="6370167" y="3154680"/>
-            <a:ext cx="4312767" cy="2697480"/>
+            <a:off x="7955279" y="4050792"/>
+            <a:ext cx="3779215" cy="502920"/>
           </a:xfrm>
           <a:prstGeom prst="rect">
             <a:avLst/>
@@ -7295,13 +8525,13 @@
           <a:p>
             <a:pPr algn="l">
               <a:lnSpc>
-                <a:spcPct val="140000"/>
+                <a:spcPct val="135000"/>
               </a:lnSpc>
-              <a:defRPr sz="1300">
-                <a:solidFill>
-                  <a:srgbClr val="F0EDE8"/>
-                </a:solidFill>
-                <a:latin typeface="Outfit"/>
+              <a:defRPr sz="1100" b="0">
+                <a:solidFill>
+                  <a:srgbClr val="C0CCD8"/>
+                </a:solidFill>
+                <a:latin typeface="Arial"/>
               </a:defRPr>
             </a:pPr>
             <a:r>
@@ -7309,7 +8539,7 @@
             </a:r>
             <a:br/>
             <a:r>
-              <a:t>帝国理工 · GCSE/A-Level 体系</a:t>
+              <a:t>帝国理工 · GCSE/A-Level</a:t>
             </a:r>
           </a:p>
         </p:txBody>
@@ -7364,15 +8594,15 @@
         </p:nvSpPr>
         <p:spPr>
           <a:xfrm>
-            <a:off x="0" y="0"/>
-            <a:ext cx="12191695" cy="6858000"/>
+            <a:off x="0" y="4572000"/>
+            <a:ext cx="12191695" cy="2286000"/>
           </a:xfrm>
           <a:prstGeom prst="rect">
             <a:avLst/>
           </a:prstGeom>
           <a:solidFill>
-            <a:srgbClr val="EBE6DC">
-              <a:alpha val="75000"/>
+            <a:srgbClr val="F0EDE8">
+              <a:alpha val="80000"/>
             </a:srgbClr>
           </a:solidFill>
           <a:ln>
@@ -7403,93 +8633,21 @@
       </p:sp>
       <p:sp>
         <p:nvSpPr>
-          <p:cNvPr id="4" name="TextBox 3"/>
-          <p:cNvSpPr txBox="1"/>
-          <p:nvPr/>
-        </p:nvSpPr>
-        <p:spPr>
-          <a:xfrm>
-            <a:off x="1371600" y="548640"/>
-            <a:ext cx="9448495" cy="822960"/>
-          </a:xfrm>
-          <a:prstGeom prst="rect">
-            <a:avLst/>
-          </a:prstGeom>
-          <a:noFill/>
-        </p:spPr>
-        <p:txBody>
-          <a:bodyPr wrap="square">
-            <a:spAutoFit/>
-          </a:bodyPr>
-          <a:lstStyle/>
-          <a:p>
-            <a:pPr algn="ctr">
-              <a:defRPr sz="3600" b="1">
-                <a:solidFill>
-                  <a:srgbClr val="2A3A4A"/>
-                </a:solidFill>
-                <a:latin typeface="Outfit"/>
-              </a:defRPr>
-            </a:pPr>
-            <a:r>
-              <a:t>世界名校</a:t>
-            </a:r>
-          </a:p>
-        </p:txBody>
-      </p:sp>
-      <p:sp>
-        <p:nvSpPr>
-          <p:cNvPr id="5" name="TextBox 4"/>
-          <p:cNvSpPr txBox="1"/>
-          <p:nvPr/>
-        </p:nvSpPr>
-        <p:spPr>
-          <a:xfrm>
-            <a:off x="1371600" y="1234440"/>
-            <a:ext cx="9448495" cy="457200"/>
-          </a:xfrm>
-          <a:prstGeom prst="rect">
-            <a:avLst/>
-          </a:prstGeom>
-          <a:noFill/>
-        </p:spPr>
-        <p:txBody>
-          <a:bodyPr wrap="square">
-            <a:spAutoFit/>
-          </a:bodyPr>
-          <a:lstStyle/>
-          <a:p>
-            <a:pPr algn="ctr">
-              <a:defRPr sz="1600" b="0">
-                <a:solidFill>
-                  <a:srgbClr val="2A3A4A"/>
-                </a:solidFill>
-                <a:latin typeface="Outfit"/>
-              </a:defRPr>
-            </a:pPr>
-            <a:r>
-              <a:t>英国拥有世界最顶尖的高等学府</a:t>
-            </a:r>
-          </a:p>
-        </p:txBody>
-      </p:sp>
-      <p:sp>
-        <p:nvSpPr>
-          <p:cNvPr id="6" name="Rectangle 5"/>
+          <p:cNvPr id="4" name="Rectangle 3"/>
           <p:cNvSpPr/>
           <p:nvPr/>
         </p:nvSpPr>
         <p:spPr>
           <a:xfrm>
-            <a:off x="1371600" y="2468880"/>
-            <a:ext cx="4587087" cy="3200400"/>
+            <a:off x="0" y="3657600"/>
+            <a:ext cx="12191695" cy="914400"/>
           </a:xfrm>
           <a:prstGeom prst="rect">
             <a:avLst/>
           </a:prstGeom>
           <a:solidFill>
-            <a:srgbClr val="EBE8E1">
-              <a:alpha val="65000"/>
+            <a:srgbClr val="F0EDE8">
+              <a:alpha val="50000"/>
             </a:srgbClr>
           </a:solidFill>
           <a:ln>
@@ -7520,14 +8678,14 @@
       </p:sp>
       <p:sp>
         <p:nvSpPr>
-          <p:cNvPr id="7" name="TextBox 6"/>
+          <p:cNvPr id="5" name="TextBox 4"/>
           <p:cNvSpPr txBox="1"/>
           <p:nvPr/>
         </p:nvSpPr>
         <p:spPr>
           <a:xfrm>
-            <a:off x="1508760" y="2560320"/>
-            <a:ext cx="4312767" cy="365760"/>
+            <a:off x="1097280" y="457200"/>
+            <a:ext cx="9601200" cy="640080"/>
           </a:xfrm>
           <a:prstGeom prst="rect">
             <a:avLst/>
@@ -7541,29 +8699,32 @@
           <a:lstStyle/>
           <a:p>
             <a:pPr algn="l">
-              <a:defRPr sz="1600" b="1">
+              <a:lnSpc>
+                <a:spcPct val="120000"/>
+              </a:lnSpc>
+              <a:defRPr sz="3600" b="1">
                 <a:solidFill>
                   <a:srgbClr val="1A2A3A"/>
                 </a:solidFill>
-                <a:latin typeface="Outfit"/>
+                <a:latin typeface="Arial"/>
               </a:defRPr>
             </a:pPr>
             <a:r>
-              <a:t>🏛️ 牛津大学</a:t>
-            </a:r>
-          </a:p>
-        </p:txBody>
-      </p:sp>
-      <p:sp>
-        <p:nvSpPr>
-          <p:cNvPr id="8" name="TextBox 7"/>
+              <a:t>🎓 世界名校</a:t>
+            </a:r>
+          </a:p>
+        </p:txBody>
+      </p:sp>
+      <p:sp>
+        <p:nvSpPr>
+          <p:cNvPr id="6" name="TextBox 5"/>
           <p:cNvSpPr txBox="1"/>
           <p:nvPr/>
         </p:nvSpPr>
         <p:spPr>
           <a:xfrm>
-            <a:off x="1508760" y="2880360"/>
-            <a:ext cx="4312767" cy="2697480"/>
+            <a:off x="1097280" y="1005840"/>
+            <a:ext cx="9601200" cy="365760"/>
           </a:xfrm>
           <a:prstGeom prst="rect">
             <a:avLst/>
@@ -7578,46 +8739,38 @@
           <a:p>
             <a:pPr algn="l">
               <a:lnSpc>
-                <a:spcPct val="140000"/>
+                <a:spcPct val="120000"/>
               </a:lnSpc>
-              <a:defRPr sz="1300">
+              <a:defRPr sz="1400" b="0">
                 <a:solidFill>
                   <a:srgbClr val="2A3A4A"/>
                 </a:solidFill>
-                <a:latin typeface="Outfit"/>
+                <a:latin typeface="Arial"/>
               </a:defRPr>
             </a:pPr>
             <a:r>
-              <a:t>英语世界最古老(1096年建校)</a:t>
-            </a:r>
-            <a:br/>
-            <a:r>
-              <a:t>28位英国首相 · 55位诺贝尔奖得主</a:t>
-            </a:r>
-            <a:br/>
-            <a:r>
-              <a:t>博德利图书馆藏书1300万册</a:t>
-            </a:r>
-          </a:p>
-        </p:txBody>
-      </p:sp>
-      <p:sp>
-        <p:nvSpPr>
-          <p:cNvPr id="9" name="Rectangle 8"/>
+              <a:t>英国拥有全球最顶尖的高等学府</a:t>
+            </a:r>
+          </a:p>
+        </p:txBody>
+      </p:sp>
+      <p:sp>
+        <p:nvSpPr>
+          <p:cNvPr id="7" name="Rectangle 6"/>
           <p:cNvSpPr/>
           <p:nvPr/>
         </p:nvSpPr>
         <p:spPr>
           <a:xfrm>
-            <a:off x="6233007" y="2468880"/>
-            <a:ext cx="4587087" cy="3200400"/>
+            <a:off x="1097280" y="4023360"/>
+            <a:ext cx="4572000" cy="1828800"/>
           </a:xfrm>
           <a:prstGeom prst="rect">
             <a:avLst/>
           </a:prstGeom>
           <a:solidFill>
-            <a:srgbClr val="EBE8E1">
-              <a:alpha val="65000"/>
+            <a:srgbClr val="F5F2ED">
+              <a:alpha val="80000"/>
             </a:srgbClr>
           </a:solidFill>
           <a:ln>
@@ -7648,14 +8801,14 @@
       </p:sp>
       <p:sp>
         <p:nvSpPr>
-          <p:cNvPr id="10" name="TextBox 9"/>
+          <p:cNvPr id="8" name="TextBox 7"/>
           <p:cNvSpPr txBox="1"/>
           <p:nvPr/>
         </p:nvSpPr>
         <p:spPr>
           <a:xfrm>
-            <a:off x="6370167" y="2560320"/>
-            <a:ext cx="4312767" cy="365760"/>
+            <a:off x="1325880" y="4160520"/>
+            <a:ext cx="4114800" cy="320040"/>
           </a:xfrm>
           <a:prstGeom prst="rect">
             <a:avLst/>
@@ -7669,29 +8822,32 @@
           <a:lstStyle/>
           <a:p>
             <a:pPr algn="l">
-              <a:defRPr sz="1600" b="1">
+              <a:lnSpc>
+                <a:spcPct val="120000"/>
+              </a:lnSpc>
+              <a:defRPr sz="1400" b="1">
                 <a:solidFill>
                   <a:srgbClr val="1A2A3A"/>
                 </a:solidFill>
-                <a:latin typeface="Outfit"/>
+                <a:latin typeface="Arial"/>
               </a:defRPr>
             </a:pPr>
             <a:r>
-              <a:t>🔬 帝国理工学院</a:t>
-            </a:r>
-          </a:p>
-        </p:txBody>
-      </p:sp>
-      <p:sp>
-        <p:nvSpPr>
-          <p:cNvPr id="11" name="TextBox 10"/>
+              <a:t>🏛️ 牛津大学 (1096)</a:t>
+            </a:r>
+          </a:p>
+        </p:txBody>
+      </p:sp>
+      <p:sp>
+        <p:nvSpPr>
+          <p:cNvPr id="9" name="TextBox 8"/>
           <p:cNvSpPr txBox="1"/>
           <p:nvPr/>
         </p:nvSpPr>
         <p:spPr>
           <a:xfrm>
-            <a:off x="6370167" y="2880360"/>
-            <a:ext cx="4312767" cy="2697480"/>
+            <a:off x="1325880" y="4526280"/>
+            <a:ext cx="4114800" cy="1188720"/>
           </a:xfrm>
           <a:prstGeom prst="rect">
             <a:avLst/>
@@ -7708,15 +8864,146 @@
               <a:lnSpc>
                 <a:spcPct val="140000"/>
               </a:lnSpc>
-              <a:defRPr sz="1300">
+              <a:defRPr sz="1200" b="0">
                 <a:solidFill>
                   <a:srgbClr val="2A3A4A"/>
                 </a:solidFill>
-                <a:latin typeface="Outfit"/>
+                <a:latin typeface="Arial"/>
               </a:defRPr>
             </a:pPr>
             <a:r>
-              <a:t>成立于1907，专注科学·工程·医学</a:t>
+              <a:t>英语世界最古老大学</a:t>
+            </a:r>
+            <a:br/>
+            <a:r>
+              <a:t>28位英国首相 · 55位诺贝尔奖得主</a:t>
+            </a:r>
+            <a:br/>
+            <a:r>
+              <a:t>博德利图书馆藏书1300万册</a:t>
+            </a:r>
+          </a:p>
+        </p:txBody>
+      </p:sp>
+      <p:sp>
+        <p:nvSpPr>
+          <p:cNvPr id="10" name="Rectangle 9"/>
+          <p:cNvSpPr/>
+          <p:nvPr/>
+        </p:nvSpPr>
+        <p:spPr>
+          <a:xfrm>
+            <a:off x="6035040" y="4023360"/>
+            <a:ext cx="4572000" cy="1828800"/>
+          </a:xfrm>
+          <a:prstGeom prst="rect">
+            <a:avLst/>
+          </a:prstGeom>
+          <a:solidFill>
+            <a:srgbClr val="F5F2ED">
+              <a:alpha val="80000"/>
+            </a:srgbClr>
+          </a:solidFill>
+          <a:ln>
+            <a:noFill/>
+          </a:ln>
+        </p:spPr>
+        <p:style>
+          <a:lnRef idx="1">
+            <a:schemeClr val="accent1"/>
+          </a:lnRef>
+          <a:fillRef idx="3">
+            <a:schemeClr val="accent1"/>
+          </a:fillRef>
+          <a:effectRef idx="2">
+            <a:schemeClr val="accent1"/>
+          </a:effectRef>
+          <a:fontRef idx="minor">
+            <a:schemeClr val="lt1"/>
+          </a:fontRef>
+        </p:style>
+        <p:txBody>
+          <a:bodyPr rtlCol="0" anchor="ctr"/>
+          <a:lstStyle/>
+          <a:p>
+            <a:pPr algn="ctr"/>
+          </a:p>
+        </p:txBody>
+      </p:sp>
+      <p:sp>
+        <p:nvSpPr>
+          <p:cNvPr id="11" name="TextBox 10"/>
+          <p:cNvSpPr txBox="1"/>
+          <p:nvPr/>
+        </p:nvSpPr>
+        <p:spPr>
+          <a:xfrm>
+            <a:off x="6263640" y="4160520"/>
+            <a:ext cx="4114800" cy="320040"/>
+          </a:xfrm>
+          <a:prstGeom prst="rect">
+            <a:avLst/>
+          </a:prstGeom>
+          <a:noFill/>
+        </p:spPr>
+        <p:txBody>
+          <a:bodyPr wrap="square">
+            <a:spAutoFit/>
+          </a:bodyPr>
+          <a:lstStyle/>
+          <a:p>
+            <a:pPr algn="l">
+              <a:lnSpc>
+                <a:spcPct val="120000"/>
+              </a:lnSpc>
+              <a:defRPr sz="1400" b="1">
+                <a:solidFill>
+                  <a:srgbClr val="1A2A3A"/>
+                </a:solidFill>
+                <a:latin typeface="Arial"/>
+              </a:defRPr>
+            </a:pPr>
+            <a:r>
+              <a:t>🔬 帝国理工学院 (1907)</a:t>
+            </a:r>
+          </a:p>
+        </p:txBody>
+      </p:sp>
+      <p:sp>
+        <p:nvSpPr>
+          <p:cNvPr id="12" name="TextBox 11"/>
+          <p:cNvSpPr txBox="1"/>
+          <p:nvPr/>
+        </p:nvSpPr>
+        <p:spPr>
+          <a:xfrm>
+            <a:off x="6263640" y="4526280"/>
+            <a:ext cx="4114800" cy="1188720"/>
+          </a:xfrm>
+          <a:prstGeom prst="rect">
+            <a:avLst/>
+          </a:prstGeom>
+          <a:noFill/>
+        </p:spPr>
+        <p:txBody>
+          <a:bodyPr wrap="square">
+            <a:spAutoFit/>
+          </a:bodyPr>
+          <a:lstStyle/>
+          <a:p>
+            <a:pPr algn="l">
+              <a:lnSpc>
+                <a:spcPct val="140000"/>
+              </a:lnSpc>
+              <a:defRPr sz="1200" b="0">
+                <a:solidFill>
+                  <a:srgbClr val="2A3A4A"/>
+                </a:solidFill>
+                <a:latin typeface="Arial"/>
+              </a:defRPr>
+            </a:pPr>
+            <a:r>
+              <a:t>专注科学·工程·医学</a:t>
             </a:r>
             <a:br/>
             <a:r>

--- a/走近英国.pptx
+++ b/走近英国.pptx
@@ -3138,7 +3138,7 @@
           </a:prstGeom>
           <a:solidFill>
             <a:srgbClr val="1A1C20">
-              <a:alpha val="70000"/>
+              <a:alpha val="75000"/>
             </a:srgbClr>
           </a:solidFill>
           <a:ln>
@@ -3183,7 +3183,7 @@
           </a:prstGeom>
           <a:solidFill>
             <a:srgbClr val="1A1C20">
-              <a:alpha val="40000"/>
+              <a:alpha val="45000"/>
             </a:srgbClr>
           </a:solidFill>
           <a:ln>
@@ -3228,7 +3228,7 @@
           </a:prstGeom>
           <a:solidFill>
             <a:srgbClr val="1A1C20">
-              <a:alpha val="20000"/>
+              <a:alpha val="25000"/>
             </a:srgbClr>
           </a:solidFill>
           <a:ln>
@@ -3265,8 +3265,8 @@
         </p:nvSpPr>
         <p:spPr>
           <a:xfrm>
-            <a:off x="1371600" y="2857500"/>
-            <a:ext cx="9448495" cy="563880"/>
+            <a:off x="1371600" y="2286000"/>
+            <a:ext cx="9448495" cy="534270"/>
           </a:xfrm>
           <a:prstGeom prst="rect">
             <a:avLst/>
@@ -3279,11 +3279,16 @@
           </a:bodyPr>
           <a:lstStyle/>
           <a:p>
+            <a:rPr sz="1200">
+              <a:latin typeface="Arial"/>
+              <a:ea typeface="Microsoft YaHei"/>
+              <a:sym typeface="Segoe UI Emoji"/>
+            </a:rPr>
             <a:pPr algn="ctr">
               <a:lnSpc>
                 <a:spcPct val="120000"/>
               </a:lnSpc>
-              <a:defRPr sz="2800" b="0">
+              <a:defRPr sz="2600" b="0">
                 <a:solidFill>
                   <a:srgbClr val="F0EDE8"/>
                 </a:solidFill>
@@ -3304,8 +3309,8 @@
         </p:nvSpPr>
         <p:spPr>
           <a:xfrm>
-            <a:off x="1371600" y="3467100"/>
-            <a:ext cx="9448495" cy="960120"/>
+            <a:off x="1371600" y="2856846"/>
+            <a:ext cx="9448495" cy="926156"/>
           </a:xfrm>
           <a:prstGeom prst="rect">
             <a:avLst/>
@@ -3318,11 +3323,16 @@
           </a:bodyPr>
           <a:lstStyle/>
           <a:p>
+            <a:rPr sz="1200">
+              <a:latin typeface="Arial"/>
+              <a:ea typeface="Microsoft YaHei"/>
+              <a:sym typeface="Segoe UI Emoji"/>
+            </a:rPr>
             <a:pPr algn="ctr">
               <a:lnSpc>
                 <a:spcPct val="120000"/>
               </a:lnSpc>
-              <a:defRPr sz="5400" b="1">
+              <a:defRPr sz="5000" b="1">
                 <a:solidFill>
                   <a:srgbClr val="F0EDE8"/>
                 </a:solidFill>
@@ -3343,8 +3353,8 @@
         </p:nvSpPr>
         <p:spPr>
           <a:xfrm>
-            <a:off x="1371600" y="4610100"/>
-            <a:ext cx="9448495" cy="441959"/>
+            <a:off x="1371600" y="3929307"/>
+            <a:ext cx="9448495" cy="436299"/>
           </a:xfrm>
           <a:prstGeom prst="rect">
             <a:avLst/>
@@ -3357,6 +3367,11 @@
           </a:bodyPr>
           <a:lstStyle/>
           <a:p>
+            <a:rPr sz="1200">
+              <a:latin typeface="Arial"/>
+              <a:ea typeface="Microsoft YaHei"/>
+              <a:sym typeface="Segoe UI Emoji"/>
+            </a:rPr>
             <a:pPr algn="ctr">
               <a:lnSpc>
                 <a:spcPct val="120000"/>
@@ -3382,8 +3397,8 @@
         </p:nvSpPr>
         <p:spPr>
           <a:xfrm>
-            <a:off x="1371600" y="5097780"/>
-            <a:ext cx="9448495" cy="411479"/>
+            <a:off x="1371600" y="4402182"/>
+            <a:ext cx="9448495" cy="387313"/>
           </a:xfrm>
           <a:prstGeom prst="rect">
             <a:avLst/>
@@ -3396,11 +3411,16 @@
           </a:bodyPr>
           <a:lstStyle/>
           <a:p>
+            <a:rPr sz="1200">
+              <a:latin typeface="Arial"/>
+              <a:ea typeface="Microsoft YaHei"/>
+              <a:sym typeface="Segoe UI Emoji"/>
+            </a:rPr>
             <a:pPr algn="ctr">
               <a:lnSpc>
                 <a:spcPct val="120000"/>
               </a:lnSpc>
-              <a:defRPr sz="1800" b="0">
+              <a:defRPr sz="1700" b="0">
                 <a:solidFill>
                   <a:srgbClr val="A0AEBE"/>
                 </a:solidFill>
@@ -3471,7 +3491,7 @@
           </a:prstGeom>
           <a:solidFill>
             <a:srgbClr val="1A1C20">
-              <a:alpha val="70000"/>
+              <a:alpha val="75000"/>
             </a:srgbClr>
           </a:solidFill>
           <a:ln>
@@ -3516,7 +3536,7 @@
           </a:prstGeom>
           <a:solidFill>
             <a:srgbClr val="1A1C20">
-              <a:alpha val="40000"/>
+              <a:alpha val="45000"/>
             </a:srgbClr>
           </a:solidFill>
           <a:ln>
@@ -3561,7 +3581,7 @@
           </a:prstGeom>
           <a:solidFill>
             <a:srgbClr val="1A1C20">
-              <a:alpha val="20000"/>
+              <a:alpha val="25000"/>
             </a:srgbClr>
           </a:solidFill>
           <a:ln>
@@ -3599,7 +3619,7 @@
         <p:spPr>
           <a:xfrm>
             <a:off x="1097280" y="457200"/>
-            <a:ext cx="9601200" cy="640080"/>
+            <a:ext cx="9601200" cy="594360"/>
           </a:xfrm>
           <a:prstGeom prst="rect">
             <a:avLst/>
@@ -3612,11 +3632,16 @@
           </a:bodyPr>
           <a:lstStyle/>
           <a:p>
+            <a:rPr sz="1200">
+              <a:latin typeface="Arial"/>
+              <a:ea typeface="Microsoft YaHei"/>
+              <a:sym typeface="Segoe UI Emoji"/>
+            </a:rPr>
             <a:pPr algn="l">
               <a:lnSpc>
                 <a:spcPct val="120000"/>
               </a:lnSpc>
-              <a:defRPr sz="3600" b="1">
+              <a:defRPr sz="3400" b="1">
                 <a:solidFill>
                   <a:srgbClr val="F0EDE8"/>
                 </a:solidFill>
@@ -3651,11 +3676,16 @@
           </a:bodyPr>
           <a:lstStyle/>
           <a:p>
+            <a:rPr sz="1200">
+              <a:latin typeface="Arial"/>
+              <a:ea typeface="Microsoft YaHei"/>
+              <a:sym typeface="Segoe UI Emoji"/>
+            </a:rPr>
             <a:pPr algn="l">
               <a:lnSpc>
                 <a:spcPct val="120000"/>
               </a:lnSpc>
-              <a:defRPr sz="1400" b="0">
+              <a:defRPr sz="1300" b="0">
                 <a:solidFill>
                   <a:srgbClr val="A0AEBE"/>
                 </a:solidFill>
@@ -3676,15 +3706,15 @@
         </p:nvSpPr>
         <p:spPr>
           <a:xfrm>
-            <a:off x="1097280" y="4114800"/>
-            <a:ext cx="4572000" cy="1828800"/>
+            <a:off x="1097280" y="2286000"/>
+            <a:ext cx="4572000" cy="1645920"/>
           </a:xfrm>
           <a:prstGeom prst="rect">
             <a:avLst/>
           </a:prstGeom>
           <a:solidFill>
             <a:srgbClr val="282D3A">
-              <a:alpha val="55000"/>
+              <a:alpha val="60000"/>
             </a:srgbClr>
           </a:solidFill>
           <a:ln>
@@ -3721,7 +3751,7 @@
         </p:nvSpPr>
         <p:spPr>
           <a:xfrm>
-            <a:off x="1325880" y="4251960"/>
+            <a:off x="1325880" y="2423160"/>
             <a:ext cx="4114800" cy="320040"/>
           </a:xfrm>
           <a:prstGeom prst="rect">
@@ -3735,6 +3765,11 @@
           </a:bodyPr>
           <a:lstStyle/>
           <a:p>
+            <a:rPr sz="1200">
+              <a:latin typeface="Arial"/>
+              <a:ea typeface="Microsoft YaHei"/>
+              <a:sym typeface="Segoe UI Emoji"/>
+            </a:rPr>
             <a:pPr algn="l">
               <a:lnSpc>
                 <a:spcPct val="120000"/>
@@ -3747,7 +3782,7 @@
               </a:defRPr>
             </a:pPr>
             <a:r>
-              <a:t>🌍 全球影响</a:t>
+              <a:t>🌍 全球影响力</a:t>
             </a:r>
           </a:p>
         </p:txBody>
@@ -3760,8 +3795,8 @@
         </p:nvSpPr>
         <p:spPr>
           <a:xfrm>
-            <a:off x="1325880" y="4617720"/>
-            <a:ext cx="4114800" cy="1188720"/>
+            <a:off x="1325880" y="2788920"/>
+            <a:ext cx="4114800" cy="1005840"/>
           </a:xfrm>
           <a:prstGeom prst="rect">
             <a:avLst/>
@@ -3774,6 +3809,11 @@
           </a:bodyPr>
           <a:lstStyle/>
           <a:p>
+            <a:rPr sz="1200">
+              <a:latin typeface="Arial"/>
+              <a:ea typeface="Microsoft YaHei"/>
+              <a:sym typeface="Segoe UI Emoji"/>
+            </a:rPr>
             <a:pPr algn="l">
               <a:lnSpc>
                 <a:spcPct val="140000"/>
@@ -3786,7 +3826,15 @@
               </a:defRPr>
             </a:pPr>
             <a:r>
-              <a:t>BBC覆盖3.5亿用户 · 英语是世界上最广泛学习的第二语言</a:t>
+              <a:t>BBC 覆盖 3.5 亿用户</a:t>
+            </a:r>
+            <a:br/>
+            <a:r>
+              <a:t>英语：最广泛学习的第二语言</a:t>
+            </a:r>
+            <a:br/>
+            <a:r>
+              <a:t>英联邦 56 国 · 26 亿人口</a:t>
             </a:r>
           </a:p>
         </p:txBody>
@@ -3799,15 +3847,15 @@
         </p:nvSpPr>
         <p:spPr>
           <a:xfrm>
-            <a:off x="6035040" y="4114800"/>
-            <a:ext cx="4572000" cy="1828800"/>
+            <a:off x="1097280" y="4572000"/>
+            <a:ext cx="9601200" cy="640080"/>
           </a:xfrm>
           <a:prstGeom prst="rect">
             <a:avLst/>
           </a:prstGeom>
           <a:solidFill>
-            <a:srgbClr val="282D3A">
-              <a:alpha val="55000"/>
+            <a:srgbClr val="E63946">
+              <a:alpha val="80000"/>
             </a:srgbClr>
           </a:solidFill>
           <a:ln>
@@ -3844,8 +3892,8 @@
         </p:nvSpPr>
         <p:spPr>
           <a:xfrm>
-            <a:off x="6263640" y="4251960"/>
-            <a:ext cx="4114800" cy="320040"/>
+            <a:off x="1371600" y="4645152"/>
+            <a:ext cx="9144000" cy="457200"/>
           </a:xfrm>
           <a:prstGeom prst="rect">
             <a:avLst/>
@@ -3858,11 +3906,16 @@
           </a:bodyPr>
           <a:lstStyle/>
           <a:p>
-            <a:pPr algn="l">
+            <a:rPr sz="1200">
+              <a:latin typeface="Arial"/>
+              <a:ea typeface="Microsoft YaHei"/>
+              <a:sym typeface="Segoe UI Emoji"/>
+            </a:rPr>
+            <a:pPr algn="ctr">
               <a:lnSpc>
                 <a:spcPct val="120000"/>
               </a:lnSpc>
-              <a:defRPr sz="1400" b="1">
+              <a:defRPr sz="1300" b="1">
                 <a:solidFill>
                   <a:srgbClr val="F0EDE8"/>
                 </a:solidFill>
@@ -3870,46 +3923,7 @@
               </a:defRPr>
             </a:pPr>
             <a:r>
-              <a:t>🤝 英联邦</a:t>
-            </a:r>
-          </a:p>
-        </p:txBody>
-      </p:sp>
-      <p:sp>
-        <p:nvSpPr>
-          <p:cNvPr id="13" name="TextBox 12"/>
-          <p:cNvSpPr txBox="1"/>
-          <p:nvPr/>
-        </p:nvSpPr>
-        <p:spPr>
-          <a:xfrm>
-            <a:off x="6263640" y="4617720"/>
-            <a:ext cx="4114800" cy="1188720"/>
-          </a:xfrm>
-          <a:prstGeom prst="rect">
-            <a:avLst/>
-          </a:prstGeom>
-          <a:noFill/>
-        </p:spPr>
-        <p:txBody>
-          <a:bodyPr wrap="square">
-            <a:spAutoFit/>
-          </a:bodyPr>
-          <a:lstStyle/>
-          <a:p>
-            <a:pPr algn="l">
-              <a:lnSpc>
-                <a:spcPct val="140000"/>
-              </a:lnSpc>
-              <a:defRPr sz="1200" b="0">
-                <a:solidFill>
-                  <a:srgbClr val="F0EDE8"/>
-                </a:solidFill>
-                <a:latin typeface="Arial"/>
-              </a:defRPr>
-            </a:pPr>
-            <a:r>
-              <a:t>56个成员国 · 26亿人口 · 横跨六大洲</a:t>
+              <a:t>📺 16秒精华视频短片可在线观看 → 网页版 ppt.html 第10页</a:t>
             </a:r>
           </a:p>
         </p:txBody>
@@ -3972,7 +3986,7 @@
           </a:prstGeom>
           <a:solidFill>
             <a:srgbClr val="1A1C20">
-              <a:alpha val="70000"/>
+              <a:alpha val="75000"/>
             </a:srgbClr>
           </a:solidFill>
           <a:ln>
@@ -4017,7 +4031,7 @@
           </a:prstGeom>
           <a:solidFill>
             <a:srgbClr val="1A1C20">
-              <a:alpha val="40000"/>
+              <a:alpha val="45000"/>
             </a:srgbClr>
           </a:solidFill>
           <a:ln>
@@ -4062,7 +4076,7 @@
           </a:prstGeom>
           <a:solidFill>
             <a:srgbClr val="1A1C20">
-              <a:alpha val="20000"/>
+              <a:alpha val="25000"/>
             </a:srgbClr>
           </a:solidFill>
           <a:ln>
@@ -4099,8 +4113,8 @@
         </p:nvSpPr>
         <p:spPr>
           <a:xfrm>
-            <a:off x="1371600" y="2446020"/>
-            <a:ext cx="9448495" cy="563880"/>
+            <a:off x="1371600" y="1371600"/>
+            <a:ext cx="9448495" cy="534270"/>
           </a:xfrm>
           <a:prstGeom prst="rect">
             <a:avLst/>
@@ -4113,11 +4127,16 @@
           </a:bodyPr>
           <a:lstStyle/>
           <a:p>
+            <a:rPr sz="1200">
+              <a:latin typeface="Arial"/>
+              <a:ea typeface="Microsoft YaHei"/>
+              <a:sym typeface="Segoe UI Emoji"/>
+            </a:rPr>
             <a:pPr algn="ctr">
               <a:lnSpc>
                 <a:spcPct val="120000"/>
               </a:lnSpc>
-              <a:defRPr sz="2800" b="0">
+              <a:defRPr sz="2600" b="0">
                 <a:solidFill>
                   <a:srgbClr val="F0EDE8"/>
                 </a:solidFill>
@@ -4138,8 +4157,8 @@
         </p:nvSpPr>
         <p:spPr>
           <a:xfrm>
-            <a:off x="1371600" y="3055620"/>
-            <a:ext cx="9448495" cy="960120"/>
+            <a:off x="1371600" y="1942446"/>
+            <a:ext cx="9448495" cy="926156"/>
           </a:xfrm>
           <a:prstGeom prst="rect">
             <a:avLst/>
@@ -4152,11 +4171,16 @@
           </a:bodyPr>
           <a:lstStyle/>
           <a:p>
+            <a:rPr sz="1200">
+              <a:latin typeface="Arial"/>
+              <a:ea typeface="Microsoft YaHei"/>
+              <a:sym typeface="Segoe UI Emoji"/>
+            </a:rPr>
             <a:pPr algn="ctr">
               <a:lnSpc>
                 <a:spcPct val="120000"/>
               </a:lnSpc>
-              <a:defRPr sz="5400" b="1">
+              <a:defRPr sz="5000" b="1">
                 <a:solidFill>
                   <a:srgbClr val="F0EDE8"/>
                 </a:solidFill>
@@ -4177,8 +4201,8 @@
         </p:nvSpPr>
         <p:spPr>
           <a:xfrm>
-            <a:off x="1371600" y="4198620"/>
-            <a:ext cx="9448495" cy="396240"/>
+            <a:off x="1371600" y="3014907"/>
+            <a:ext cx="9448495" cy="387313"/>
           </a:xfrm>
           <a:prstGeom prst="rect">
             <a:avLst/>
@@ -4191,6 +4215,11 @@
           </a:bodyPr>
           <a:lstStyle/>
           <a:p>
+            <a:rPr sz="1200">
+              <a:latin typeface="Arial"/>
+              <a:ea typeface="Microsoft YaHei"/>
+              <a:sym typeface="Segoe UI Emoji"/>
+            </a:rPr>
             <a:pPr algn="ctr">
               <a:lnSpc>
                 <a:spcPct val="120000"/>
@@ -4203,7 +4232,7 @@
               </a:defRPr>
             </a:pPr>
             <a:r>
-              <a:t>从寒冷的高地到温润的平原，从蒸汽机的轰鸣到互联网的静默传递。</a:t>
+              <a:t>从寒冷的高地到温润的平原，</a:t>
             </a:r>
           </a:p>
         </p:txBody>
@@ -4216,8 +4245,8 @@
         </p:nvSpPr>
         <p:spPr>
           <a:xfrm>
-            <a:off x="1371600" y="4640580"/>
-            <a:ext cx="9448495" cy="396240"/>
+            <a:off x="1371600" y="3438797"/>
+            <a:ext cx="9448495" cy="387313"/>
           </a:xfrm>
           <a:prstGeom prst="rect">
             <a:avLst/>
@@ -4230,6 +4259,11 @@
           </a:bodyPr>
           <a:lstStyle/>
           <a:p>
+            <a:rPr sz="1200">
+              <a:latin typeface="Arial"/>
+              <a:ea typeface="Microsoft YaHei"/>
+              <a:sym typeface="Segoe UI Emoji"/>
+            </a:rPr>
             <a:pPr algn="ctr">
               <a:lnSpc>
                 <a:spcPct val="120000"/>
@@ -4242,7 +4276,7 @@
               </a:defRPr>
             </a:pPr>
             <a:r>
-              <a:t>古老传统与现代创新，完美融合。</a:t>
+              <a:t>从蒸汽机的轰鸣到互联网的静默传递。</a:t>
             </a:r>
           </a:p>
         </p:txBody>
@@ -4255,8 +4289,8 @@
         </p:nvSpPr>
         <p:spPr>
           <a:xfrm>
-            <a:off x="1371600" y="5219700"/>
-            <a:ext cx="9448495" cy="472439"/>
+            <a:off x="1371600" y="3972414"/>
+            <a:ext cx="9448495" cy="403642"/>
           </a:xfrm>
           <a:prstGeom prst="rect">
             <a:avLst/>
@@ -4269,11 +4303,60 @@
           </a:bodyPr>
           <a:lstStyle/>
           <a:p>
+            <a:rPr sz="1200">
+              <a:latin typeface="Arial"/>
+              <a:ea typeface="Microsoft YaHei"/>
+              <a:sym typeface="Segoe UI Emoji"/>
+            </a:rPr>
             <a:pPr algn="ctr">
               <a:lnSpc>
                 <a:spcPct val="120000"/>
               </a:lnSpc>
-              <a:defRPr sz="2200" b="1">
+              <a:defRPr sz="1800" b="1">
+                <a:solidFill>
+                  <a:srgbClr val="F0EDE8"/>
+                </a:solidFill>
+                <a:latin typeface="Arial"/>
+              </a:defRPr>
+            </a:pPr>
+            <a:r>
+              <a:t>古老传统与现代创新，完美融合。</a:t>
+            </a:r>
+          </a:p>
+        </p:txBody>
+      </p:sp>
+      <p:sp>
+        <p:nvSpPr>
+          <p:cNvPr id="11" name="TextBox 10"/>
+          <p:cNvSpPr txBox="1"/>
+          <p:nvPr/>
+        </p:nvSpPr>
+        <p:spPr>
+          <a:xfrm>
+            <a:off x="1371600" y="4522361"/>
+            <a:ext cx="9448495" cy="436299"/>
+          </a:xfrm>
+          <a:prstGeom prst="rect">
+            <a:avLst/>
+          </a:prstGeom>
+          <a:noFill/>
+        </p:spPr>
+        <p:txBody>
+          <a:bodyPr wrap="square">
+            <a:spAutoFit/>
+          </a:bodyPr>
+          <a:lstStyle/>
+          <a:p>
+            <a:rPr sz="1200">
+              <a:latin typeface="Arial"/>
+              <a:ea typeface="Microsoft YaHei"/>
+              <a:sym typeface="Segoe UI Emoji"/>
+            </a:rPr>
+            <a:pPr algn="ctr">
+              <a:lnSpc>
+                <a:spcPct val="120000"/>
+              </a:lnSpc>
+              <a:defRPr sz="2000" b="1">
                 <a:solidFill>
                   <a:srgbClr val="F0EDE8"/>
                 </a:solidFill>
@@ -4320,7 +4403,7 @@
         <p:spPr>
           <a:xfrm>
             <a:off x="0" y="0"/>
-            <a:ext cx="7132320" cy="6858000"/>
+            <a:ext cx="12191695" cy="6858000"/>
           </a:xfrm>
           <a:prstGeom prst="rect">
             <a:avLst/>
@@ -4381,8 +4464,8 @@
         </p:nvSpPr>
         <p:spPr>
           <a:xfrm>
-            <a:off x="7680960" y="548640"/>
-            <a:ext cx="4144975" cy="548640"/>
+            <a:off x="7680960" y="457200"/>
+            <a:ext cx="4144975" cy="502920"/>
           </a:xfrm>
           <a:prstGeom prst="rect">
             <a:avLst/>
@@ -4395,11 +4478,16 @@
           </a:bodyPr>
           <a:lstStyle/>
           <a:p>
+            <a:rPr sz="1200">
+              <a:latin typeface="Arial"/>
+              <a:ea typeface="Microsoft YaHei"/>
+              <a:sym typeface="Segoe UI Emoji"/>
+            </a:rPr>
             <a:pPr algn="l">
               <a:lnSpc>
                 <a:spcPct val="120000"/>
               </a:lnSpc>
-              <a:defRPr sz="2800" b="1">
+              <a:defRPr sz="2600" b="1">
                 <a:solidFill>
                   <a:srgbClr val="F0EDE8"/>
                 </a:solidFill>
@@ -4420,8 +4508,8 @@
         </p:nvSpPr>
         <p:spPr>
           <a:xfrm>
-            <a:off x="7680960" y="1051560"/>
-            <a:ext cx="4144975" cy="411480"/>
+            <a:off x="7680960" y="960120"/>
+            <a:ext cx="4144975" cy="365760"/>
           </a:xfrm>
           <a:prstGeom prst="rect">
             <a:avLst/>
@@ -4434,13 +4522,18 @@
           </a:bodyPr>
           <a:lstStyle/>
           <a:p>
+            <a:rPr sz="1200">
+              <a:latin typeface="Arial"/>
+              <a:ea typeface="Microsoft YaHei"/>
+              <a:sym typeface="Segoe UI Emoji"/>
+            </a:rPr>
             <a:pPr algn="l">
               <a:lnSpc>
                 <a:spcPct val="120000"/>
               </a:lnSpc>
               <a:defRPr sz="1200" b="0">
                 <a:solidFill>
-                  <a:srgbClr val="A0AEBE"/>
+                  <a:srgbClr val="C0CCD8"/>
                 </a:solidFill>
                 <a:latin typeface="Arial"/>
               </a:defRPr>
@@ -4459,8 +4552,8 @@
         </p:nvSpPr>
         <p:spPr>
           <a:xfrm>
-            <a:off x="7680960" y="1783080"/>
-            <a:ext cx="73152" cy="548640"/>
+            <a:off x="7680960" y="1828800"/>
+            <a:ext cx="54864" cy="502920"/>
           </a:xfrm>
           <a:prstGeom prst="rect">
             <a:avLst/>
@@ -4504,7 +4597,7 @@
         </p:nvSpPr>
         <p:spPr>
           <a:xfrm>
-            <a:off x="7955279" y="1783080"/>
+            <a:off x="7909560" y="1810512"/>
             <a:ext cx="3779215" cy="274320"/>
           </a:xfrm>
           <a:prstGeom prst="rect">
@@ -4518,6 +4611,11 @@
           </a:bodyPr>
           <a:lstStyle/>
           <a:p>
+            <a:rPr sz="1200">
+              <a:latin typeface="Arial"/>
+              <a:ea typeface="Microsoft YaHei"/>
+              <a:sym typeface="Segoe UI Emoji"/>
+            </a:rPr>
             <a:pPr algn="l">
               <a:lnSpc>
                 <a:spcPct val="120000"/>
@@ -4543,8 +4641,8 @@
         </p:nvSpPr>
         <p:spPr>
           <a:xfrm>
-            <a:off x="7955279" y="2084832"/>
-            <a:ext cx="3779215" cy="502920"/>
+            <a:off x="7909560" y="2084832"/>
+            <a:ext cx="3779215" cy="548640"/>
           </a:xfrm>
           <a:prstGeom prst="rect">
             <a:avLst/>
@@ -4557,6 +4655,11 @@
           </a:bodyPr>
           <a:lstStyle/>
           <a:p>
+            <a:rPr sz="1200">
+              <a:latin typeface="Arial"/>
+              <a:ea typeface="Microsoft YaHei"/>
+              <a:sym typeface="Segoe UI Emoji"/>
+            </a:rPr>
             <a:pPr algn="l">
               <a:lnSpc>
                 <a:spcPct val="135000"/>
@@ -4587,7 +4690,7 @@
         <p:spPr>
           <a:xfrm>
             <a:off x="7680960" y="2834640"/>
-            <a:ext cx="73152" cy="548640"/>
+            <a:ext cx="54864" cy="502920"/>
           </a:xfrm>
           <a:prstGeom prst="rect">
             <a:avLst/>
@@ -4631,7 +4734,7 @@
         </p:nvSpPr>
         <p:spPr>
           <a:xfrm>
-            <a:off x="7955279" y="2834640"/>
+            <a:off x="7909560" y="2816352"/>
             <a:ext cx="3779215" cy="274320"/>
           </a:xfrm>
           <a:prstGeom prst="rect">
@@ -4645,6 +4748,11 @@
           </a:bodyPr>
           <a:lstStyle/>
           <a:p>
+            <a:rPr sz="1200">
+              <a:latin typeface="Arial"/>
+              <a:ea typeface="Microsoft YaHei"/>
+              <a:sym typeface="Segoe UI Emoji"/>
+            </a:rPr>
             <a:pPr algn="l">
               <a:lnSpc>
                 <a:spcPct val="120000"/>
@@ -4670,8 +4778,8 @@
         </p:nvSpPr>
         <p:spPr>
           <a:xfrm>
-            <a:off x="7955279" y="3136391"/>
-            <a:ext cx="3779215" cy="502920"/>
+            <a:off x="7909560" y="3090672"/>
+            <a:ext cx="3779215" cy="548640"/>
           </a:xfrm>
           <a:prstGeom prst="rect">
             <a:avLst/>
@@ -4684,6 +4792,11 @@
           </a:bodyPr>
           <a:lstStyle/>
           <a:p>
+            <a:rPr sz="1200">
+              <a:latin typeface="Arial"/>
+              <a:ea typeface="Microsoft YaHei"/>
+              <a:sym typeface="Segoe UI Emoji"/>
+            </a:rPr>
             <a:pPr algn="l">
               <a:lnSpc>
                 <a:spcPct val="135000"/>
@@ -4696,7 +4809,7 @@
               </a:defRPr>
             </a:pPr>
             <a:r>
-              <a:t>高地山地 · 本尼维斯山(1345m)</a:t>
+              <a:t>高地山地 · 本尼维斯山 1345m</a:t>
             </a:r>
             <a:br/>
             <a:r>
@@ -4713,8 +4826,8 @@
         </p:nvSpPr>
         <p:spPr>
           <a:xfrm>
-            <a:off x="7680960" y="3886200"/>
-            <a:ext cx="73152" cy="548640"/>
+            <a:off x="7680960" y="3840480"/>
+            <a:ext cx="54864" cy="502920"/>
           </a:xfrm>
           <a:prstGeom prst="rect">
             <a:avLst/>
@@ -4758,7 +4871,7 @@
         </p:nvSpPr>
         <p:spPr>
           <a:xfrm>
-            <a:off x="7955279" y="3886200"/>
+            <a:off x="7909560" y="3822192"/>
             <a:ext cx="3779215" cy="274320"/>
           </a:xfrm>
           <a:prstGeom prst="rect">
@@ -4772,6 +4885,11 @@
           </a:bodyPr>
           <a:lstStyle/>
           <a:p>
+            <a:rPr sz="1200">
+              <a:latin typeface="Arial"/>
+              <a:ea typeface="Microsoft YaHei"/>
+              <a:sym typeface="Segoe UI Emoji"/>
+            </a:rPr>
             <a:pPr algn="l">
               <a:lnSpc>
                 <a:spcPct val="120000"/>
@@ -4797,8 +4915,8 @@
         </p:nvSpPr>
         <p:spPr>
           <a:xfrm>
-            <a:off x="7955279" y="4187952"/>
-            <a:ext cx="3779215" cy="502920"/>
+            <a:off x="7909560" y="4096512"/>
+            <a:ext cx="3779215" cy="548640"/>
           </a:xfrm>
           <a:prstGeom prst="rect">
             <a:avLst/>
@@ -4811,6 +4929,11 @@
           </a:bodyPr>
           <a:lstStyle/>
           <a:p>
+            <a:rPr sz="1200">
+              <a:latin typeface="Arial"/>
+              <a:ea typeface="Microsoft YaHei"/>
+              <a:sym typeface="Segoe UI Emoji"/>
+            </a:rPr>
             <a:pPr algn="l">
               <a:lnSpc>
                 <a:spcPct val="135000"/>
@@ -4823,7 +4946,7 @@
               </a:defRPr>
             </a:pPr>
             <a:r>
-              <a:t>斯诺登山(1085m) · 城堡遗迹</a:t>
+              <a:t>斯诺登山 1085m · 城堡遗迹</a:t>
             </a:r>
             <a:br/>
             <a:r>
@@ -4840,8 +4963,8 @@
         </p:nvSpPr>
         <p:spPr>
           <a:xfrm>
-            <a:off x="7680960" y="4937759"/>
-            <a:ext cx="73152" cy="548640"/>
+            <a:off x="7680960" y="4846320"/>
+            <a:ext cx="54864" cy="502920"/>
           </a:xfrm>
           <a:prstGeom prst="rect">
             <a:avLst/>
@@ -4885,7 +5008,7 @@
         </p:nvSpPr>
         <p:spPr>
           <a:xfrm>
-            <a:off x="7955279" y="4937759"/>
+            <a:off x="7909560" y="4828032"/>
             <a:ext cx="3779215" cy="274320"/>
           </a:xfrm>
           <a:prstGeom prst="rect">
@@ -4899,6 +5022,11 @@
           </a:bodyPr>
           <a:lstStyle/>
           <a:p>
+            <a:rPr sz="1200">
+              <a:latin typeface="Arial"/>
+              <a:ea typeface="Microsoft YaHei"/>
+              <a:sym typeface="Segoe UI Emoji"/>
+            </a:rPr>
             <a:pPr algn="l">
               <a:lnSpc>
                 <a:spcPct val="120000"/>
@@ -4924,8 +5052,8 @@
         </p:nvSpPr>
         <p:spPr>
           <a:xfrm>
-            <a:off x="7955279" y="5239512"/>
-            <a:ext cx="3779215" cy="502920"/>
+            <a:off x="7909560" y="5102352"/>
+            <a:ext cx="3779215" cy="548640"/>
           </a:xfrm>
           <a:prstGeom prst="rect">
             <a:avLst/>
@@ -4938,6 +5066,11 @@
           </a:bodyPr>
           <a:lstStyle/>
           <a:p>
+            <a:rPr sz="1200">
+              <a:latin typeface="Arial"/>
+              <a:ea typeface="Microsoft YaHei"/>
+              <a:sym typeface="Segoe UI Emoji"/>
+            </a:rPr>
             <a:pPr algn="l">
               <a:lnSpc>
                 <a:spcPct val="135000"/>
@@ -4950,7 +5083,7 @@
               </a:defRPr>
             </a:pPr>
             <a:r>
-              <a:t>内伊湖(全英最大湖)</a:t>
+              <a:t>内伊湖（全英最大湖）</a:t>
             </a:r>
             <a:br/>
             <a:r>
@@ -4967,7 +5100,7 @@
         </p:nvSpPr>
         <p:spPr>
           <a:xfrm>
-            <a:off x="7680960" y="6217920"/>
+            <a:off x="7680960" y="6126480"/>
             <a:ext cx="4144975" cy="274320"/>
           </a:xfrm>
           <a:prstGeom prst="rect">
@@ -4981,11 +5114,16 @@
           </a:bodyPr>
           <a:lstStyle/>
           <a:p>
+            <a:rPr sz="1200">
+              <a:latin typeface="Arial"/>
+              <a:ea typeface="Microsoft YaHei"/>
+              <a:sym typeface="Segoe UI Emoji"/>
+            </a:rPr>
             <a:pPr algn="l">
               <a:lnSpc>
                 <a:spcPct val="120000"/>
               </a:lnSpc>
-              <a:defRPr sz="1000" b="0">
+              <a:defRPr sz="900" b="0">
                 <a:solidFill>
                   <a:srgbClr val="8090A0"/>
                 </a:solidFill>
@@ -4993,7 +5131,7 @@
               </a:defRPr>
             </a:pPr>
             <a:r>
-              <a:t>总面积 ≈ 24.4 万 km²</a:t>
+              <a:t>总面积 ≈ 24.4 万 km² · 经纬度 49°–61°N, 8°W–2°E</a:t>
             </a:r>
           </a:p>
         </p:txBody>
@@ -5139,7 +5277,7 @@
         <p:spPr>
           <a:xfrm>
             <a:off x="1097280" y="457200"/>
-            <a:ext cx="9601200" cy="640080"/>
+            <a:ext cx="9601200" cy="594360"/>
           </a:xfrm>
           <a:prstGeom prst="rect">
             <a:avLst/>
@@ -5152,11 +5290,16 @@
           </a:bodyPr>
           <a:lstStyle/>
           <a:p>
+            <a:rPr sz="1200">
+              <a:latin typeface="Arial"/>
+              <a:ea typeface="Microsoft YaHei"/>
+              <a:sym typeface="Segoe UI Emoji"/>
+            </a:rPr>
             <a:pPr algn="l">
               <a:lnSpc>
                 <a:spcPct val="120000"/>
               </a:lnSpc>
-              <a:defRPr sz="3600" b="1">
+              <a:defRPr sz="3400" b="1">
                 <a:solidFill>
                   <a:srgbClr val="1A2A3A"/>
                 </a:solidFill>
@@ -5191,11 +5334,16 @@
           </a:bodyPr>
           <a:lstStyle/>
           <a:p>
+            <a:rPr sz="1200">
+              <a:latin typeface="Arial"/>
+              <a:ea typeface="Microsoft YaHei"/>
+              <a:sym typeface="Segoe UI Emoji"/>
+            </a:rPr>
             <a:pPr algn="l">
               <a:lnSpc>
                 <a:spcPct val="120000"/>
               </a:lnSpc>
-              <a:defRPr sz="1400" b="0">
+              <a:defRPr sz="1300" b="0">
                 <a:solidFill>
                   <a:srgbClr val="2A3A4A"/>
                 </a:solidFill>
@@ -5216,8 +5364,8 @@
         </p:nvSpPr>
         <p:spPr>
           <a:xfrm>
-            <a:off x="1097280" y="4023360"/>
-            <a:ext cx="4572000" cy="1828800"/>
+            <a:off x="1097280" y="4114800"/>
+            <a:ext cx="4572000" cy="1737360"/>
           </a:xfrm>
           <a:prstGeom prst="rect">
             <a:avLst/>
@@ -5261,7 +5409,7 @@
         </p:nvSpPr>
         <p:spPr>
           <a:xfrm>
-            <a:off x="1325880" y="4160520"/>
+            <a:off x="1325880" y="4251960"/>
             <a:ext cx="4114800" cy="320040"/>
           </a:xfrm>
           <a:prstGeom prst="rect">
@@ -5275,6 +5423,11 @@
           </a:bodyPr>
           <a:lstStyle/>
           <a:p>
+            <a:rPr sz="1200">
+              <a:latin typeface="Arial"/>
+              <a:ea typeface="Microsoft YaHei"/>
+              <a:sym typeface="Segoe UI Emoji"/>
+            </a:rPr>
             <a:pPr algn="l">
               <a:lnSpc>
                 <a:spcPct val="120000"/>
@@ -5300,8 +5453,8 @@
         </p:nvSpPr>
         <p:spPr>
           <a:xfrm>
-            <a:off x="1325880" y="4526280"/>
-            <a:ext cx="4114800" cy="1188720"/>
+            <a:off x="1325880" y="4617720"/>
+            <a:ext cx="4114800" cy="1097280"/>
           </a:xfrm>
           <a:prstGeom prst="rect">
             <a:avLst/>
@@ -5314,6 +5467,11 @@
           </a:bodyPr>
           <a:lstStyle/>
           <a:p>
+            <a:rPr sz="1200">
+              <a:latin typeface="Arial"/>
+              <a:ea typeface="Microsoft YaHei"/>
+              <a:sym typeface="Segoe UI Emoji"/>
+            </a:rPr>
             <a:pPr algn="l">
               <a:lnSpc>
                 <a:spcPct val="140000"/>
@@ -5343,8 +5501,8 @@
         </p:nvSpPr>
         <p:spPr>
           <a:xfrm>
-            <a:off x="6035040" y="4023360"/>
-            <a:ext cx="4572000" cy="1828800"/>
+            <a:off x="6035040" y="4114800"/>
+            <a:ext cx="4572000" cy="1737360"/>
           </a:xfrm>
           <a:prstGeom prst="rect">
             <a:avLst/>
@@ -5388,7 +5546,7 @@
         </p:nvSpPr>
         <p:spPr>
           <a:xfrm>
-            <a:off x="6263640" y="4160520"/>
+            <a:off x="6263640" y="4251960"/>
             <a:ext cx="4114800" cy="320040"/>
           </a:xfrm>
           <a:prstGeom prst="rect">
@@ -5402,6 +5560,11 @@
           </a:bodyPr>
           <a:lstStyle/>
           <a:p>
+            <a:rPr sz="1200">
+              <a:latin typeface="Arial"/>
+              <a:ea typeface="Microsoft YaHei"/>
+              <a:sym typeface="Segoe UI Emoji"/>
+            </a:rPr>
             <a:pPr algn="l">
               <a:lnSpc>
                 <a:spcPct val="120000"/>
@@ -5427,8 +5590,8 @@
         </p:nvSpPr>
         <p:spPr>
           <a:xfrm>
-            <a:off x="6263640" y="4526280"/>
-            <a:ext cx="4114800" cy="1188720"/>
+            <a:off x="6263640" y="4617720"/>
+            <a:ext cx="4114800" cy="1097280"/>
           </a:xfrm>
           <a:prstGeom prst="rect">
             <a:avLst/>
@@ -5441,6 +5604,11 @@
           </a:bodyPr>
           <a:lstStyle/>
           <a:p>
+            <a:rPr sz="1200">
+              <a:latin typeface="Arial"/>
+              <a:ea typeface="Microsoft YaHei"/>
+              <a:sym typeface="Segoe UI Emoji"/>
+            </a:rPr>
             <a:pPr algn="l">
               <a:lnSpc>
                 <a:spcPct val="140000"/>
@@ -5500,7 +5668,7 @@
         <p:spPr>
           <a:xfrm>
             <a:off x="0" y="0"/>
-            <a:ext cx="7132320" cy="6858000"/>
+            <a:ext cx="12191695" cy="6858000"/>
           </a:xfrm>
           <a:prstGeom prst="rect">
             <a:avLst/>
@@ -5561,8 +5729,8 @@
         </p:nvSpPr>
         <p:spPr>
           <a:xfrm>
-            <a:off x="7680960" y="548640"/>
-            <a:ext cx="4144975" cy="548640"/>
+            <a:off x="7680960" y="457200"/>
+            <a:ext cx="4144975" cy="502920"/>
           </a:xfrm>
           <a:prstGeom prst="rect">
             <a:avLst/>
@@ -5575,11 +5743,16 @@
           </a:bodyPr>
           <a:lstStyle/>
           <a:p>
+            <a:rPr sz="1200">
+              <a:latin typeface="Arial"/>
+              <a:ea typeface="Microsoft YaHei"/>
+              <a:sym typeface="Segoe UI Emoji"/>
+            </a:rPr>
             <a:pPr algn="l">
               <a:lnSpc>
                 <a:spcPct val="120000"/>
               </a:lnSpc>
-              <a:defRPr sz="2800" b="1">
+              <a:defRPr sz="2600" b="1">
                 <a:solidFill>
                   <a:srgbClr val="F0EDE8"/>
                 </a:solidFill>
@@ -5600,8 +5773,8 @@
         </p:nvSpPr>
         <p:spPr>
           <a:xfrm>
-            <a:off x="7680960" y="1051560"/>
-            <a:ext cx="4144975" cy="411480"/>
+            <a:off x="7680960" y="960120"/>
+            <a:ext cx="4144975" cy="365760"/>
           </a:xfrm>
           <a:prstGeom prst="rect">
             <a:avLst/>
@@ -5614,19 +5787,24 @@
           </a:bodyPr>
           <a:lstStyle/>
           <a:p>
+            <a:rPr sz="1200">
+              <a:latin typeface="Arial"/>
+              <a:ea typeface="Microsoft YaHei"/>
+              <a:sym typeface="Segoe UI Emoji"/>
+            </a:rPr>
             <a:pPr algn="l">
               <a:lnSpc>
                 <a:spcPct val="120000"/>
               </a:lnSpc>
               <a:defRPr sz="1200" b="0">
                 <a:solidFill>
-                  <a:srgbClr val="A0AEBE"/>
+                  <a:srgbClr val="C0CCD8"/>
                 </a:solidFill>
                 <a:latin typeface="Arial"/>
               </a:defRPr>
             </a:pPr>
             <a:r>
-              <a:t>英国四大地区的首府 — 各自独特的故事与气质</a:t>
+              <a:t>英国四大地区的首府 — 各自的气质与故事</a:t>
             </a:r>
           </a:p>
         </p:txBody>
@@ -5639,8 +5817,8 @@
         </p:nvSpPr>
         <p:spPr>
           <a:xfrm>
-            <a:off x="7680960" y="1783080"/>
-            <a:ext cx="73152" cy="548640"/>
+            <a:off x="7680960" y="1828800"/>
+            <a:ext cx="54864" cy="502920"/>
           </a:xfrm>
           <a:prstGeom prst="rect">
             <a:avLst/>
@@ -5684,7 +5862,7 @@
         </p:nvSpPr>
         <p:spPr>
           <a:xfrm>
-            <a:off x="7955279" y="1783080"/>
+            <a:off x="7909560" y="1810512"/>
             <a:ext cx="3779215" cy="274320"/>
           </a:xfrm>
           <a:prstGeom prst="rect">
@@ -5698,6 +5876,11 @@
           </a:bodyPr>
           <a:lstStyle/>
           <a:p>
+            <a:rPr sz="1200">
+              <a:latin typeface="Arial"/>
+              <a:ea typeface="Microsoft YaHei"/>
+              <a:sym typeface="Segoe UI Emoji"/>
+            </a:rPr>
             <a:pPr algn="l">
               <a:lnSpc>
                 <a:spcPct val="120000"/>
@@ -5723,8 +5906,8 @@
         </p:nvSpPr>
         <p:spPr>
           <a:xfrm>
-            <a:off x="7955279" y="2084832"/>
-            <a:ext cx="3779215" cy="502920"/>
+            <a:off x="7909560" y="2084832"/>
+            <a:ext cx="3779215" cy="548640"/>
           </a:xfrm>
           <a:prstGeom prst="rect">
             <a:avLst/>
@@ -5737,6 +5920,11 @@
           </a:bodyPr>
           <a:lstStyle/>
           <a:p>
+            <a:rPr sz="1200">
+              <a:latin typeface="Arial"/>
+              <a:ea typeface="Microsoft YaHei"/>
+              <a:sym typeface="Segoe UI Emoji"/>
+            </a:rPr>
             <a:pPr algn="l">
               <a:lnSpc>
                 <a:spcPct val="135000"/>
@@ -5763,7 +5951,7 @@
         <p:spPr>
           <a:xfrm>
             <a:off x="7680960" y="2834640"/>
-            <a:ext cx="73152" cy="548640"/>
+            <a:ext cx="54864" cy="502920"/>
           </a:xfrm>
           <a:prstGeom prst="rect">
             <a:avLst/>
@@ -5807,7 +5995,7 @@
         </p:nvSpPr>
         <p:spPr>
           <a:xfrm>
-            <a:off x="7955279" y="2834640"/>
+            <a:off x="7909560" y="2816352"/>
             <a:ext cx="3779215" cy="274320"/>
           </a:xfrm>
           <a:prstGeom prst="rect">
@@ -5821,6 +6009,11 @@
           </a:bodyPr>
           <a:lstStyle/>
           <a:p>
+            <a:rPr sz="1200">
+              <a:latin typeface="Arial"/>
+              <a:ea typeface="Microsoft YaHei"/>
+              <a:sym typeface="Segoe UI Emoji"/>
+            </a:rPr>
             <a:pPr algn="l">
               <a:lnSpc>
                 <a:spcPct val="120000"/>
@@ -5846,8 +6039,8 @@
         </p:nvSpPr>
         <p:spPr>
           <a:xfrm>
-            <a:off x="7955279" y="3136391"/>
-            <a:ext cx="3779215" cy="502920"/>
+            <a:off x="7909560" y="3090672"/>
+            <a:ext cx="3779215" cy="548640"/>
           </a:xfrm>
           <a:prstGeom prst="rect">
             <a:avLst/>
@@ -5860,6 +6053,11 @@
           </a:bodyPr>
           <a:lstStyle/>
           <a:p>
+            <a:rPr sz="1200">
+              <a:latin typeface="Arial"/>
+              <a:ea typeface="Microsoft YaHei"/>
+              <a:sym typeface="Segoe UI Emoji"/>
+            </a:rPr>
             <a:pPr algn="l">
               <a:lnSpc>
                 <a:spcPct val="135000"/>
@@ -5885,8 +6083,8 @@
         </p:nvSpPr>
         <p:spPr>
           <a:xfrm>
-            <a:off x="7680960" y="3886200"/>
-            <a:ext cx="73152" cy="548640"/>
+            <a:off x="7680960" y="3840480"/>
+            <a:ext cx="54864" cy="502920"/>
           </a:xfrm>
           <a:prstGeom prst="rect">
             <a:avLst/>
@@ -5930,7 +6128,7 @@
         </p:nvSpPr>
         <p:spPr>
           <a:xfrm>
-            <a:off x="7955279" y="3886200"/>
+            <a:off x="7909560" y="3822192"/>
             <a:ext cx="3779215" cy="274320"/>
           </a:xfrm>
           <a:prstGeom prst="rect">
@@ -5944,6 +6142,11 @@
           </a:bodyPr>
           <a:lstStyle/>
           <a:p>
+            <a:rPr sz="1200">
+              <a:latin typeface="Arial"/>
+              <a:ea typeface="Microsoft YaHei"/>
+              <a:sym typeface="Segoe UI Emoji"/>
+            </a:rPr>
             <a:pPr algn="l">
               <a:lnSpc>
                 <a:spcPct val="120000"/>
@@ -5969,8 +6172,8 @@
         </p:nvSpPr>
         <p:spPr>
           <a:xfrm>
-            <a:off x="7955279" y="4187952"/>
-            <a:ext cx="3779215" cy="502920"/>
+            <a:off x="7909560" y="4096512"/>
+            <a:ext cx="3779215" cy="548640"/>
           </a:xfrm>
           <a:prstGeom prst="rect">
             <a:avLst/>
@@ -5983,6 +6186,11 @@
           </a:bodyPr>
           <a:lstStyle/>
           <a:p>
+            <a:rPr sz="1200">
+              <a:latin typeface="Arial"/>
+              <a:ea typeface="Microsoft YaHei"/>
+              <a:sym typeface="Segoe UI Emoji"/>
+            </a:rPr>
             <a:pPr algn="l">
               <a:lnSpc>
                 <a:spcPct val="135000"/>
@@ -6008,8 +6216,8 @@
         </p:nvSpPr>
         <p:spPr>
           <a:xfrm>
-            <a:off x="7680960" y="4937759"/>
-            <a:ext cx="73152" cy="548640"/>
+            <a:off x="7680960" y="4846320"/>
+            <a:ext cx="54864" cy="502920"/>
           </a:xfrm>
           <a:prstGeom prst="rect">
             <a:avLst/>
@@ -6053,7 +6261,7 @@
         </p:nvSpPr>
         <p:spPr>
           <a:xfrm>
-            <a:off x="7955279" y="4937759"/>
+            <a:off x="7909560" y="4828032"/>
             <a:ext cx="3779215" cy="274320"/>
           </a:xfrm>
           <a:prstGeom prst="rect">
@@ -6067,6 +6275,11 @@
           </a:bodyPr>
           <a:lstStyle/>
           <a:p>
+            <a:rPr sz="1200">
+              <a:latin typeface="Arial"/>
+              <a:ea typeface="Microsoft YaHei"/>
+              <a:sym typeface="Segoe UI Emoji"/>
+            </a:rPr>
             <a:pPr algn="l">
               <a:lnSpc>
                 <a:spcPct val="120000"/>
@@ -6092,8 +6305,8 @@
         </p:nvSpPr>
         <p:spPr>
           <a:xfrm>
-            <a:off x="7955279" y="5239512"/>
-            <a:ext cx="3779215" cy="502920"/>
+            <a:off x="7909560" y="5102352"/>
+            <a:ext cx="3779215" cy="548640"/>
           </a:xfrm>
           <a:prstGeom prst="rect">
             <a:avLst/>
@@ -6106,6 +6319,11 @@
           </a:bodyPr>
           <a:lstStyle/>
           <a:p>
+            <a:rPr sz="1200">
+              <a:latin typeface="Arial"/>
+              <a:ea typeface="Microsoft YaHei"/>
+              <a:sym typeface="Segoe UI Emoji"/>
+            </a:rPr>
             <a:pPr algn="l">
               <a:lnSpc>
                 <a:spcPct val="135000"/>
@@ -6264,7 +6482,7 @@
         <p:spPr>
           <a:xfrm>
             <a:off x="1097280" y="457200"/>
-            <a:ext cx="9601200" cy="640080"/>
+            <a:ext cx="9601200" cy="594360"/>
           </a:xfrm>
           <a:prstGeom prst="rect">
             <a:avLst/>
@@ -6277,11 +6495,16 @@
           </a:bodyPr>
           <a:lstStyle/>
           <a:p>
+            <a:rPr sz="1200">
+              <a:latin typeface="Arial"/>
+              <a:ea typeface="Microsoft YaHei"/>
+              <a:sym typeface="Segoe UI Emoji"/>
+            </a:rPr>
             <a:pPr algn="l">
               <a:lnSpc>
                 <a:spcPct val="120000"/>
               </a:lnSpc>
-              <a:defRPr sz="3600" b="1">
+              <a:defRPr sz="3400" b="1">
                 <a:solidFill>
                   <a:srgbClr val="1A2A3A"/>
                 </a:solidFill>
@@ -6316,11 +6539,16 @@
           </a:bodyPr>
           <a:lstStyle/>
           <a:p>
+            <a:rPr sz="1200">
+              <a:latin typeface="Arial"/>
+              <a:ea typeface="Microsoft YaHei"/>
+              <a:sym typeface="Segoe UI Emoji"/>
+            </a:rPr>
             <a:pPr algn="l">
               <a:lnSpc>
                 <a:spcPct val="120000"/>
               </a:lnSpc>
-              <a:defRPr sz="1400" b="0">
+              <a:defRPr sz="1300" b="0">
                 <a:solidFill>
                   <a:srgbClr val="2A3A4A"/>
                 </a:solidFill>
@@ -6328,7 +6556,7 @@
               </a:defRPr>
             </a:pPr>
             <a:r>
-              <a:t>英国农业以畜牧业为主体，受温带海洋性气候影响</a:t>
+              <a:t>英国农业以畜牧业为主体，受温带海洋性气候深刻影响</a:t>
             </a:r>
           </a:p>
         </p:txBody>
@@ -6341,8 +6569,8 @@
         </p:nvSpPr>
         <p:spPr>
           <a:xfrm>
-            <a:off x="1097280" y="4023360"/>
-            <a:ext cx="4572000" cy="1828800"/>
+            <a:off x="1097280" y="4114800"/>
+            <a:ext cx="4572000" cy="1737360"/>
           </a:xfrm>
           <a:prstGeom prst="rect">
             <a:avLst/>
@@ -6386,7 +6614,7 @@
         </p:nvSpPr>
         <p:spPr>
           <a:xfrm>
-            <a:off x="1325880" y="4160520"/>
+            <a:off x="1325880" y="4251960"/>
             <a:ext cx="4114800" cy="320040"/>
           </a:xfrm>
           <a:prstGeom prst="rect">
@@ -6400,6 +6628,11 @@
           </a:bodyPr>
           <a:lstStyle/>
           <a:p>
+            <a:rPr sz="1200">
+              <a:latin typeface="Arial"/>
+              <a:ea typeface="Microsoft YaHei"/>
+              <a:sym typeface="Segoe UI Emoji"/>
+            </a:rPr>
             <a:pPr algn="l">
               <a:lnSpc>
                 <a:spcPct val="120000"/>
@@ -6425,8 +6658,8 @@
         </p:nvSpPr>
         <p:spPr>
           <a:xfrm>
-            <a:off x="1325880" y="4526280"/>
-            <a:ext cx="4114800" cy="1188720"/>
+            <a:off x="1325880" y="4617720"/>
+            <a:ext cx="4114800" cy="1097280"/>
           </a:xfrm>
           <a:prstGeom prst="rect">
             <a:avLst/>
@@ -6439,6 +6672,11 @@
           </a:bodyPr>
           <a:lstStyle/>
           <a:p>
+            <a:rPr sz="1200">
+              <a:latin typeface="Arial"/>
+              <a:ea typeface="Microsoft YaHei"/>
+              <a:sym typeface="Segoe UI Emoji"/>
+            </a:rPr>
             <a:pPr algn="l">
               <a:lnSpc>
                 <a:spcPct val="140000"/>
@@ -6468,8 +6706,8 @@
         </p:nvSpPr>
         <p:spPr>
           <a:xfrm>
-            <a:off x="6035040" y="4023360"/>
-            <a:ext cx="4572000" cy="1828800"/>
+            <a:off x="6035040" y="4114800"/>
+            <a:ext cx="4572000" cy="1737360"/>
           </a:xfrm>
           <a:prstGeom prst="rect">
             <a:avLst/>
@@ -6513,7 +6751,7 @@
         </p:nvSpPr>
         <p:spPr>
           <a:xfrm>
-            <a:off x="6263640" y="4160520"/>
+            <a:off x="6263640" y="4251960"/>
             <a:ext cx="4114800" cy="320040"/>
           </a:xfrm>
           <a:prstGeom prst="rect">
@@ -6527,6 +6765,11 @@
           </a:bodyPr>
           <a:lstStyle/>
           <a:p>
+            <a:rPr sz="1200">
+              <a:latin typeface="Arial"/>
+              <a:ea typeface="Microsoft YaHei"/>
+              <a:sym typeface="Segoe UI Emoji"/>
+            </a:rPr>
             <a:pPr algn="l">
               <a:lnSpc>
                 <a:spcPct val="120000"/>
@@ -6552,8 +6795,8 @@
         </p:nvSpPr>
         <p:spPr>
           <a:xfrm>
-            <a:off x="6263640" y="4526280"/>
-            <a:ext cx="4114800" cy="1188720"/>
+            <a:off x="6263640" y="4617720"/>
+            <a:ext cx="4114800" cy="1097280"/>
           </a:xfrm>
           <a:prstGeom prst="rect">
             <a:avLst/>
@@ -6566,6 +6809,11 @@
           </a:bodyPr>
           <a:lstStyle/>
           <a:p>
+            <a:rPr sz="1200">
+              <a:latin typeface="Arial"/>
+              <a:ea typeface="Microsoft YaHei"/>
+              <a:sym typeface="Segoe UI Emoji"/>
+            </a:rPr>
             <a:pPr algn="l">
               <a:lnSpc>
                 <a:spcPct val="140000"/>
@@ -6595,8 +6843,8 @@
         </p:nvSpPr>
         <p:spPr>
           <a:xfrm>
-            <a:off x="1097280" y="5852160"/>
-            <a:ext cx="9601200" cy="365760"/>
+            <a:off x="1097280" y="5943600"/>
+            <a:ext cx="9601200" cy="320040"/>
           </a:xfrm>
           <a:prstGeom prst="rect">
             <a:avLst/>
@@ -6609,11 +6857,16 @@
           </a:bodyPr>
           <a:lstStyle/>
           <a:p>
+            <a:rPr sz="1200">
+              <a:latin typeface="Arial"/>
+              <a:ea typeface="Microsoft YaHei"/>
+              <a:sym typeface="Segoe UI Emoji"/>
+            </a:rPr>
             <a:pPr algn="l">
               <a:lnSpc>
                 <a:spcPct val="120000"/>
               </a:lnSpc>
-              <a:defRPr sz="1200" b="0">
+              <a:defRPr sz="1100" b="0">
                 <a:solidFill>
                   <a:srgbClr val="2A3A4A"/>
                 </a:solidFill>
@@ -6684,7 +6937,7 @@
           </a:prstGeom>
           <a:solidFill>
             <a:srgbClr val="1A1C20">
-              <a:alpha val="70000"/>
+              <a:alpha val="75000"/>
             </a:srgbClr>
           </a:solidFill>
           <a:ln>
@@ -6729,7 +6982,7 @@
           </a:prstGeom>
           <a:solidFill>
             <a:srgbClr val="1A1C20">
-              <a:alpha val="40000"/>
+              <a:alpha val="45000"/>
             </a:srgbClr>
           </a:solidFill>
           <a:ln>
@@ -6774,7 +7027,7 @@
           </a:prstGeom>
           <a:solidFill>
             <a:srgbClr val="1A1C20">
-              <a:alpha val="20000"/>
+              <a:alpha val="25000"/>
             </a:srgbClr>
           </a:solidFill>
           <a:ln>
@@ -6812,7 +7065,7 @@
         <p:spPr>
           <a:xfrm>
             <a:off x="1097280" y="457200"/>
-            <a:ext cx="9601200" cy="640080"/>
+            <a:ext cx="9601200" cy="594360"/>
           </a:xfrm>
           <a:prstGeom prst="rect">
             <a:avLst/>
@@ -6825,11 +7078,16 @@
           </a:bodyPr>
           <a:lstStyle/>
           <a:p>
+            <a:rPr sz="1200">
+              <a:latin typeface="Arial"/>
+              <a:ea typeface="Microsoft YaHei"/>
+              <a:sym typeface="Segoe UI Emoji"/>
+            </a:rPr>
             <a:pPr algn="l">
               <a:lnSpc>
                 <a:spcPct val="120000"/>
               </a:lnSpc>
-              <a:defRPr sz="3600" b="1">
+              <a:defRPr sz="3400" b="1">
                 <a:solidFill>
                   <a:srgbClr val="F0EDE8"/>
                 </a:solidFill>
@@ -6864,11 +7122,16 @@
           </a:bodyPr>
           <a:lstStyle/>
           <a:p>
+            <a:rPr sz="1200">
+              <a:latin typeface="Arial"/>
+              <a:ea typeface="Microsoft YaHei"/>
+              <a:sym typeface="Segoe UI Emoji"/>
+            </a:rPr>
             <a:pPr algn="l">
               <a:lnSpc>
                 <a:spcPct val="120000"/>
               </a:lnSpc>
-              <a:defRPr sz="1400" b="0">
+              <a:defRPr sz="1300" b="0">
                 <a:solidFill>
                   <a:srgbClr val="A0AEBE"/>
                 </a:solidFill>
@@ -6889,8 +7152,8 @@
         </p:nvSpPr>
         <p:spPr>
           <a:xfrm>
-            <a:off x="1097280" y="4114800"/>
-            <a:ext cx="4572000" cy="1828800"/>
+            <a:off x="1097280" y="4206240"/>
+            <a:ext cx="4572000" cy="1737360"/>
           </a:xfrm>
           <a:prstGeom prst="rect">
             <a:avLst/>
@@ -6934,7 +7197,7 @@
         </p:nvSpPr>
         <p:spPr>
           <a:xfrm>
-            <a:off x="1325880" y="4251960"/>
+            <a:off x="1325880" y="4343400"/>
             <a:ext cx="4114800" cy="320040"/>
           </a:xfrm>
           <a:prstGeom prst="rect">
@@ -6948,6 +7211,11 @@
           </a:bodyPr>
           <a:lstStyle/>
           <a:p>
+            <a:rPr sz="1200">
+              <a:latin typeface="Arial"/>
+              <a:ea typeface="Microsoft YaHei"/>
+              <a:sym typeface="Segoe UI Emoji"/>
+            </a:rPr>
             <a:pPr algn="l">
               <a:lnSpc>
                 <a:spcPct val="120000"/>
@@ -6973,8 +7241,8 @@
         </p:nvSpPr>
         <p:spPr>
           <a:xfrm>
-            <a:off x="1325880" y="4617720"/>
-            <a:ext cx="4114800" cy="1188720"/>
+            <a:off x="1325880" y="4709159"/>
+            <a:ext cx="4114800" cy="1097280"/>
           </a:xfrm>
           <a:prstGeom prst="rect">
             <a:avLst/>
@@ -6987,6 +7255,11 @@
           </a:bodyPr>
           <a:lstStyle/>
           <a:p>
+            <a:rPr sz="1200">
+              <a:latin typeface="Arial"/>
+              <a:ea typeface="Microsoft YaHei"/>
+              <a:sym typeface="Segoe UI Emoji"/>
+            </a:rPr>
             <a:pPr algn="l">
               <a:lnSpc>
                 <a:spcPct val="140000"/>
@@ -6999,11 +7272,11 @@
               </a:defRPr>
             </a:pPr>
             <a:r>
-              <a:t>蒸汽机 → 机器手工</a:t>
+              <a:t>蒸汽机 → 机器替代手工</a:t>
             </a:r>
             <a:br/>
             <a:r>
-              <a:t>工厂制度诞生 · 英国成为"世界工厂"</a:t>
+              <a:t>工厂制度诞生 · 英国成为「世界工厂」</a:t>
             </a:r>
           </a:p>
         </p:txBody>
@@ -7016,8 +7289,8 @@
         </p:nvSpPr>
         <p:spPr>
           <a:xfrm>
-            <a:off x="6035040" y="4114800"/>
-            <a:ext cx="4572000" cy="1828800"/>
+            <a:off x="6035040" y="4206240"/>
+            <a:ext cx="4572000" cy="1737360"/>
           </a:xfrm>
           <a:prstGeom prst="rect">
             <a:avLst/>
@@ -7061,7 +7334,7 @@
         </p:nvSpPr>
         <p:spPr>
           <a:xfrm>
-            <a:off x="6263640" y="4251960"/>
+            <a:off x="6263640" y="4343400"/>
             <a:ext cx="4114800" cy="320040"/>
           </a:xfrm>
           <a:prstGeom prst="rect">
@@ -7075,6 +7348,11 @@
           </a:bodyPr>
           <a:lstStyle/>
           <a:p>
+            <a:rPr sz="1200">
+              <a:latin typeface="Arial"/>
+              <a:ea typeface="Microsoft YaHei"/>
+              <a:sym typeface="Segoe UI Emoji"/>
+            </a:rPr>
             <a:pPr algn="l">
               <a:lnSpc>
                 <a:spcPct val="120000"/>
@@ -7100,8 +7378,8 @@
         </p:nvSpPr>
         <p:spPr>
           <a:xfrm>
-            <a:off x="6263640" y="4617720"/>
-            <a:ext cx="4114800" cy="1188720"/>
+            <a:off x="6263640" y="4709159"/>
+            <a:ext cx="4114800" cy="1097280"/>
           </a:xfrm>
           <a:prstGeom prst="rect">
             <a:avLst/>
@@ -7114,6 +7392,11 @@
           </a:bodyPr>
           <a:lstStyle/>
           <a:p>
+            <a:rPr sz="1200">
+              <a:latin typeface="Arial"/>
+              <a:ea typeface="Microsoft YaHei"/>
+              <a:sym typeface="Segoe UI Emoji"/>
+            </a:rPr>
             <a:pPr algn="l">
               <a:lnSpc>
                 <a:spcPct val="140000"/>
@@ -7276,7 +7559,7 @@
         <p:spPr>
           <a:xfrm>
             <a:off x="1097280" y="457200"/>
-            <a:ext cx="9601200" cy="640080"/>
+            <a:ext cx="9601200" cy="594360"/>
           </a:xfrm>
           <a:prstGeom prst="rect">
             <a:avLst/>
@@ -7289,11 +7572,16 @@
           </a:bodyPr>
           <a:lstStyle/>
           <a:p>
+            <a:rPr sz="1200">
+              <a:latin typeface="Arial"/>
+              <a:ea typeface="Microsoft YaHei"/>
+              <a:sym typeface="Segoe UI Emoji"/>
+            </a:rPr>
             <a:pPr algn="l">
               <a:lnSpc>
                 <a:spcPct val="120000"/>
               </a:lnSpc>
-              <a:defRPr sz="3600" b="1">
+              <a:defRPr sz="3400" b="1">
                 <a:solidFill>
                   <a:srgbClr val="1A2A3A"/>
                 </a:solidFill>
@@ -7328,11 +7616,16 @@
           </a:bodyPr>
           <a:lstStyle/>
           <a:p>
+            <a:rPr sz="1200">
+              <a:latin typeface="Arial"/>
+              <a:ea typeface="Microsoft YaHei"/>
+              <a:sym typeface="Segoe UI Emoji"/>
+            </a:rPr>
             <a:pPr algn="l">
               <a:lnSpc>
                 <a:spcPct val="120000"/>
               </a:lnSpc>
-              <a:defRPr sz="1400" b="0">
+              <a:defRPr sz="1300" b="0">
                 <a:solidFill>
                   <a:srgbClr val="2A3A4A"/>
                 </a:solidFill>
@@ -7347,13 +7640,58 @@
       </p:sp>
       <p:sp>
         <p:nvSpPr>
-          <p:cNvPr id="7" name="TextBox 6"/>
+          <p:cNvPr id="7" name="Rectangle 6"/>
+          <p:cNvSpPr/>
+          <p:nvPr/>
+        </p:nvSpPr>
+        <p:spPr>
+          <a:xfrm>
+            <a:off x="1097280" y="1554480"/>
+            <a:ext cx="9601200" cy="4572000"/>
+          </a:xfrm>
+          <a:prstGeom prst="rect">
+            <a:avLst/>
+          </a:prstGeom>
+          <a:solidFill>
+            <a:srgbClr val="F5F2ED">
+              <a:alpha val="70000"/>
+            </a:srgbClr>
+          </a:solidFill>
+          <a:ln>
+            <a:noFill/>
+          </a:ln>
+        </p:spPr>
+        <p:style>
+          <a:lnRef idx="1">
+            <a:schemeClr val="accent1"/>
+          </a:lnRef>
+          <a:fillRef idx="3">
+            <a:schemeClr val="accent1"/>
+          </a:fillRef>
+          <a:effectRef idx="2">
+            <a:schemeClr val="accent1"/>
+          </a:effectRef>
+          <a:fontRef idx="minor">
+            <a:schemeClr val="lt1"/>
+          </a:fontRef>
+        </p:style>
+        <p:txBody>
+          <a:bodyPr rtlCol="0" anchor="ctr"/>
+          <a:lstStyle/>
+          <a:p>
+            <a:pPr algn="ctr"/>
+          </a:p>
+        </p:txBody>
+      </p:sp>
+      <p:sp>
+        <p:nvSpPr>
+          <p:cNvPr id="8" name="TextBox 7"/>
           <p:cNvSpPr txBox="1"/>
           <p:nvPr/>
         </p:nvSpPr>
         <p:spPr>
           <a:xfrm>
-            <a:off x="1828800" y="2011680"/>
+            <a:off x="1828800" y="1920240"/>
             <a:ext cx="1371600" cy="274320"/>
           </a:xfrm>
           <a:prstGeom prst="rect">
@@ -7367,13 +7705,18 @@
           </a:bodyPr>
           <a:lstStyle/>
           <a:p>
+            <a:rPr sz="1200">
+              <a:latin typeface="Arial"/>
+              <a:ea typeface="Microsoft YaHei"/>
+              <a:sym typeface="Segoe UI Emoji"/>
+            </a:rPr>
             <a:pPr algn="l">
               <a:lnSpc>
                 <a:spcPct val="120000"/>
               </a:lnSpc>
               <a:defRPr sz="1400" b="1">
                 <a:solidFill>
-                  <a:srgbClr val="C62828"/>
+                  <a:srgbClr val="1D3557"/>
                 </a:solidFill>
                 <a:latin typeface="Arial"/>
               </a:defRPr>
@@ -7386,14 +7729,14 @@
       </p:sp>
       <p:sp>
         <p:nvSpPr>
-          <p:cNvPr id="8" name="TextBox 7"/>
+          <p:cNvPr id="9" name="TextBox 8"/>
           <p:cNvSpPr txBox="1"/>
           <p:nvPr/>
         </p:nvSpPr>
         <p:spPr>
           <a:xfrm>
-            <a:off x="3291840" y="2011680"/>
-            <a:ext cx="7315200" cy="274320"/>
+            <a:off x="3291840" y="1874520"/>
+            <a:ext cx="274320" cy="274320"/>
           </a:xfrm>
           <a:prstGeom prst="rect">
             <a:avLst/>
@@ -7406,6 +7749,55 @@
           </a:bodyPr>
           <a:lstStyle/>
           <a:p>
+            <a:rPr sz="1200">
+              <a:latin typeface="Arial"/>
+              <a:ea typeface="Microsoft YaHei"/>
+              <a:sym typeface="Segoe UI Emoji"/>
+            </a:rPr>
+            <a:pPr algn="ctr">
+              <a:lnSpc>
+                <a:spcPct val="120000"/>
+              </a:lnSpc>
+              <a:defRPr sz="1400" b="0">
+                <a:solidFill>
+                  <a:srgbClr val="C62828"/>
+                </a:solidFill>
+                <a:latin typeface="Arial"/>
+              </a:defRPr>
+            </a:pPr>
+            <a:r>
+              <a:t>•</a:t>
+            </a:r>
+          </a:p>
+        </p:txBody>
+      </p:sp>
+      <p:sp>
+        <p:nvSpPr>
+          <p:cNvPr id="10" name="TextBox 9"/>
+          <p:cNvSpPr txBox="1"/>
+          <p:nvPr/>
+        </p:nvSpPr>
+        <p:spPr>
+          <a:xfrm>
+            <a:off x="3657600" y="1920240"/>
+            <a:ext cx="6400800" cy="274320"/>
+          </a:xfrm>
+          <a:prstGeom prst="rect">
+            <a:avLst/>
+          </a:prstGeom>
+          <a:noFill/>
+        </p:spPr>
+        <p:txBody>
+          <a:bodyPr wrap="square">
+            <a:spAutoFit/>
+          </a:bodyPr>
+          <a:lstStyle/>
+          <a:p>
+            <a:rPr sz="1200">
+              <a:latin typeface="Arial"/>
+              <a:ea typeface="Microsoft YaHei"/>
+              <a:sym typeface="Segoe UI Emoji"/>
+            </a:rPr>
             <a:pPr algn="l">
               <a:lnSpc>
                 <a:spcPct val="120000"/>
@@ -7425,13 +7817,13 @@
       </p:sp>
       <p:sp>
         <p:nvSpPr>
-          <p:cNvPr id="9" name="TextBox 8"/>
+          <p:cNvPr id="11" name="TextBox 10"/>
           <p:cNvSpPr txBox="1"/>
           <p:nvPr/>
         </p:nvSpPr>
         <p:spPr>
           <a:xfrm>
-            <a:off x="1828800" y="2423160"/>
+            <a:off x="1828800" y="2377440"/>
             <a:ext cx="1371600" cy="274320"/>
           </a:xfrm>
           <a:prstGeom prst="rect">
@@ -7445,13 +7837,18 @@
           </a:bodyPr>
           <a:lstStyle/>
           <a:p>
+            <a:rPr sz="1200">
+              <a:latin typeface="Arial"/>
+              <a:ea typeface="Microsoft YaHei"/>
+              <a:sym typeface="Segoe UI Emoji"/>
+            </a:rPr>
             <a:pPr algn="l">
               <a:lnSpc>
                 <a:spcPct val="120000"/>
               </a:lnSpc>
               <a:defRPr sz="1400" b="1">
                 <a:solidFill>
-                  <a:srgbClr val="C62828"/>
+                  <a:srgbClr val="1D3557"/>
                 </a:solidFill>
                 <a:latin typeface="Arial"/>
               </a:defRPr>
@@ -7464,14 +7861,14 @@
       </p:sp>
       <p:sp>
         <p:nvSpPr>
-          <p:cNvPr id="10" name="TextBox 9"/>
+          <p:cNvPr id="12" name="TextBox 11"/>
           <p:cNvSpPr txBox="1"/>
           <p:nvPr/>
         </p:nvSpPr>
         <p:spPr>
           <a:xfrm>
-            <a:off x="3291840" y="2423160"/>
-            <a:ext cx="7315200" cy="274320"/>
+            <a:off x="3291840" y="2331720"/>
+            <a:ext cx="274320" cy="274320"/>
           </a:xfrm>
           <a:prstGeom prst="rect">
             <a:avLst/>
@@ -7484,6 +7881,55 @@
           </a:bodyPr>
           <a:lstStyle/>
           <a:p>
+            <a:rPr sz="1200">
+              <a:latin typeface="Arial"/>
+              <a:ea typeface="Microsoft YaHei"/>
+              <a:sym typeface="Segoe UI Emoji"/>
+            </a:rPr>
+            <a:pPr algn="ctr">
+              <a:lnSpc>
+                <a:spcPct val="120000"/>
+              </a:lnSpc>
+              <a:defRPr sz="1400" b="0">
+                <a:solidFill>
+                  <a:srgbClr val="C62828"/>
+                </a:solidFill>
+                <a:latin typeface="Arial"/>
+              </a:defRPr>
+            </a:pPr>
+            <a:r>
+              <a:t>•</a:t>
+            </a:r>
+          </a:p>
+        </p:txBody>
+      </p:sp>
+      <p:sp>
+        <p:nvSpPr>
+          <p:cNvPr id="13" name="TextBox 12"/>
+          <p:cNvSpPr txBox="1"/>
+          <p:nvPr/>
+        </p:nvSpPr>
+        <p:spPr>
+          <a:xfrm>
+            <a:off x="3657600" y="2377440"/>
+            <a:ext cx="6400800" cy="274320"/>
+          </a:xfrm>
+          <a:prstGeom prst="rect">
+            <a:avLst/>
+          </a:prstGeom>
+          <a:noFill/>
+        </p:spPr>
+        <p:txBody>
+          <a:bodyPr wrap="square">
+            <a:spAutoFit/>
+          </a:bodyPr>
+          <a:lstStyle/>
+          <a:p>
+            <a:rPr sz="1200">
+              <a:latin typeface="Arial"/>
+              <a:ea typeface="Microsoft YaHei"/>
+              <a:sym typeface="Segoe UI Emoji"/>
+            </a:rPr>
             <a:pPr algn="l">
               <a:lnSpc>
                 <a:spcPct val="120000"/>
@@ -7503,7 +7949,7 @@
       </p:sp>
       <p:sp>
         <p:nvSpPr>
-          <p:cNvPr id="11" name="TextBox 10"/>
+          <p:cNvPr id="14" name="TextBox 13"/>
           <p:cNvSpPr txBox="1"/>
           <p:nvPr/>
         </p:nvSpPr>
@@ -7523,13 +7969,18 @@
           </a:bodyPr>
           <a:lstStyle/>
           <a:p>
+            <a:rPr sz="1200">
+              <a:latin typeface="Arial"/>
+              <a:ea typeface="Microsoft YaHei"/>
+              <a:sym typeface="Segoe UI Emoji"/>
+            </a:rPr>
             <a:pPr algn="l">
               <a:lnSpc>
                 <a:spcPct val="120000"/>
               </a:lnSpc>
               <a:defRPr sz="1400" b="1">
                 <a:solidFill>
-                  <a:srgbClr val="C62828"/>
+                  <a:srgbClr val="1D3557"/>
                 </a:solidFill>
                 <a:latin typeface="Arial"/>
               </a:defRPr>
@@ -7542,14 +7993,14 @@
       </p:sp>
       <p:sp>
         <p:nvSpPr>
-          <p:cNvPr id="12" name="TextBox 11"/>
+          <p:cNvPr id="15" name="TextBox 14"/>
           <p:cNvSpPr txBox="1"/>
           <p:nvPr/>
         </p:nvSpPr>
         <p:spPr>
           <a:xfrm>
-            <a:off x="3291840" y="2834640"/>
-            <a:ext cx="7315200" cy="274320"/>
+            <a:off x="3291840" y="2788920"/>
+            <a:ext cx="274320" cy="274320"/>
           </a:xfrm>
           <a:prstGeom prst="rect">
             <a:avLst/>
@@ -7562,6 +8013,55 @@
           </a:bodyPr>
           <a:lstStyle/>
           <a:p>
+            <a:rPr sz="1200">
+              <a:latin typeface="Arial"/>
+              <a:ea typeface="Microsoft YaHei"/>
+              <a:sym typeface="Segoe UI Emoji"/>
+            </a:rPr>
+            <a:pPr algn="ctr">
+              <a:lnSpc>
+                <a:spcPct val="120000"/>
+              </a:lnSpc>
+              <a:defRPr sz="1400" b="0">
+                <a:solidFill>
+                  <a:srgbClr val="C62828"/>
+                </a:solidFill>
+                <a:latin typeface="Arial"/>
+              </a:defRPr>
+            </a:pPr>
+            <a:r>
+              <a:t>•</a:t>
+            </a:r>
+          </a:p>
+        </p:txBody>
+      </p:sp>
+      <p:sp>
+        <p:nvSpPr>
+          <p:cNvPr id="16" name="TextBox 15"/>
+          <p:cNvSpPr txBox="1"/>
+          <p:nvPr/>
+        </p:nvSpPr>
+        <p:spPr>
+          <a:xfrm>
+            <a:off x="3657600" y="2834640"/>
+            <a:ext cx="6400800" cy="274320"/>
+          </a:xfrm>
+          <a:prstGeom prst="rect">
+            <a:avLst/>
+          </a:prstGeom>
+          <a:noFill/>
+        </p:spPr>
+        <p:txBody>
+          <a:bodyPr wrap="square">
+            <a:spAutoFit/>
+          </a:bodyPr>
+          <a:lstStyle/>
+          <a:p>
+            <a:rPr sz="1200">
+              <a:latin typeface="Arial"/>
+              <a:ea typeface="Microsoft YaHei"/>
+              <a:sym typeface="Segoe UI Emoji"/>
+            </a:rPr>
             <a:pPr algn="l">
               <a:lnSpc>
                 <a:spcPct val="120000"/>
@@ -7581,13 +8081,13 @@
       </p:sp>
       <p:sp>
         <p:nvSpPr>
-          <p:cNvPr id="13" name="TextBox 12"/>
+          <p:cNvPr id="17" name="TextBox 16"/>
           <p:cNvSpPr txBox="1"/>
           <p:nvPr/>
         </p:nvSpPr>
         <p:spPr>
           <a:xfrm>
-            <a:off x="1828800" y="3246120"/>
+            <a:off x="1828800" y="3291840"/>
             <a:ext cx="1371600" cy="274320"/>
           </a:xfrm>
           <a:prstGeom prst="rect">
@@ -7601,13 +8101,18 @@
           </a:bodyPr>
           <a:lstStyle/>
           <a:p>
+            <a:rPr sz="1200">
+              <a:latin typeface="Arial"/>
+              <a:ea typeface="Microsoft YaHei"/>
+              <a:sym typeface="Segoe UI Emoji"/>
+            </a:rPr>
             <a:pPr algn="l">
               <a:lnSpc>
                 <a:spcPct val="120000"/>
               </a:lnSpc>
               <a:defRPr sz="1400" b="1">
                 <a:solidFill>
-                  <a:srgbClr val="C62828"/>
+                  <a:srgbClr val="1D3557"/>
                 </a:solidFill>
                 <a:latin typeface="Arial"/>
               </a:defRPr>
@@ -7620,14 +8125,14 @@
       </p:sp>
       <p:sp>
         <p:nvSpPr>
-          <p:cNvPr id="14" name="TextBox 13"/>
+          <p:cNvPr id="18" name="TextBox 17"/>
           <p:cNvSpPr txBox="1"/>
           <p:nvPr/>
         </p:nvSpPr>
         <p:spPr>
           <a:xfrm>
             <a:off x="3291840" y="3246120"/>
-            <a:ext cx="7315200" cy="274320"/>
+            <a:ext cx="274320" cy="274320"/>
           </a:xfrm>
           <a:prstGeom prst="rect">
             <a:avLst/>
@@ -7640,6 +8145,55 @@
           </a:bodyPr>
           <a:lstStyle/>
           <a:p>
+            <a:rPr sz="1200">
+              <a:latin typeface="Arial"/>
+              <a:ea typeface="Microsoft YaHei"/>
+              <a:sym typeface="Segoe UI Emoji"/>
+            </a:rPr>
+            <a:pPr algn="ctr">
+              <a:lnSpc>
+                <a:spcPct val="120000"/>
+              </a:lnSpc>
+              <a:defRPr sz="1400" b="0">
+                <a:solidFill>
+                  <a:srgbClr val="C62828"/>
+                </a:solidFill>
+                <a:latin typeface="Arial"/>
+              </a:defRPr>
+            </a:pPr>
+            <a:r>
+              <a:t>•</a:t>
+            </a:r>
+          </a:p>
+        </p:txBody>
+      </p:sp>
+      <p:sp>
+        <p:nvSpPr>
+          <p:cNvPr id="19" name="TextBox 18"/>
+          <p:cNvSpPr txBox="1"/>
+          <p:nvPr/>
+        </p:nvSpPr>
+        <p:spPr>
+          <a:xfrm>
+            <a:off x="3657600" y="3291840"/>
+            <a:ext cx="6400800" cy="274320"/>
+          </a:xfrm>
+          <a:prstGeom prst="rect">
+            <a:avLst/>
+          </a:prstGeom>
+          <a:noFill/>
+        </p:spPr>
+        <p:txBody>
+          <a:bodyPr wrap="square">
+            <a:spAutoFit/>
+          </a:bodyPr>
+          <a:lstStyle/>
+          <a:p>
+            <a:rPr sz="1200">
+              <a:latin typeface="Arial"/>
+              <a:ea typeface="Microsoft YaHei"/>
+              <a:sym typeface="Segoe UI Emoji"/>
+            </a:rPr>
             <a:pPr algn="l">
               <a:lnSpc>
                 <a:spcPct val="120000"/>
@@ -7659,13 +8213,13 @@
       </p:sp>
       <p:sp>
         <p:nvSpPr>
-          <p:cNvPr id="15" name="TextBox 14"/>
+          <p:cNvPr id="20" name="TextBox 19"/>
           <p:cNvSpPr txBox="1"/>
           <p:nvPr/>
         </p:nvSpPr>
         <p:spPr>
           <a:xfrm>
-            <a:off x="1828800" y="3657600"/>
+            <a:off x="1828800" y="3749039"/>
             <a:ext cx="1371600" cy="274320"/>
           </a:xfrm>
           <a:prstGeom prst="rect">
@@ -7679,13 +8233,18 @@
           </a:bodyPr>
           <a:lstStyle/>
           <a:p>
+            <a:rPr sz="1200">
+              <a:latin typeface="Arial"/>
+              <a:ea typeface="Microsoft YaHei"/>
+              <a:sym typeface="Segoe UI Emoji"/>
+            </a:rPr>
             <a:pPr algn="l">
               <a:lnSpc>
                 <a:spcPct val="120000"/>
               </a:lnSpc>
               <a:defRPr sz="1400" b="1">
                 <a:solidFill>
-                  <a:srgbClr val="C62828"/>
+                  <a:srgbClr val="1D3557"/>
                 </a:solidFill>
                 <a:latin typeface="Arial"/>
               </a:defRPr>
@@ -7698,14 +8257,14 @@
       </p:sp>
       <p:sp>
         <p:nvSpPr>
-          <p:cNvPr id="16" name="TextBox 15"/>
+          <p:cNvPr id="21" name="TextBox 20"/>
           <p:cNvSpPr txBox="1"/>
           <p:nvPr/>
         </p:nvSpPr>
         <p:spPr>
           <a:xfrm>
-            <a:off x="3291840" y="3657600"/>
-            <a:ext cx="7315200" cy="274320"/>
+            <a:off x="3291840" y="3703320"/>
+            <a:ext cx="274320" cy="274320"/>
           </a:xfrm>
           <a:prstGeom prst="rect">
             <a:avLst/>
@@ -7718,6 +8277,55 @@
           </a:bodyPr>
           <a:lstStyle/>
           <a:p>
+            <a:rPr sz="1200">
+              <a:latin typeface="Arial"/>
+              <a:ea typeface="Microsoft YaHei"/>
+              <a:sym typeface="Segoe UI Emoji"/>
+            </a:rPr>
+            <a:pPr algn="ctr">
+              <a:lnSpc>
+                <a:spcPct val="120000"/>
+              </a:lnSpc>
+              <a:defRPr sz="1400" b="0">
+                <a:solidFill>
+                  <a:srgbClr val="C62828"/>
+                </a:solidFill>
+                <a:latin typeface="Arial"/>
+              </a:defRPr>
+            </a:pPr>
+            <a:r>
+              <a:t>•</a:t>
+            </a:r>
+          </a:p>
+        </p:txBody>
+      </p:sp>
+      <p:sp>
+        <p:nvSpPr>
+          <p:cNvPr id="22" name="TextBox 21"/>
+          <p:cNvSpPr txBox="1"/>
+          <p:nvPr/>
+        </p:nvSpPr>
+        <p:spPr>
+          <a:xfrm>
+            <a:off x="3657600" y="3749039"/>
+            <a:ext cx="6400800" cy="274320"/>
+          </a:xfrm>
+          <a:prstGeom prst="rect">
+            <a:avLst/>
+          </a:prstGeom>
+          <a:noFill/>
+        </p:spPr>
+        <p:txBody>
+          <a:bodyPr wrap="square">
+            <a:spAutoFit/>
+          </a:bodyPr>
+          <a:lstStyle/>
+          <a:p>
+            <a:rPr sz="1200">
+              <a:latin typeface="Arial"/>
+              <a:ea typeface="Microsoft YaHei"/>
+              <a:sym typeface="Segoe UI Emoji"/>
+            </a:rPr>
             <a:pPr algn="l">
               <a:lnSpc>
                 <a:spcPct val="120000"/>
@@ -7737,13 +8345,13 @@
       </p:sp>
       <p:sp>
         <p:nvSpPr>
-          <p:cNvPr id="17" name="TextBox 16"/>
+          <p:cNvPr id="23" name="TextBox 22"/>
           <p:cNvSpPr txBox="1"/>
           <p:nvPr/>
         </p:nvSpPr>
         <p:spPr>
           <a:xfrm>
-            <a:off x="1828800" y="4069080"/>
+            <a:off x="1828800" y="4206240"/>
             <a:ext cx="1371600" cy="274320"/>
           </a:xfrm>
           <a:prstGeom prst="rect">
@@ -7757,13 +8365,18 @@
           </a:bodyPr>
           <a:lstStyle/>
           <a:p>
+            <a:rPr sz="1200">
+              <a:latin typeface="Arial"/>
+              <a:ea typeface="Microsoft YaHei"/>
+              <a:sym typeface="Segoe UI Emoji"/>
+            </a:rPr>
             <a:pPr algn="l">
               <a:lnSpc>
                 <a:spcPct val="120000"/>
               </a:lnSpc>
               <a:defRPr sz="1400" b="1">
                 <a:solidFill>
-                  <a:srgbClr val="C62828"/>
+                  <a:srgbClr val="1D3557"/>
                 </a:solidFill>
                 <a:latin typeface="Arial"/>
               </a:defRPr>
@@ -7776,14 +8389,14 @@
       </p:sp>
       <p:sp>
         <p:nvSpPr>
-          <p:cNvPr id="18" name="TextBox 17"/>
+          <p:cNvPr id="24" name="TextBox 23"/>
           <p:cNvSpPr txBox="1"/>
           <p:nvPr/>
         </p:nvSpPr>
         <p:spPr>
           <a:xfrm>
-            <a:off x="3291840" y="4069080"/>
-            <a:ext cx="7315200" cy="274320"/>
+            <a:off x="3291840" y="4160520"/>
+            <a:ext cx="274320" cy="274320"/>
           </a:xfrm>
           <a:prstGeom prst="rect">
             <a:avLst/>
@@ -7796,6 +8409,55 @@
           </a:bodyPr>
           <a:lstStyle/>
           <a:p>
+            <a:rPr sz="1200">
+              <a:latin typeface="Arial"/>
+              <a:ea typeface="Microsoft YaHei"/>
+              <a:sym typeface="Segoe UI Emoji"/>
+            </a:rPr>
+            <a:pPr algn="ctr">
+              <a:lnSpc>
+                <a:spcPct val="120000"/>
+              </a:lnSpc>
+              <a:defRPr sz="1400" b="0">
+                <a:solidFill>
+                  <a:srgbClr val="C62828"/>
+                </a:solidFill>
+                <a:latin typeface="Arial"/>
+              </a:defRPr>
+            </a:pPr>
+            <a:r>
+              <a:t>•</a:t>
+            </a:r>
+          </a:p>
+        </p:txBody>
+      </p:sp>
+      <p:sp>
+        <p:nvSpPr>
+          <p:cNvPr id="25" name="TextBox 24"/>
+          <p:cNvSpPr txBox="1"/>
+          <p:nvPr/>
+        </p:nvSpPr>
+        <p:spPr>
+          <a:xfrm>
+            <a:off x="3657600" y="4206240"/>
+            <a:ext cx="6400800" cy="274320"/>
+          </a:xfrm>
+          <a:prstGeom prst="rect">
+            <a:avLst/>
+          </a:prstGeom>
+          <a:noFill/>
+        </p:spPr>
+        <p:txBody>
+          <a:bodyPr wrap="square">
+            <a:spAutoFit/>
+          </a:bodyPr>
+          <a:lstStyle/>
+          <a:p>
+            <a:rPr sz="1200">
+              <a:latin typeface="Arial"/>
+              <a:ea typeface="Microsoft YaHei"/>
+              <a:sym typeface="Segoe UI Emoji"/>
+            </a:rPr>
             <a:pPr algn="l">
               <a:lnSpc>
                 <a:spcPct val="120000"/>
@@ -7847,7 +8509,7 @@
         <p:spPr>
           <a:xfrm>
             <a:off x="0" y="0"/>
-            <a:ext cx="7132320" cy="6858000"/>
+            <a:ext cx="12191695" cy="6858000"/>
           </a:xfrm>
           <a:prstGeom prst="rect">
             <a:avLst/>
@@ -7908,8 +8570,8 @@
         </p:nvSpPr>
         <p:spPr>
           <a:xfrm>
-            <a:off x="7680960" y="548640"/>
-            <a:ext cx="4144975" cy="548640"/>
+            <a:off x="7680960" y="457200"/>
+            <a:ext cx="4144975" cy="502920"/>
           </a:xfrm>
           <a:prstGeom prst="rect">
             <a:avLst/>
@@ -7922,11 +8584,16 @@
           </a:bodyPr>
           <a:lstStyle/>
           <a:p>
+            <a:rPr sz="1200">
+              <a:latin typeface="Arial"/>
+              <a:ea typeface="Microsoft YaHei"/>
+              <a:sym typeface="Segoe UI Emoji"/>
+            </a:rPr>
             <a:pPr algn="l">
               <a:lnSpc>
                 <a:spcPct val="120000"/>
               </a:lnSpc>
-              <a:defRPr sz="2800" b="1">
+              <a:defRPr sz="2600" b="1">
                 <a:solidFill>
                   <a:srgbClr val="F0EDE8"/>
                 </a:solidFill>
@@ -7947,8 +8614,8 @@
         </p:nvSpPr>
         <p:spPr>
           <a:xfrm>
-            <a:off x="7680960" y="1051560"/>
-            <a:ext cx="4144975" cy="411480"/>
+            <a:off x="7680960" y="960120"/>
+            <a:ext cx="4144975" cy="365760"/>
           </a:xfrm>
           <a:prstGeom prst="rect">
             <a:avLst/>
@@ -7961,13 +8628,18 @@
           </a:bodyPr>
           <a:lstStyle/>
           <a:p>
+            <a:rPr sz="1200">
+              <a:latin typeface="Arial"/>
+              <a:ea typeface="Microsoft YaHei"/>
+              <a:sym typeface="Segoe UI Emoji"/>
+            </a:rPr>
             <a:pPr algn="l">
               <a:lnSpc>
                 <a:spcPct val="120000"/>
               </a:lnSpc>
               <a:defRPr sz="1200" b="0">
                 <a:solidFill>
-                  <a:srgbClr val="A0AEBE"/>
+                  <a:srgbClr val="C0CCD8"/>
                 </a:solidFill>
                 <a:latin typeface="Arial"/>
               </a:defRPr>
@@ -7986,8 +8658,8 @@
         </p:nvSpPr>
         <p:spPr>
           <a:xfrm>
-            <a:off x="7680960" y="1600200"/>
-            <a:ext cx="2011680" cy="320040"/>
+            <a:off x="7680960" y="1463040"/>
+            <a:ext cx="2011680" cy="274320"/>
           </a:xfrm>
           <a:prstGeom prst="rect">
             <a:avLst/>
@@ -8000,11 +8672,16 @@
           </a:bodyPr>
           <a:lstStyle/>
           <a:p>
+            <a:rPr sz="1200">
+              <a:latin typeface="Arial"/>
+              <a:ea typeface="Microsoft YaHei"/>
+              <a:sym typeface="Segoe UI Emoji"/>
+            </a:rPr>
             <a:pPr algn="l">
               <a:lnSpc>
                 <a:spcPct val="120000"/>
               </a:lnSpc>
-              <a:defRPr sz="2600" b="1">
+              <a:defRPr sz="2400" b="1">
                 <a:solidFill>
                   <a:srgbClr val="E63946"/>
                 </a:solidFill>
@@ -8025,8 +8702,8 @@
         </p:nvSpPr>
         <p:spPr>
           <a:xfrm>
-            <a:off x="7680960" y="1874519"/>
-            <a:ext cx="2011680" cy="228600"/>
+            <a:off x="7680960" y="1719072"/>
+            <a:ext cx="2011680" cy="182880"/>
           </a:xfrm>
           <a:prstGeom prst="rect">
             <a:avLst/>
@@ -8039,13 +8716,18 @@
           </a:bodyPr>
           <a:lstStyle/>
           <a:p>
+            <a:rPr sz="1200">
+              <a:latin typeface="Arial"/>
+              <a:ea typeface="Microsoft YaHei"/>
+              <a:sym typeface="Segoe UI Emoji"/>
+            </a:rPr>
             <a:pPr algn="l">
               <a:lnSpc>
                 <a:spcPct val="120000"/>
               </a:lnSpc>
               <a:defRPr sz="1000" b="0">
                 <a:solidFill>
-                  <a:srgbClr val="B0BECC"/>
+                  <a:srgbClr val="C0CCD8"/>
                 </a:solidFill>
                 <a:latin typeface="Arial"/>
               </a:defRPr>
@@ -8064,8 +8746,8 @@
         </p:nvSpPr>
         <p:spPr>
           <a:xfrm>
-            <a:off x="9875520" y="1600200"/>
-            <a:ext cx="2011680" cy="320040"/>
+            <a:off x="9875520" y="1463040"/>
+            <a:ext cx="2011680" cy="274320"/>
           </a:xfrm>
           <a:prstGeom prst="rect">
             <a:avLst/>
@@ -8078,11 +8760,16 @@
           </a:bodyPr>
           <a:lstStyle/>
           <a:p>
+            <a:rPr sz="1200">
+              <a:latin typeface="Arial"/>
+              <a:ea typeface="Microsoft YaHei"/>
+              <a:sym typeface="Segoe UI Emoji"/>
+            </a:rPr>
             <a:pPr algn="l">
               <a:lnSpc>
                 <a:spcPct val="120000"/>
               </a:lnSpc>
-              <a:defRPr sz="2600" b="1">
+              <a:defRPr sz="2400" b="1">
                 <a:solidFill>
                   <a:srgbClr val="E63946"/>
                 </a:solidFill>
@@ -8103,8 +8790,8 @@
         </p:nvSpPr>
         <p:spPr>
           <a:xfrm>
-            <a:off x="9875520" y="1874519"/>
-            <a:ext cx="2011680" cy="228600"/>
+            <a:off x="9875520" y="1719072"/>
+            <a:ext cx="2011680" cy="182880"/>
           </a:xfrm>
           <a:prstGeom prst="rect">
             <a:avLst/>
@@ -8117,13 +8804,18 @@
           </a:bodyPr>
           <a:lstStyle/>
           <a:p>
+            <a:rPr sz="1200">
+              <a:latin typeface="Arial"/>
+              <a:ea typeface="Microsoft YaHei"/>
+              <a:sym typeface="Segoe UI Emoji"/>
+            </a:rPr>
             <a:pPr algn="l">
               <a:lnSpc>
                 <a:spcPct val="120000"/>
               </a:lnSpc>
               <a:defRPr sz="1000" b="0">
                 <a:solidFill>
-                  <a:srgbClr val="B0BECC"/>
+                  <a:srgbClr val="C0CCD8"/>
                 </a:solidFill>
                 <a:latin typeface="Arial"/>
               </a:defRPr>
@@ -8142,8 +8834,8 @@
         </p:nvSpPr>
         <p:spPr>
           <a:xfrm>
-            <a:off x="7680960" y="2194560"/>
-            <a:ext cx="2011680" cy="320040"/>
+            <a:off x="7680960" y="2011680"/>
+            <a:ext cx="2011680" cy="274320"/>
           </a:xfrm>
           <a:prstGeom prst="rect">
             <a:avLst/>
@@ -8156,11 +8848,16 @@
           </a:bodyPr>
           <a:lstStyle/>
           <a:p>
+            <a:rPr sz="1200">
+              <a:latin typeface="Arial"/>
+              <a:ea typeface="Microsoft YaHei"/>
+              <a:sym typeface="Segoe UI Emoji"/>
+            </a:rPr>
             <a:pPr algn="l">
               <a:lnSpc>
                 <a:spcPct val="120000"/>
               </a:lnSpc>
-              <a:defRPr sz="2600" b="1">
+              <a:defRPr sz="2400" b="1">
                 <a:solidFill>
                   <a:srgbClr val="E63946"/>
                 </a:solidFill>
@@ -8181,8 +8878,8 @@
         </p:nvSpPr>
         <p:spPr>
           <a:xfrm>
-            <a:off x="7680960" y="2468879"/>
-            <a:ext cx="2011680" cy="228600"/>
+            <a:off x="7680960" y="2267712"/>
+            <a:ext cx="2011680" cy="182880"/>
           </a:xfrm>
           <a:prstGeom prst="rect">
             <a:avLst/>
@@ -8195,13 +8892,18 @@
           </a:bodyPr>
           <a:lstStyle/>
           <a:p>
+            <a:rPr sz="1200">
+              <a:latin typeface="Arial"/>
+              <a:ea typeface="Microsoft YaHei"/>
+              <a:sym typeface="Segoe UI Emoji"/>
+            </a:rPr>
             <a:pPr algn="l">
               <a:lnSpc>
                 <a:spcPct val="120000"/>
               </a:lnSpc>
               <a:defRPr sz="1000" b="0">
                 <a:solidFill>
-                  <a:srgbClr val="B0BECC"/>
+                  <a:srgbClr val="C0CCD8"/>
                 </a:solidFill>
                 <a:latin typeface="Arial"/>
               </a:defRPr>
@@ -8220,8 +8922,8 @@
         </p:nvSpPr>
         <p:spPr>
           <a:xfrm>
-            <a:off x="9875520" y="2194560"/>
-            <a:ext cx="2011680" cy="320040"/>
+            <a:off x="9875520" y="2011680"/>
+            <a:ext cx="2011680" cy="274320"/>
           </a:xfrm>
           <a:prstGeom prst="rect">
             <a:avLst/>
@@ -8234,11 +8936,16 @@
           </a:bodyPr>
           <a:lstStyle/>
           <a:p>
+            <a:rPr sz="1200">
+              <a:latin typeface="Arial"/>
+              <a:ea typeface="Microsoft YaHei"/>
+              <a:sym typeface="Segoe UI Emoji"/>
+            </a:rPr>
             <a:pPr algn="l">
               <a:lnSpc>
                 <a:spcPct val="120000"/>
               </a:lnSpc>
-              <a:defRPr sz="2600" b="1">
+              <a:defRPr sz="2400" b="1">
                 <a:solidFill>
                   <a:srgbClr val="E63946"/>
                 </a:solidFill>
@@ -8259,8 +8966,8 @@
         </p:nvSpPr>
         <p:spPr>
           <a:xfrm>
-            <a:off x="9875520" y="2468879"/>
-            <a:ext cx="2011680" cy="228600"/>
+            <a:off x="9875520" y="2267712"/>
+            <a:ext cx="2011680" cy="182880"/>
           </a:xfrm>
           <a:prstGeom prst="rect">
             <a:avLst/>
@@ -8273,13 +8980,18 @@
           </a:bodyPr>
           <a:lstStyle/>
           <a:p>
+            <a:rPr sz="1200">
+              <a:latin typeface="Arial"/>
+              <a:ea typeface="Microsoft YaHei"/>
+              <a:sym typeface="Segoe UI Emoji"/>
+            </a:rPr>
             <a:pPr algn="l">
               <a:lnSpc>
                 <a:spcPct val="120000"/>
               </a:lnSpc>
               <a:defRPr sz="1000" b="0">
                 <a:solidFill>
-                  <a:srgbClr val="B0BECC"/>
+                  <a:srgbClr val="C0CCD8"/>
                 </a:solidFill>
                 <a:latin typeface="Arial"/>
               </a:defRPr>
@@ -8298,8 +9010,8 @@
         </p:nvSpPr>
         <p:spPr>
           <a:xfrm>
-            <a:off x="7680960" y="2697480"/>
-            <a:ext cx="73152" cy="548640"/>
+            <a:off x="7680960" y="2743200"/>
+            <a:ext cx="54864" cy="502920"/>
           </a:xfrm>
           <a:prstGeom prst="rect">
             <a:avLst/>
@@ -8343,7 +9055,7 @@
         </p:nvSpPr>
         <p:spPr>
           <a:xfrm>
-            <a:off x="7955279" y="2697480"/>
+            <a:off x="7909560" y="2724912"/>
             <a:ext cx="3779215" cy="274320"/>
           </a:xfrm>
           <a:prstGeom prst="rect">
@@ -8357,6 +9069,11 @@
           </a:bodyPr>
           <a:lstStyle/>
           <a:p>
+            <a:rPr sz="1200">
+              <a:latin typeface="Arial"/>
+              <a:ea typeface="Microsoft YaHei"/>
+              <a:sym typeface="Segoe UI Emoji"/>
+            </a:rPr>
             <a:pPr algn="l">
               <a:lnSpc>
                 <a:spcPct val="120000"/>
@@ -8382,8 +9099,8 @@
         </p:nvSpPr>
         <p:spPr>
           <a:xfrm>
-            <a:off x="7955279" y="2999232"/>
-            <a:ext cx="3779215" cy="502920"/>
+            <a:off x="7909560" y="2999232"/>
+            <a:ext cx="3779215" cy="548640"/>
           </a:xfrm>
           <a:prstGeom prst="rect">
             <a:avLst/>
@@ -8396,6 +9113,11 @@
           </a:bodyPr>
           <a:lstStyle/>
           <a:p>
+            <a:rPr sz="1200">
+              <a:latin typeface="Arial"/>
+              <a:ea typeface="Microsoft YaHei"/>
+              <a:sym typeface="Segoe UI Emoji"/>
+            </a:rPr>
             <a:pPr algn="l">
               <a:lnSpc>
                 <a:spcPct val="135000"/>
@@ -8425,8 +9147,8 @@
         </p:nvSpPr>
         <p:spPr>
           <a:xfrm>
-            <a:off x="7680960" y="3749040"/>
-            <a:ext cx="73152" cy="548640"/>
+            <a:off x="7680960" y="3749039"/>
+            <a:ext cx="54864" cy="502920"/>
           </a:xfrm>
           <a:prstGeom prst="rect">
             <a:avLst/>
@@ -8470,7 +9192,7 @@
         </p:nvSpPr>
         <p:spPr>
           <a:xfrm>
-            <a:off x="7955279" y="3749040"/>
+            <a:off x="7909560" y="3730752"/>
             <a:ext cx="3779215" cy="274320"/>
           </a:xfrm>
           <a:prstGeom prst="rect">
@@ -8484,6 +9206,11 @@
           </a:bodyPr>
           <a:lstStyle/>
           <a:p>
+            <a:rPr sz="1200">
+              <a:latin typeface="Arial"/>
+              <a:ea typeface="Microsoft YaHei"/>
+              <a:sym typeface="Segoe UI Emoji"/>
+            </a:rPr>
             <a:pPr algn="l">
               <a:lnSpc>
                 <a:spcPct val="120000"/>
@@ -8509,8 +9236,8 @@
         </p:nvSpPr>
         <p:spPr>
           <a:xfrm>
-            <a:off x="7955279" y="4050792"/>
-            <a:ext cx="3779215" cy="502920"/>
+            <a:off x="7909560" y="4005072"/>
+            <a:ext cx="3779215" cy="548640"/>
           </a:xfrm>
           <a:prstGeom prst="rect">
             <a:avLst/>
@@ -8523,6 +9250,11 @@
           </a:bodyPr>
           <a:lstStyle/>
           <a:p>
+            <a:rPr sz="1200">
+              <a:latin typeface="Arial"/>
+              <a:ea typeface="Microsoft YaHei"/>
+              <a:sym typeface="Segoe UI Emoji"/>
+            </a:rPr>
             <a:pPr algn="l">
               <a:lnSpc>
                 <a:spcPct val="135000"/>
@@ -8685,7 +9417,7 @@
         <p:spPr>
           <a:xfrm>
             <a:off x="1097280" y="457200"/>
-            <a:ext cx="9601200" cy="640080"/>
+            <a:ext cx="9601200" cy="594360"/>
           </a:xfrm>
           <a:prstGeom prst="rect">
             <a:avLst/>
@@ -8698,11 +9430,16 @@
           </a:bodyPr>
           <a:lstStyle/>
           <a:p>
+            <a:rPr sz="1200">
+              <a:latin typeface="Arial"/>
+              <a:ea typeface="Microsoft YaHei"/>
+              <a:sym typeface="Segoe UI Emoji"/>
+            </a:rPr>
             <a:pPr algn="l">
               <a:lnSpc>
                 <a:spcPct val="120000"/>
               </a:lnSpc>
-              <a:defRPr sz="3600" b="1">
+              <a:defRPr sz="3400" b="1">
                 <a:solidFill>
                   <a:srgbClr val="1A2A3A"/>
                 </a:solidFill>
@@ -8737,11 +9474,16 @@
           </a:bodyPr>
           <a:lstStyle/>
           <a:p>
+            <a:rPr sz="1200">
+              <a:latin typeface="Arial"/>
+              <a:ea typeface="Microsoft YaHei"/>
+              <a:sym typeface="Segoe UI Emoji"/>
+            </a:rPr>
             <a:pPr algn="l">
               <a:lnSpc>
                 <a:spcPct val="120000"/>
               </a:lnSpc>
-              <a:defRPr sz="1400" b="0">
+              <a:defRPr sz="1300" b="0">
                 <a:solidFill>
                   <a:srgbClr val="2A3A4A"/>
                 </a:solidFill>
@@ -8762,8 +9504,8 @@
         </p:nvSpPr>
         <p:spPr>
           <a:xfrm>
-            <a:off x="1097280" y="4023360"/>
-            <a:ext cx="4572000" cy="1828800"/>
+            <a:off x="1097280" y="4114800"/>
+            <a:ext cx="4572000" cy="1737360"/>
           </a:xfrm>
           <a:prstGeom prst="rect">
             <a:avLst/>
@@ -8807,7 +9549,7 @@
         </p:nvSpPr>
         <p:spPr>
           <a:xfrm>
-            <a:off x="1325880" y="4160520"/>
+            <a:off x="1325880" y="4251960"/>
             <a:ext cx="4114800" cy="320040"/>
           </a:xfrm>
           <a:prstGeom prst="rect">
@@ -8821,6 +9563,11 @@
           </a:bodyPr>
           <a:lstStyle/>
           <a:p>
+            <a:rPr sz="1200">
+              <a:latin typeface="Arial"/>
+              <a:ea typeface="Microsoft YaHei"/>
+              <a:sym typeface="Segoe UI Emoji"/>
+            </a:rPr>
             <a:pPr algn="l">
               <a:lnSpc>
                 <a:spcPct val="120000"/>
@@ -8846,8 +9593,8 @@
         </p:nvSpPr>
         <p:spPr>
           <a:xfrm>
-            <a:off x="1325880" y="4526280"/>
-            <a:ext cx="4114800" cy="1188720"/>
+            <a:off x="1325880" y="4617720"/>
+            <a:ext cx="4114800" cy="1097280"/>
           </a:xfrm>
           <a:prstGeom prst="rect">
             <a:avLst/>
@@ -8860,6 +9607,11 @@
           </a:bodyPr>
           <a:lstStyle/>
           <a:p>
+            <a:rPr sz="1200">
+              <a:latin typeface="Arial"/>
+              <a:ea typeface="Microsoft YaHei"/>
+              <a:sym typeface="Segoe UI Emoji"/>
+            </a:rPr>
             <a:pPr algn="l">
               <a:lnSpc>
                 <a:spcPct val="140000"/>
@@ -8893,8 +9645,8 @@
         </p:nvSpPr>
         <p:spPr>
           <a:xfrm>
-            <a:off x="6035040" y="4023360"/>
-            <a:ext cx="4572000" cy="1828800"/>
+            <a:off x="6035040" y="4114800"/>
+            <a:ext cx="4572000" cy="1737360"/>
           </a:xfrm>
           <a:prstGeom prst="rect">
             <a:avLst/>
@@ -8938,7 +9690,7 @@
         </p:nvSpPr>
         <p:spPr>
           <a:xfrm>
-            <a:off x="6263640" y="4160520"/>
+            <a:off x="6263640" y="4251960"/>
             <a:ext cx="4114800" cy="320040"/>
           </a:xfrm>
           <a:prstGeom prst="rect">
@@ -8952,6 +9704,11 @@
           </a:bodyPr>
           <a:lstStyle/>
           <a:p>
+            <a:rPr sz="1200">
+              <a:latin typeface="Arial"/>
+              <a:ea typeface="Microsoft YaHei"/>
+              <a:sym typeface="Segoe UI Emoji"/>
+            </a:rPr>
             <a:pPr algn="l">
               <a:lnSpc>
                 <a:spcPct val="120000"/>
@@ -8977,8 +9734,8 @@
         </p:nvSpPr>
         <p:spPr>
           <a:xfrm>
-            <a:off x="6263640" y="4526280"/>
-            <a:ext cx="4114800" cy="1188720"/>
+            <a:off x="6263640" y="4617720"/>
+            <a:ext cx="4114800" cy="1097280"/>
           </a:xfrm>
           <a:prstGeom prst="rect">
             <a:avLst/>
@@ -8991,6 +9748,11 @@
           </a:bodyPr>
           <a:lstStyle/>
           <a:p>
+            <a:rPr sz="1200">
+              <a:latin typeface="Arial"/>
+              <a:ea typeface="Microsoft YaHei"/>
+              <a:sym typeface="Segoe UI Emoji"/>
+            </a:rPr>
             <a:pPr algn="l">
               <a:lnSpc>
                 <a:spcPct val="140000"/>
@@ -9008,10 +9770,6 @@
             <a:br/>
             <a:r>
               <a:t>QS全球前10 · 14位诺贝尔奖得主</a:t>
-            </a:r>
-            <a:br/>
-            <a:r>
-              <a:t>位于伦敦南肯辛顿</a:t>
             </a:r>
           </a:p>
         </p:txBody>

--- a/走近英国.pptx
+++ b/走近英国.pptx
@@ -3099,7 +3099,7 @@
       </p:nvGrpSpPr>
       <p:pic>
         <p:nvPicPr>
-          <p:cNvPr id="2" name="Picture 1" descr="uk_big_ben.jpg"/>
+          <p:cNvPr id="2" name="Picture 1" descr="uk_cover_new.jpg"/>
           <p:cNvPicPr>
             <a:picLocks noChangeAspect="1"/>
           </p:cNvPicPr>
@@ -3452,7 +3452,7 @@
       </p:nvGrpSpPr>
       <p:pic>
         <p:nvPicPr>
-          <p:cNvPr id="2" name="Picture 1" descr="uk_big_ben.jpg"/>
+          <p:cNvPr id="2" name="Picture 1" descr="uk_global_new.jpg"/>
           <p:cNvPicPr>
             <a:picLocks noChangeAspect="1"/>
           </p:cNvPicPr>
@@ -3826,7 +3826,7 @@
               </a:defRPr>
             </a:pPr>
             <a:r>
-              <a:t>BBC 覆盖 3.5 亿用户</a:t>
+              <a:t>BBC 每周覆盖超 4.9 亿用户（2024年）</a:t>
             </a:r>
             <a:br/>
             <a:r>
@@ -8953,7 +8953,7 @@
               </a:defRPr>
             </a:pPr>
             <a:r>
-              <a:t>800+</a:t>
+              <a:t>900+</a:t>
             </a:r>
           </a:p>
         </p:txBody>
@@ -8997,7 +8997,7 @@
               </a:defRPr>
             </a:pPr>
             <a:r>
-              <a:t>年牛津历史</a:t>
+              <a:t>年历史 · 牛津1096年建校</a:t>
             </a:r>
           </a:p>
         </p:txBody>
